--- a/Azure_Bootcamp_Complete.pptx
+++ b/Azure_Bootcamp_Complete.pptx
@@ -136,7 +136,16 @@
                 </a:solidFill>
                 <a:latin typeface="Arial"/>
               </a:rPr>
-              <a:t>Click to edit the notes format</a:t>
+              <a:t>Click to edit the notes </a:t>
+            </a:r>
+            <a:r>
+              <a:rPr b="0" lang="en-US" sz="2000" spc="-1" strike="noStrike">
+                <a:solidFill>
+                  <a:srgbClr val="000000"/>
+                </a:solidFill>
+                <a:latin typeface="Arial"/>
+              </a:rPr>
+              <a:t>format</a:t>
             </a:r>
             <a:endParaRPr b="0" lang="en-US" sz="2000" spc="-1" strike="noStrike">
               <a:solidFill>
@@ -358,7 +367,7 @@
             <a:pPr indent="0" algn="r">
               <a:buNone/>
             </a:pPr>
-            <a:fld id="{21F1928E-BE08-4CB3-9D74-790FACCC1C1F}" type="slidenum">
+            <a:fld id="{945EC0E8-2D1A-4B91-AC46-B1CBDC51222F}" type="slidenum">
               <a:rPr b="0" lang="en-US" sz="1400" spc="-1" strike="noStrike">
                 <a:solidFill>
                   <a:srgbClr val="000000"/>
@@ -412,7 +421,7 @@
         <p:spPr>
           <a:xfrm>
             <a:off x="685800" y="1143000"/>
-            <a:ext cx="5484600" cy="3084480"/>
+            <a:ext cx="5484240" cy="3084120"/>
           </a:xfrm>
           <a:prstGeom prst="rect">
             <a:avLst/>
@@ -435,7 +444,7 @@
         <p:spPr>
           <a:xfrm>
             <a:off x="685800" y="4400640"/>
-            <a:ext cx="5484600" cy="3598560"/>
+            <a:ext cx="5484240" cy="3598200"/>
           </a:xfrm>
           <a:prstGeom prst="rect">
             <a:avLst/>
@@ -475,7 +484,7 @@
         <p:spPr>
           <a:xfrm>
             <a:off x="3884760" y="8685360"/>
-            <a:ext cx="2970000" cy="456840"/>
+            <a:ext cx="2969640" cy="456480"/>
           </a:xfrm>
           <a:prstGeom prst="rect">
             <a:avLst/>
@@ -517,7 +526,7 @@
                 <a:tab algn="l" pos="0"/>
               </a:tabLst>
             </a:pPr>
-            <a:fld id="{ED992C9B-8542-40B1-A696-E84CC2FACC42}" type="slidenum">
+            <a:fld id="{304DC81D-4996-4A39-B3D8-DED1B6B68BC8}" type="slidenum">
               <a:rPr b="0" lang="en-US" sz="1200" spc="-1" strike="noStrike">
                 <a:solidFill>
                   <a:schemeClr val="dk1"/>
@@ -571,7 +580,7 @@
         <p:spPr>
           <a:xfrm>
             <a:off x="685800" y="1143000"/>
-            <a:ext cx="5484600" cy="3084480"/>
+            <a:ext cx="5484240" cy="3084120"/>
           </a:xfrm>
           <a:prstGeom prst="rect">
             <a:avLst/>
@@ -594,7 +603,7 @@
         <p:spPr>
           <a:xfrm>
             <a:off x="685800" y="4400640"/>
-            <a:ext cx="5484600" cy="3598560"/>
+            <a:ext cx="5484240" cy="3598200"/>
           </a:xfrm>
           <a:prstGeom prst="rect">
             <a:avLst/>
@@ -634,7 +643,7 @@
         <p:spPr>
           <a:xfrm>
             <a:off x="3884760" y="8685360"/>
-            <a:ext cx="2970000" cy="456840"/>
+            <a:ext cx="2969640" cy="456480"/>
           </a:xfrm>
           <a:prstGeom prst="rect">
             <a:avLst/>
@@ -676,7 +685,7 @@
                 <a:tab algn="l" pos="0"/>
               </a:tabLst>
             </a:pPr>
-            <a:fld id="{34B3F75F-7FEB-4030-B66E-D14387E832AD}" type="slidenum">
+            <a:fld id="{D458ED65-3187-4B03-8A07-0E1F536361FD}" type="slidenum">
               <a:rPr b="0" lang="en-US" sz="1200" spc="-1" strike="noStrike">
                 <a:solidFill>
                   <a:schemeClr val="dk1"/>
@@ -730,7 +739,7 @@
         <p:spPr>
           <a:xfrm>
             <a:off x="685800" y="1143000"/>
-            <a:ext cx="5484600" cy="3084480"/>
+            <a:ext cx="5484240" cy="3084120"/>
           </a:xfrm>
           <a:prstGeom prst="rect">
             <a:avLst/>
@@ -753,7 +762,7 @@
         <p:spPr>
           <a:xfrm>
             <a:off x="685800" y="4400640"/>
-            <a:ext cx="5484600" cy="3598560"/>
+            <a:ext cx="5484240" cy="3598200"/>
           </a:xfrm>
           <a:prstGeom prst="rect">
             <a:avLst/>
@@ -793,7 +802,7 @@
         <p:spPr>
           <a:xfrm>
             <a:off x="3884760" y="8685360"/>
-            <a:ext cx="2970000" cy="456840"/>
+            <a:ext cx="2969640" cy="456480"/>
           </a:xfrm>
           <a:prstGeom prst="rect">
             <a:avLst/>
@@ -835,7 +844,7 @@
                 <a:tab algn="l" pos="0"/>
               </a:tabLst>
             </a:pPr>
-            <a:fld id="{1B52D4D3-66FD-494D-9C4D-0A6E271F279C}" type="slidenum">
+            <a:fld id="{1EAC19BC-7905-4D00-87C6-B6D478915F08}" type="slidenum">
               <a:rPr b="0" lang="en-US" sz="1200" spc="-1" strike="noStrike">
                 <a:solidFill>
                   <a:schemeClr val="dk1"/>
@@ -889,7 +898,7 @@
         <p:spPr>
           <a:xfrm>
             <a:off x="685800" y="1143000"/>
-            <a:ext cx="5484600" cy="3084480"/>
+            <a:ext cx="5484240" cy="3084120"/>
           </a:xfrm>
           <a:prstGeom prst="rect">
             <a:avLst/>
@@ -912,7 +921,7 @@
         <p:spPr>
           <a:xfrm>
             <a:off x="685800" y="4400640"/>
-            <a:ext cx="5484600" cy="3598560"/>
+            <a:ext cx="5484240" cy="3598200"/>
           </a:xfrm>
           <a:prstGeom prst="rect">
             <a:avLst/>
@@ -952,7 +961,7 @@
         <p:spPr>
           <a:xfrm>
             <a:off x="3884760" y="8685360"/>
-            <a:ext cx="2970000" cy="456840"/>
+            <a:ext cx="2969640" cy="456480"/>
           </a:xfrm>
           <a:prstGeom prst="rect">
             <a:avLst/>
@@ -994,7 +1003,7 @@
                 <a:tab algn="l" pos="0"/>
               </a:tabLst>
             </a:pPr>
-            <a:fld id="{77FC4548-09AB-457A-9583-34AB6C49356F}" type="slidenum">
+            <a:fld id="{34A49ED7-0656-4493-A4F3-4602F6666FDC}" type="slidenum">
               <a:rPr b="0" lang="en-US" sz="1200" spc="-1" strike="noStrike">
                 <a:solidFill>
                   <a:schemeClr val="dk1"/>
@@ -1048,7 +1057,7 @@
         <p:spPr>
           <a:xfrm>
             <a:off x="685800" y="1143000"/>
-            <a:ext cx="5484600" cy="3084480"/>
+            <a:ext cx="5484240" cy="3084120"/>
           </a:xfrm>
           <a:prstGeom prst="rect">
             <a:avLst/>
@@ -1071,7 +1080,7 @@
         <p:spPr>
           <a:xfrm>
             <a:off x="685800" y="4400640"/>
-            <a:ext cx="5484600" cy="3598560"/>
+            <a:ext cx="5484240" cy="3598200"/>
           </a:xfrm>
           <a:prstGeom prst="rect">
             <a:avLst/>
@@ -1111,7 +1120,7 @@
         <p:spPr>
           <a:xfrm>
             <a:off x="3884760" y="8685360"/>
-            <a:ext cx="2970000" cy="456840"/>
+            <a:ext cx="2969640" cy="456480"/>
           </a:xfrm>
           <a:prstGeom prst="rect">
             <a:avLst/>
@@ -1153,7 +1162,7 @@
                 <a:tab algn="l" pos="0"/>
               </a:tabLst>
             </a:pPr>
-            <a:fld id="{8CF1F9DE-0D6E-4C69-B0C8-83CFE33A4160}" type="slidenum">
+            <a:fld id="{022984FB-3CC6-40BA-B432-B25030467DEC}" type="slidenum">
               <a:rPr b="0" lang="en-US" sz="1200" spc="-1" strike="noStrike">
                 <a:solidFill>
                   <a:schemeClr val="dk1"/>
@@ -1207,7 +1216,7 @@
         <p:spPr>
           <a:xfrm>
             <a:off x="685800" y="1143000"/>
-            <a:ext cx="5484600" cy="3084480"/>
+            <a:ext cx="5484240" cy="3084120"/>
           </a:xfrm>
           <a:prstGeom prst="rect">
             <a:avLst/>
@@ -1230,7 +1239,7 @@
         <p:spPr>
           <a:xfrm>
             <a:off x="685800" y="4400640"/>
-            <a:ext cx="5484600" cy="3598560"/>
+            <a:ext cx="5484240" cy="3598200"/>
           </a:xfrm>
           <a:prstGeom prst="rect">
             <a:avLst/>
@@ -1270,7 +1279,7 @@
         <p:spPr>
           <a:xfrm>
             <a:off x="3884760" y="8685360"/>
-            <a:ext cx="2970000" cy="456840"/>
+            <a:ext cx="2969640" cy="456480"/>
           </a:xfrm>
           <a:prstGeom prst="rect">
             <a:avLst/>
@@ -1312,7 +1321,7 @@
                 <a:tab algn="l" pos="0"/>
               </a:tabLst>
             </a:pPr>
-            <a:fld id="{D48D52CB-4105-48FE-87FD-26BE317DDF79}" type="slidenum">
+            <a:fld id="{2BA5CF42-954A-438C-92FE-34CEAFC328C7}" type="slidenum">
               <a:rPr b="0" lang="en-US" sz="1200" spc="-1" strike="noStrike">
                 <a:solidFill>
                   <a:schemeClr val="dk1"/>
@@ -1420,7 +1429,16 @@
                 </a:solidFill>
                 <a:latin typeface="Arial"/>
               </a:rPr>
-              <a:t>Click to edit the title text format</a:t>
+              <a:t>Click to edit the title text </a:t>
+            </a:r>
+            <a:r>
+              <a:rPr b="0" lang="en-US" sz="4400" spc="-1" strike="noStrike">
+                <a:solidFill>
+                  <a:srgbClr val="000000"/>
+                </a:solidFill>
+                <a:latin typeface="Arial"/>
+              </a:rPr>
+              <a:t>format</a:t>
             </a:r>
             <a:endParaRPr b="0" lang="en-US" sz="4400" spc="-1" strike="noStrike">
               <a:solidFill>
@@ -1698,7 +1716,7 @@
         <p:spPr>
           <a:xfrm>
             <a:off x="0" y="0"/>
-            <a:ext cx="52920" cy="5142240"/>
+            <a:ext cx="52560" cy="5141880"/>
           </a:xfrm>
           <a:prstGeom prst="rect">
             <a:avLst/>
@@ -1750,7 +1768,7 @@
         <p:spPr>
           <a:xfrm>
             <a:off x="274320" y="228600"/>
-            <a:ext cx="4398480" cy="235800"/>
+            <a:ext cx="4398120" cy="235440"/>
           </a:xfrm>
           <a:prstGeom prst="rect">
             <a:avLst/>
@@ -1777,7 +1795,7 @@
               </a:lnSpc>
             </a:pPr>
             <a:r>
-              <a:rPr b="1" lang="en-US" sz="850" spc="335" strike="noStrike">
+              <a:rPr b="1" lang="en-US" sz="850" spc="333" strike="noStrike">
                 <a:solidFill>
                   <a:srgbClr val="f5a623"/>
                 </a:solidFill>
@@ -1803,7 +1821,7 @@
         <p:spPr>
           <a:xfrm>
             <a:off x="274320" y="530280"/>
-            <a:ext cx="4498920" cy="598680"/>
+            <a:ext cx="4498560" cy="598320"/>
           </a:xfrm>
           <a:prstGeom prst="rect">
             <a:avLst/>
@@ -1856,7 +1874,7 @@
         <p:spPr>
           <a:xfrm>
             <a:off x="274320" y="1090440"/>
-            <a:ext cx="4498920" cy="659520"/>
+            <a:ext cx="4498560" cy="659160"/>
           </a:xfrm>
           <a:prstGeom prst="rect">
             <a:avLst/>
@@ -1909,7 +1927,7 @@
         <p:spPr>
           <a:xfrm>
             <a:off x="334800" y="1830600"/>
-            <a:ext cx="4498920" cy="299160"/>
+            <a:ext cx="4498560" cy="298800"/>
           </a:xfrm>
           <a:prstGeom prst="rect">
             <a:avLst/>
@@ -1962,7 +1980,7 @@
         <p:spPr>
           <a:xfrm>
             <a:off x="334800" y="2105640"/>
-            <a:ext cx="4498920" cy="278640"/>
+            <a:ext cx="4498560" cy="278280"/>
           </a:xfrm>
           <a:prstGeom prst="rect">
             <a:avLst/>
@@ -2015,7 +2033,7 @@
         <p:spPr>
           <a:xfrm>
             <a:off x="334800" y="2559960"/>
-            <a:ext cx="978480" cy="878400"/>
+            <a:ext cx="978120" cy="878040"/>
           </a:xfrm>
           <a:prstGeom prst="roundRect">
             <a:avLst>
@@ -2069,7 +2087,7 @@
         <p:spPr>
           <a:xfrm>
             <a:off x="334800" y="2649960"/>
-            <a:ext cx="978480" cy="418680"/>
+            <a:ext cx="978120" cy="418320"/>
           </a:xfrm>
           <a:prstGeom prst="rect">
             <a:avLst/>
@@ -2122,7 +2140,7 @@
         <p:spPr>
           <a:xfrm>
             <a:off x="334800" y="3089880"/>
-            <a:ext cx="978480" cy="238680"/>
+            <a:ext cx="978120" cy="238320"/>
           </a:xfrm>
           <a:prstGeom prst="rect">
             <a:avLst/>
@@ -2175,7 +2193,7 @@
         <p:spPr>
           <a:xfrm>
             <a:off x="1419840" y="2559960"/>
-            <a:ext cx="978480" cy="878400"/>
+            <a:ext cx="978120" cy="878040"/>
           </a:xfrm>
           <a:prstGeom prst="roundRect">
             <a:avLst>
@@ -2229,7 +2247,7 @@
         <p:spPr>
           <a:xfrm>
             <a:off x="1419840" y="2649960"/>
-            <a:ext cx="978480" cy="418680"/>
+            <a:ext cx="978120" cy="418320"/>
           </a:xfrm>
           <a:prstGeom prst="rect">
             <a:avLst/>
@@ -2282,7 +2300,7 @@
         <p:spPr>
           <a:xfrm>
             <a:off x="1419840" y="3089880"/>
-            <a:ext cx="978480" cy="238680"/>
+            <a:ext cx="978120" cy="238320"/>
           </a:xfrm>
           <a:prstGeom prst="rect">
             <a:avLst/>
@@ -2335,7 +2353,7 @@
         <p:spPr>
           <a:xfrm>
             <a:off x="2504880" y="2559960"/>
-            <a:ext cx="978480" cy="878400"/>
+            <a:ext cx="978120" cy="878040"/>
           </a:xfrm>
           <a:prstGeom prst="roundRect">
             <a:avLst>
@@ -2389,7 +2407,7 @@
         <p:spPr>
           <a:xfrm>
             <a:off x="2504880" y="2649960"/>
-            <a:ext cx="978480" cy="418680"/>
+            <a:ext cx="978120" cy="418320"/>
           </a:xfrm>
           <a:prstGeom prst="rect">
             <a:avLst/>
@@ -2442,7 +2460,7 @@
         <p:spPr>
           <a:xfrm>
             <a:off x="2504880" y="3089880"/>
-            <a:ext cx="978480" cy="238680"/>
+            <a:ext cx="978120" cy="238320"/>
           </a:xfrm>
           <a:prstGeom prst="rect">
             <a:avLst/>
@@ -2495,7 +2513,7 @@
         <p:spPr>
           <a:xfrm>
             <a:off x="3589920" y="2559960"/>
-            <a:ext cx="978480" cy="878400"/>
+            <a:ext cx="978120" cy="878040"/>
           </a:xfrm>
           <a:prstGeom prst="roundRect">
             <a:avLst>
@@ -2549,7 +2567,7 @@
         <p:spPr>
           <a:xfrm>
             <a:off x="3589920" y="2649960"/>
-            <a:ext cx="978480" cy="418680"/>
+            <a:ext cx="978120" cy="418320"/>
           </a:xfrm>
           <a:prstGeom prst="rect">
             <a:avLst/>
@@ -2602,7 +2620,7 @@
         <p:spPr>
           <a:xfrm>
             <a:off x="3589920" y="3089880"/>
-            <a:ext cx="978480" cy="238680"/>
+            <a:ext cx="978120" cy="238320"/>
           </a:xfrm>
           <a:prstGeom prst="rect">
             <a:avLst/>
@@ -2655,7 +2673,7 @@
         <p:spPr>
           <a:xfrm>
             <a:off x="334800" y="3619800"/>
-            <a:ext cx="4281480" cy="1440"/>
+            <a:ext cx="4281840" cy="1800"/>
           </a:xfrm>
           <a:prstGeom prst="straightConnector1">
             <a:avLst/>
@@ -2677,7 +2695,7 @@
         <p:spPr>
           <a:xfrm>
             <a:off x="334800" y="3700080"/>
-            <a:ext cx="4498920" cy="278640"/>
+            <a:ext cx="4498560" cy="278280"/>
           </a:xfrm>
           <a:prstGeom prst="rect">
             <a:avLst/>
@@ -2730,7 +2748,7 @@
         <p:spPr>
           <a:xfrm>
             <a:off x="4983480" y="182880"/>
-            <a:ext cx="4068720" cy="4891680"/>
+            <a:ext cx="4068360" cy="4891320"/>
           </a:xfrm>
           <a:prstGeom prst="roundRect">
             <a:avLst>
@@ -2784,7 +2802,7 @@
         <p:spPr>
           <a:xfrm>
             <a:off x="5243040" y="228600"/>
-            <a:ext cx="3809160" cy="159120"/>
+            <a:ext cx="3808800" cy="158760"/>
           </a:xfrm>
           <a:prstGeom prst="rect">
             <a:avLst/>
@@ -2811,7 +2829,7 @@
               </a:lnSpc>
             </a:pPr>
             <a:r>
-              <a:rPr b="1" lang="en-US" sz="950" spc="290" strike="noStrike">
+              <a:rPr b="1" lang="en-US" sz="950" spc="287" strike="noStrike">
                 <a:solidFill>
                   <a:srgbClr val="f5a623"/>
                 </a:solidFill>
@@ -2837,7 +2855,7 @@
         <p:spPr>
           <a:xfrm>
             <a:off x="5119920" y="454320"/>
-            <a:ext cx="3809160" cy="1439280"/>
+            <a:ext cx="3808800" cy="1438920"/>
           </a:xfrm>
           <a:prstGeom prst="roundRect">
             <a:avLst>
@@ -2871,7 +2889,7 @@
               </a:lnSpc>
             </a:pPr>
             <a:r>
-              <a:rPr b="1" lang="en-US" sz="1100" spc="94" strike="noStrike">
+              <a:rPr b="1" lang="en-US" sz="1100" spc="92" strike="noStrike">
                 <a:solidFill>
                   <a:srgbClr val="f5a623"/>
                 </a:solidFill>
@@ -3132,7 +3150,7 @@
         <p:spPr>
           <a:xfrm>
             <a:off x="5119920" y="1984320"/>
-            <a:ext cx="3809160" cy="1439280"/>
+            <a:ext cx="3808800" cy="1438920"/>
           </a:xfrm>
           <a:prstGeom prst="roundRect">
             <a:avLst>
@@ -3166,7 +3184,7 @@
               </a:lnSpc>
             </a:pPr>
             <a:r>
-              <a:rPr b="1" lang="en-US" sz="1100" spc="94" strike="noStrike">
+              <a:rPr b="1" lang="en-US" sz="1100" spc="92" strike="noStrike">
                 <a:solidFill>
                   <a:srgbClr val="f5a623"/>
                 </a:solidFill>
@@ -3427,7 +3445,7 @@
         <p:spPr>
           <a:xfrm>
             <a:off x="5119920" y="3514320"/>
-            <a:ext cx="3809160" cy="1439280"/>
+            <a:ext cx="3808800" cy="1438920"/>
           </a:xfrm>
           <a:prstGeom prst="roundRect">
             <a:avLst>
@@ -3461,7 +3479,7 @@
               </a:lnSpc>
             </a:pPr>
             <a:r>
-              <a:rPr b="1" lang="en-US" sz="1100" spc="94" strike="noStrike">
+              <a:rPr b="1" lang="en-US" sz="1100" spc="92" strike="noStrike">
                 <a:solidFill>
                   <a:srgbClr val="f5a623"/>
                 </a:solidFill>
@@ -3759,7 +3777,7 @@
         <p:spPr>
           <a:xfrm>
             <a:off x="0" y="0"/>
-            <a:ext cx="52920" cy="5142240"/>
+            <a:ext cx="52560" cy="5141880"/>
           </a:xfrm>
           <a:prstGeom prst="rect">
             <a:avLst/>
@@ -3811,7 +3829,7 @@
         <p:spPr>
           <a:xfrm>
             <a:off x="274320" y="228600"/>
-            <a:ext cx="8593560" cy="217800"/>
+            <a:ext cx="8593200" cy="217440"/>
           </a:xfrm>
           <a:prstGeom prst="rect">
             <a:avLst/>
@@ -3838,7 +3856,7 @@
               </a:lnSpc>
             </a:pPr>
             <a:r>
-              <a:rPr b="1" lang="en-US" sz="850" spc="335" strike="noStrike">
+              <a:rPr b="1" lang="en-US" sz="850" spc="333" strike="noStrike">
                 <a:solidFill>
                   <a:srgbClr val="f5a623"/>
                 </a:solidFill>
@@ -3864,7 +3882,7 @@
         <p:spPr>
           <a:xfrm>
             <a:off x="274320" y="457200"/>
-            <a:ext cx="4799160" cy="546840"/>
+            <a:ext cx="4798800" cy="546480"/>
           </a:xfrm>
           <a:prstGeom prst="rect">
             <a:avLst/>
@@ -3917,7 +3935,7 @@
         <p:spPr>
           <a:xfrm>
             <a:off x="4800600" y="228600"/>
-            <a:ext cx="4030200" cy="798480"/>
+            <a:ext cx="4029840" cy="798120"/>
           </a:xfrm>
           <a:prstGeom prst="roundRect">
             <a:avLst>
@@ -3971,7 +3989,7 @@
         <p:spPr>
           <a:xfrm>
             <a:off x="4800600" y="228600"/>
-            <a:ext cx="3899880" cy="798480"/>
+            <a:ext cx="3899520" cy="798120"/>
           </a:xfrm>
           <a:prstGeom prst="rect">
             <a:avLst/>
@@ -4046,7 +4064,7 @@
         <p:spPr>
           <a:xfrm>
             <a:off x="237600" y="1180080"/>
-            <a:ext cx="4218480" cy="3698640"/>
+            <a:ext cx="4218120" cy="3698280"/>
           </a:xfrm>
           <a:prstGeom prst="roundRect">
             <a:avLst>
@@ -4104,7 +4122,7 @@
         <p:spPr>
           <a:xfrm>
             <a:off x="367560" y="1310040"/>
-            <a:ext cx="338400" cy="338400"/>
+            <a:ext cx="338040" cy="338040"/>
           </a:xfrm>
           <a:prstGeom prst="rect">
             <a:avLst/>
@@ -4123,7 +4141,7 @@
         <p:spPr>
           <a:xfrm>
             <a:off x="367560" y="1720080"/>
-            <a:ext cx="3958560" cy="198720"/>
+            <a:ext cx="3958200" cy="198360"/>
           </a:xfrm>
           <a:prstGeom prst="rect">
             <a:avLst/>
@@ -4176,7 +4194,7 @@
         <p:spPr>
           <a:xfrm>
             <a:off x="367560" y="1929960"/>
-            <a:ext cx="3958560" cy="258480"/>
+            <a:ext cx="3958200" cy="258120"/>
           </a:xfrm>
           <a:prstGeom prst="rect">
             <a:avLst/>
@@ -4229,7 +4247,7 @@
         <p:spPr>
           <a:xfrm>
             <a:off x="367560" y="2250000"/>
-            <a:ext cx="3958560" cy="278640"/>
+            <a:ext cx="3958200" cy="278280"/>
           </a:xfrm>
           <a:prstGeom prst="rect">
             <a:avLst/>
@@ -4291,7 +4309,7 @@
         <p:spPr>
           <a:xfrm>
             <a:off x="367560" y="2570040"/>
-            <a:ext cx="3958560" cy="1498680"/>
+            <a:ext cx="3958200" cy="1498320"/>
           </a:xfrm>
           <a:prstGeom prst="rect">
             <a:avLst/>
@@ -4457,7 +4475,7 @@
         <p:spPr>
           <a:xfrm>
             <a:off x="384120" y="4114800"/>
-            <a:ext cx="3958560" cy="478440"/>
+            <a:ext cx="3958200" cy="478080"/>
           </a:xfrm>
           <a:prstGeom prst="roundRect">
             <a:avLst>
@@ -4511,7 +4529,7 @@
         <p:spPr>
           <a:xfrm>
             <a:off x="457200" y="4114800"/>
-            <a:ext cx="3885480" cy="478440"/>
+            <a:ext cx="3885120" cy="478080"/>
           </a:xfrm>
           <a:prstGeom prst="rect">
             <a:avLst/>
@@ -4564,7 +4582,7 @@
         <p:spPr>
           <a:xfrm>
             <a:off x="4700160" y="1180080"/>
-            <a:ext cx="4130640" cy="3698640"/>
+            <a:ext cx="4130280" cy="3698280"/>
           </a:xfrm>
           <a:prstGeom prst="roundRect">
             <a:avLst>
@@ -4622,7 +4640,7 @@
         <p:spPr>
           <a:xfrm>
             <a:off x="4830120" y="1289880"/>
-            <a:ext cx="278640" cy="278640"/>
+            <a:ext cx="278280" cy="278280"/>
           </a:xfrm>
           <a:prstGeom prst="rect">
             <a:avLst/>
@@ -4641,7 +4659,7 @@
         <p:spPr>
           <a:xfrm>
             <a:off x="5159880" y="1289880"/>
-            <a:ext cx="3540600" cy="278640"/>
+            <a:ext cx="3540240" cy="278280"/>
           </a:xfrm>
           <a:prstGeom prst="rect">
             <a:avLst/>
@@ -4694,7 +4712,7 @@
         <p:spPr>
           <a:xfrm>
             <a:off x="4830120" y="1620000"/>
-            <a:ext cx="3870720" cy="238680"/>
+            <a:ext cx="3870360" cy="238320"/>
           </a:xfrm>
           <a:prstGeom prst="rect">
             <a:avLst/>
@@ -4756,7 +4774,7 @@
         <p:spPr>
           <a:xfrm>
             <a:off x="4830120" y="1940040"/>
-            <a:ext cx="3870720" cy="218520"/>
+            <a:ext cx="3870360" cy="218160"/>
           </a:xfrm>
           <a:prstGeom prst="rect">
             <a:avLst/>
@@ -4809,7 +4827,7 @@
         <p:spPr>
           <a:xfrm>
             <a:off x="4830120" y="2189880"/>
-            <a:ext cx="1096560" cy="418680"/>
+            <a:ext cx="1096200" cy="418320"/>
           </a:xfrm>
           <a:prstGeom prst="roundRect">
             <a:avLst>
@@ -4863,7 +4881,7 @@
         <p:spPr>
           <a:xfrm>
             <a:off x="4830120" y="2330640"/>
-            <a:ext cx="1112760" cy="137160"/>
+            <a:ext cx="1112400" cy="136800"/>
           </a:xfrm>
           <a:prstGeom prst="rect">
             <a:avLst/>
@@ -4916,7 +4934,7 @@
         <p:spPr>
           <a:xfrm>
             <a:off x="5970960" y="2286000"/>
-            <a:ext cx="164520" cy="197640"/>
+            <a:ext cx="164160" cy="197640"/>
           </a:xfrm>
           <a:prstGeom prst="rect">
             <a:avLst/>
@@ -4969,7 +4987,7 @@
         <p:spPr>
           <a:xfrm>
             <a:off x="6172200" y="2189880"/>
-            <a:ext cx="1096560" cy="418680"/>
+            <a:ext cx="1096200" cy="418320"/>
           </a:xfrm>
           <a:prstGeom prst="roundRect">
             <a:avLst>
@@ -5023,7 +5041,7 @@
         <p:spPr>
           <a:xfrm>
             <a:off x="6172200" y="2330640"/>
-            <a:ext cx="1142280" cy="137160"/>
+            <a:ext cx="1141920" cy="136800"/>
           </a:xfrm>
           <a:prstGeom prst="rect">
             <a:avLst/>
@@ -5076,7 +5094,7 @@
         <p:spPr>
           <a:xfrm>
             <a:off x="7324200" y="2286000"/>
-            <a:ext cx="164520" cy="197640"/>
+            <a:ext cx="164160" cy="197640"/>
           </a:xfrm>
           <a:prstGeom prst="rect">
             <a:avLst/>
@@ -5129,7 +5147,7 @@
         <p:spPr>
           <a:xfrm>
             <a:off x="7543800" y="2189880"/>
-            <a:ext cx="1097280" cy="418680"/>
+            <a:ext cx="1096920" cy="418320"/>
           </a:xfrm>
           <a:prstGeom prst="roundRect">
             <a:avLst>
@@ -5183,7 +5201,7 @@
         <p:spPr>
           <a:xfrm>
             <a:off x="7543800" y="2330640"/>
-            <a:ext cx="1097280" cy="137160"/>
+            <a:ext cx="1096920" cy="136800"/>
           </a:xfrm>
           <a:prstGeom prst="rect">
             <a:avLst/>
@@ -5236,7 +5254,7 @@
         <p:spPr>
           <a:xfrm>
             <a:off x="4830120" y="2720160"/>
-            <a:ext cx="1096560" cy="418680"/>
+            <a:ext cx="1096200" cy="418320"/>
           </a:xfrm>
           <a:prstGeom prst="roundRect">
             <a:avLst>
@@ -5290,7 +5308,7 @@
         <p:spPr>
           <a:xfrm>
             <a:off x="4830120" y="2860920"/>
-            <a:ext cx="1112760" cy="137160"/>
+            <a:ext cx="1112400" cy="136800"/>
           </a:xfrm>
           <a:prstGeom prst="rect">
             <a:avLst/>
@@ -5343,7 +5361,7 @@
         <p:spPr>
           <a:xfrm>
             <a:off x="5970960" y="2788920"/>
-            <a:ext cx="164520" cy="197640"/>
+            <a:ext cx="164160" cy="197640"/>
           </a:xfrm>
           <a:prstGeom prst="rect">
             <a:avLst/>
@@ -5396,7 +5414,7 @@
         <p:spPr>
           <a:xfrm>
             <a:off x="6172200" y="2720160"/>
-            <a:ext cx="1096560" cy="418680"/>
+            <a:ext cx="1096200" cy="418320"/>
           </a:xfrm>
           <a:prstGeom prst="roundRect">
             <a:avLst>
@@ -5450,7 +5468,7 @@
         <p:spPr>
           <a:xfrm>
             <a:off x="6172200" y="2860920"/>
-            <a:ext cx="1097280" cy="137160"/>
+            <a:ext cx="1096920" cy="136800"/>
           </a:xfrm>
           <a:prstGeom prst="rect">
             <a:avLst/>
@@ -5503,7 +5521,7 @@
         <p:spPr>
           <a:xfrm>
             <a:off x="7324200" y="2788920"/>
-            <a:ext cx="164520" cy="197640"/>
+            <a:ext cx="164160" cy="197640"/>
           </a:xfrm>
           <a:prstGeom prst="rect">
             <a:avLst/>
@@ -5556,7 +5574,7 @@
         <p:spPr>
           <a:xfrm>
             <a:off x="7543800" y="2720160"/>
-            <a:ext cx="1096560" cy="418680"/>
+            <a:ext cx="1096200" cy="418320"/>
           </a:xfrm>
           <a:prstGeom prst="roundRect">
             <a:avLst>
@@ -5610,7 +5628,7 @@
         <p:spPr>
           <a:xfrm>
             <a:off x="7543800" y="2860920"/>
-            <a:ext cx="1096560" cy="137160"/>
+            <a:ext cx="1096200" cy="136800"/>
           </a:xfrm>
           <a:prstGeom prst="rect">
             <a:avLst/>
@@ -5663,7 +5681,7 @@
         <p:spPr>
           <a:xfrm>
             <a:off x="4830120" y="3340080"/>
-            <a:ext cx="3870720" cy="218520"/>
+            <a:ext cx="3870360" cy="218160"/>
           </a:xfrm>
           <a:prstGeom prst="rect">
             <a:avLst/>
@@ -5716,7 +5734,7 @@
         <p:spPr>
           <a:xfrm>
             <a:off x="4830120" y="3620160"/>
-            <a:ext cx="818640" cy="248400"/>
+            <a:ext cx="818280" cy="248040"/>
           </a:xfrm>
           <a:prstGeom prst="rect">
             <a:avLst/>
@@ -5769,7 +5787,7 @@
         <p:spPr>
           <a:xfrm>
             <a:off x="5649840" y="3620160"/>
-            <a:ext cx="3050640" cy="248400"/>
+            <a:ext cx="3050280" cy="248040"/>
           </a:xfrm>
           <a:prstGeom prst="rect">
             <a:avLst/>
@@ -5822,7 +5840,7 @@
         <p:spPr>
           <a:xfrm>
             <a:off x="4830120" y="3899880"/>
-            <a:ext cx="818640" cy="248400"/>
+            <a:ext cx="818280" cy="248040"/>
           </a:xfrm>
           <a:prstGeom prst="rect">
             <a:avLst/>
@@ -5875,7 +5893,7 @@
         <p:spPr>
           <a:xfrm>
             <a:off x="5649840" y="3899880"/>
-            <a:ext cx="3050640" cy="248400"/>
+            <a:ext cx="3050280" cy="248040"/>
           </a:xfrm>
           <a:prstGeom prst="rect">
             <a:avLst/>
@@ -5928,7 +5946,7 @@
         <p:spPr>
           <a:xfrm>
             <a:off x="4830120" y="4179960"/>
-            <a:ext cx="818640" cy="248400"/>
+            <a:ext cx="818280" cy="248040"/>
           </a:xfrm>
           <a:prstGeom prst="rect">
             <a:avLst/>
@@ -5981,7 +5999,7 @@
         <p:spPr>
           <a:xfrm>
             <a:off x="5649840" y="4179960"/>
-            <a:ext cx="3050640" cy="248400"/>
+            <a:ext cx="3050280" cy="248040"/>
           </a:xfrm>
           <a:prstGeom prst="rect">
             <a:avLst/>
@@ -6034,7 +6052,7 @@
         <p:spPr>
           <a:xfrm>
             <a:off x="4830120" y="4460040"/>
-            <a:ext cx="818640" cy="248400"/>
+            <a:ext cx="818280" cy="248040"/>
           </a:xfrm>
           <a:prstGeom prst="rect">
             <a:avLst/>
@@ -6087,7 +6105,7 @@
         <p:spPr>
           <a:xfrm>
             <a:off x="5649840" y="4460040"/>
-            <a:ext cx="3050640" cy="248400"/>
+            <a:ext cx="3050280" cy="248040"/>
           </a:xfrm>
           <a:prstGeom prst="rect">
             <a:avLst/>
@@ -6177,7 +6195,7 @@
         <p:spPr>
           <a:xfrm>
             <a:off x="0" y="0"/>
-            <a:ext cx="52920" cy="5142240"/>
+            <a:ext cx="52560" cy="5141880"/>
           </a:xfrm>
           <a:prstGeom prst="rect">
             <a:avLst/>
@@ -6229,7 +6247,7 @@
         <p:spPr>
           <a:xfrm>
             <a:off x="274320" y="228600"/>
-            <a:ext cx="8593560" cy="217800"/>
+            <a:ext cx="8593200" cy="217440"/>
           </a:xfrm>
           <a:prstGeom prst="rect">
             <a:avLst/>
@@ -6256,7 +6274,7 @@
               </a:lnSpc>
             </a:pPr>
             <a:r>
-              <a:rPr b="1" lang="en-US" sz="850" spc="335" strike="noStrike">
+              <a:rPr b="1" lang="en-US" sz="850" spc="333" strike="noStrike">
                 <a:solidFill>
                   <a:srgbClr val="f5a623"/>
                 </a:solidFill>
@@ -6282,7 +6300,7 @@
         <p:spPr>
           <a:xfrm>
             <a:off x="274320" y="457200"/>
-            <a:ext cx="6698880" cy="546840"/>
+            <a:ext cx="6698520" cy="546480"/>
           </a:xfrm>
           <a:prstGeom prst="rect">
             <a:avLst/>
@@ -6335,7 +6353,7 @@
         <p:spPr>
           <a:xfrm>
             <a:off x="274320" y="1019880"/>
-            <a:ext cx="8593560" cy="278640"/>
+            <a:ext cx="8593200" cy="278280"/>
           </a:xfrm>
           <a:prstGeom prst="rect">
             <a:avLst/>
@@ -6388,7 +6406,7 @@
         <p:spPr>
           <a:xfrm>
             <a:off x="237600" y="1479960"/>
-            <a:ext cx="1557720" cy="978480"/>
+            <a:ext cx="1557360" cy="978120"/>
           </a:xfrm>
           <a:prstGeom prst="roundRect">
             <a:avLst>
@@ -6442,7 +6460,7 @@
         <p:spPr>
           <a:xfrm>
             <a:off x="237600" y="1569960"/>
-            <a:ext cx="1557720" cy="238680"/>
+            <a:ext cx="1557360" cy="238320"/>
           </a:xfrm>
           <a:prstGeom prst="rect">
             <a:avLst/>
@@ -6495,7 +6513,7 @@
         <p:spPr>
           <a:xfrm>
             <a:off x="277560" y="1829880"/>
-            <a:ext cx="1477440" cy="588600"/>
+            <a:ext cx="1477080" cy="588240"/>
           </a:xfrm>
           <a:prstGeom prst="rect">
             <a:avLst/>
@@ -6623,7 +6641,7 @@
         <p:spPr>
           <a:xfrm>
             <a:off x="1996560" y="1479960"/>
-            <a:ext cx="1557720" cy="978480"/>
+            <a:ext cx="1557360" cy="978120"/>
           </a:xfrm>
           <a:prstGeom prst="roundRect">
             <a:avLst>
@@ -6677,7 +6695,7 @@
         <p:spPr>
           <a:xfrm>
             <a:off x="1996560" y="1569960"/>
-            <a:ext cx="1557720" cy="238680"/>
+            <a:ext cx="1557360" cy="238320"/>
           </a:xfrm>
           <a:prstGeom prst="rect">
             <a:avLst/>
@@ -6730,7 +6748,7 @@
         <p:spPr>
           <a:xfrm>
             <a:off x="2036520" y="1829880"/>
-            <a:ext cx="1477440" cy="588600"/>
+            <a:ext cx="1477080" cy="588240"/>
           </a:xfrm>
           <a:prstGeom prst="rect">
             <a:avLst/>
@@ -6858,7 +6876,7 @@
         <p:spPr>
           <a:xfrm>
             <a:off x="3755520" y="1479960"/>
-            <a:ext cx="1557720" cy="978480"/>
+            <a:ext cx="1557360" cy="978120"/>
           </a:xfrm>
           <a:prstGeom prst="roundRect">
             <a:avLst>
@@ -6912,7 +6930,7 @@
         <p:spPr>
           <a:xfrm>
             <a:off x="3755520" y="1569960"/>
-            <a:ext cx="1557720" cy="238680"/>
+            <a:ext cx="1557360" cy="238320"/>
           </a:xfrm>
           <a:prstGeom prst="rect">
             <a:avLst/>
@@ -6965,7 +6983,7 @@
         <p:spPr>
           <a:xfrm>
             <a:off x="3795480" y="1829880"/>
-            <a:ext cx="1477440" cy="588600"/>
+            <a:ext cx="1477080" cy="588240"/>
           </a:xfrm>
           <a:prstGeom prst="rect">
             <a:avLst/>
@@ -7093,7 +7111,7 @@
         <p:spPr>
           <a:xfrm>
             <a:off x="5514480" y="1479960"/>
-            <a:ext cx="1557720" cy="978480"/>
+            <a:ext cx="1557360" cy="978120"/>
           </a:xfrm>
           <a:prstGeom prst="roundRect">
             <a:avLst>
@@ -7147,7 +7165,7 @@
         <p:spPr>
           <a:xfrm>
             <a:off x="5514480" y="1569960"/>
-            <a:ext cx="1557720" cy="238680"/>
+            <a:ext cx="1557360" cy="238320"/>
           </a:xfrm>
           <a:prstGeom prst="rect">
             <a:avLst/>
@@ -7200,7 +7218,7 @@
         <p:spPr>
           <a:xfrm>
             <a:off x="5554440" y="1829880"/>
-            <a:ext cx="1477440" cy="588600"/>
+            <a:ext cx="1477080" cy="588240"/>
           </a:xfrm>
           <a:prstGeom prst="rect">
             <a:avLst/>
@@ -7328,7 +7346,7 @@
         <p:spPr>
           <a:xfrm>
             <a:off x="7273440" y="1479960"/>
-            <a:ext cx="1557720" cy="978480"/>
+            <a:ext cx="1557360" cy="978120"/>
           </a:xfrm>
           <a:prstGeom prst="roundRect">
             <a:avLst>
@@ -7382,7 +7400,7 @@
         <p:spPr>
           <a:xfrm>
             <a:off x="7273440" y="1569960"/>
-            <a:ext cx="1557720" cy="238680"/>
+            <a:ext cx="1557360" cy="238320"/>
           </a:xfrm>
           <a:prstGeom prst="rect">
             <a:avLst/>
@@ -7435,7 +7453,7 @@
         <p:spPr>
           <a:xfrm>
             <a:off x="7313760" y="1829880"/>
-            <a:ext cx="1477440" cy="588600"/>
+            <a:ext cx="1477080" cy="588240"/>
           </a:xfrm>
           <a:prstGeom prst="rect">
             <a:avLst/>
@@ -7510,7 +7528,7 @@
         <p:spPr>
           <a:xfrm>
             <a:off x="237600" y="2700000"/>
-            <a:ext cx="2759760" cy="2178720"/>
+            <a:ext cx="2759400" cy="2178360"/>
           </a:xfrm>
           <a:prstGeom prst="roundRect">
             <a:avLst>
@@ -7564,7 +7582,7 @@
         <p:spPr>
           <a:xfrm>
             <a:off x="367560" y="2829960"/>
-            <a:ext cx="268560" cy="268560"/>
+            <a:ext cx="268200" cy="268200"/>
           </a:xfrm>
           <a:prstGeom prst="roundRect">
             <a:avLst>
@@ -7627,7 +7645,7 @@
         <p:spPr>
           <a:xfrm>
             <a:off x="717480" y="2829960"/>
-            <a:ext cx="2149920" cy="268560"/>
+            <a:ext cx="2149560" cy="268200"/>
           </a:xfrm>
           <a:prstGeom prst="rect">
             <a:avLst/>
@@ -7680,7 +7698,7 @@
         <p:spPr>
           <a:xfrm>
             <a:off x="367560" y="3159720"/>
-            <a:ext cx="2502360" cy="1440"/>
+            <a:ext cx="2502720" cy="1800"/>
           </a:xfrm>
           <a:prstGeom prst="straightConnector1">
             <a:avLst/>
@@ -7702,7 +7720,7 @@
         <p:spPr>
           <a:xfrm>
             <a:off x="367560" y="3269880"/>
-            <a:ext cx="2499840" cy="1568520"/>
+            <a:ext cx="2499480" cy="1568160"/>
           </a:xfrm>
           <a:prstGeom prst="rect">
             <a:avLst/>
@@ -7841,7 +7859,7 @@
         <p:spPr>
           <a:xfrm>
             <a:off x="3128760" y="2700000"/>
-            <a:ext cx="2759760" cy="2178720"/>
+            <a:ext cx="2759400" cy="2178360"/>
           </a:xfrm>
           <a:prstGeom prst="roundRect">
             <a:avLst>
@@ -7895,7 +7913,7 @@
         <p:spPr>
           <a:xfrm>
             <a:off x="3258720" y="2829960"/>
-            <a:ext cx="268560" cy="268560"/>
+            <a:ext cx="268200" cy="268200"/>
           </a:xfrm>
           <a:prstGeom prst="roundRect">
             <a:avLst>
@@ -7958,7 +7976,7 @@
         <p:spPr>
           <a:xfrm>
             <a:off x="3608640" y="2829960"/>
-            <a:ext cx="2149920" cy="268560"/>
+            <a:ext cx="2149560" cy="268200"/>
           </a:xfrm>
           <a:prstGeom prst="rect">
             <a:avLst/>
@@ -8011,7 +8029,7 @@
         <p:spPr>
           <a:xfrm>
             <a:off x="3258720" y="3159720"/>
-            <a:ext cx="2502720" cy="1440"/>
+            <a:ext cx="2503080" cy="1800"/>
           </a:xfrm>
           <a:prstGeom prst="straightConnector1">
             <a:avLst/>
@@ -8033,7 +8051,7 @@
         <p:spPr>
           <a:xfrm>
             <a:off x="3258720" y="3269880"/>
-            <a:ext cx="2499840" cy="1568520"/>
+            <a:ext cx="2499480" cy="1568160"/>
           </a:xfrm>
           <a:prstGeom prst="rect">
             <a:avLst/>
@@ -8172,7 +8190,7 @@
         <p:spPr>
           <a:xfrm>
             <a:off x="6019920" y="2700000"/>
-            <a:ext cx="2759760" cy="2178720"/>
+            <a:ext cx="2759400" cy="2178360"/>
           </a:xfrm>
           <a:prstGeom prst="roundRect">
             <a:avLst>
@@ -8226,7 +8244,7 @@
         <p:spPr>
           <a:xfrm>
             <a:off x="6149880" y="2829960"/>
-            <a:ext cx="268560" cy="268560"/>
+            <a:ext cx="268200" cy="268200"/>
           </a:xfrm>
           <a:prstGeom prst="roundRect">
             <a:avLst>
@@ -8289,7 +8307,7 @@
         <p:spPr>
           <a:xfrm>
             <a:off x="6500160" y="2829960"/>
-            <a:ext cx="2149920" cy="268560"/>
+            <a:ext cx="2149560" cy="268200"/>
           </a:xfrm>
           <a:prstGeom prst="rect">
             <a:avLst/>
@@ -8342,7 +8360,7 @@
         <p:spPr>
           <a:xfrm>
             <a:off x="6149880" y="3159720"/>
-            <a:ext cx="2502720" cy="1440"/>
+            <a:ext cx="2503080" cy="1800"/>
           </a:xfrm>
           <a:prstGeom prst="straightConnector1">
             <a:avLst/>
@@ -8364,7 +8382,7 @@
         <p:spPr>
           <a:xfrm>
             <a:off x="6149880" y="3269880"/>
-            <a:ext cx="2499840" cy="1568520"/>
+            <a:ext cx="2499480" cy="1568160"/>
           </a:xfrm>
           <a:prstGeom prst="rect">
             <a:avLst/>
@@ -8540,7 +8558,7 @@
         <p:spPr>
           <a:xfrm>
             <a:off x="0" y="0"/>
-            <a:ext cx="52920" cy="5142240"/>
+            <a:ext cx="52560" cy="5141880"/>
           </a:xfrm>
           <a:prstGeom prst="rect">
             <a:avLst/>
@@ -8592,7 +8610,7 @@
         <p:spPr>
           <a:xfrm>
             <a:off x="274320" y="228600"/>
-            <a:ext cx="8593560" cy="217800"/>
+            <a:ext cx="8593200" cy="217440"/>
           </a:xfrm>
           <a:prstGeom prst="rect">
             <a:avLst/>
@@ -8619,7 +8637,7 @@
               </a:lnSpc>
             </a:pPr>
             <a:r>
-              <a:rPr b="1" lang="en-US" sz="850" spc="335" strike="noStrike">
+              <a:rPr b="1" lang="en-US" sz="850" spc="333" strike="noStrike">
                 <a:solidFill>
                   <a:srgbClr val="f5a623"/>
                 </a:solidFill>
@@ -8645,7 +8663,7 @@
         <p:spPr>
           <a:xfrm>
             <a:off x="274320" y="457200"/>
-            <a:ext cx="6399000" cy="546840"/>
+            <a:ext cx="6398640" cy="546480"/>
           </a:xfrm>
           <a:prstGeom prst="rect">
             <a:avLst/>
@@ -8698,7 +8716,7 @@
         <p:spPr>
           <a:xfrm>
             <a:off x="237600" y="1180080"/>
-            <a:ext cx="4218480" cy="3698640"/>
+            <a:ext cx="4218120" cy="3698280"/>
           </a:xfrm>
           <a:prstGeom prst="roundRect">
             <a:avLst>
@@ -8756,7 +8774,7 @@
         <p:spPr>
           <a:xfrm>
             <a:off x="367560" y="1310040"/>
-            <a:ext cx="338400" cy="338400"/>
+            <a:ext cx="338040" cy="338040"/>
           </a:xfrm>
           <a:prstGeom prst="rect">
             <a:avLst/>
@@ -8775,7 +8793,7 @@
         <p:spPr>
           <a:xfrm>
             <a:off x="367560" y="1720080"/>
-            <a:ext cx="3958560" cy="198720"/>
+            <a:ext cx="3958200" cy="198360"/>
           </a:xfrm>
           <a:prstGeom prst="rect">
             <a:avLst/>
@@ -8828,7 +8846,7 @@
         <p:spPr>
           <a:xfrm>
             <a:off x="367560" y="1929960"/>
-            <a:ext cx="3958560" cy="258480"/>
+            <a:ext cx="3958200" cy="258120"/>
           </a:xfrm>
           <a:prstGeom prst="rect">
             <a:avLst/>
@@ -8881,7 +8899,7 @@
         <p:spPr>
           <a:xfrm>
             <a:off x="367560" y="2250000"/>
-            <a:ext cx="3958560" cy="278640"/>
+            <a:ext cx="3958200" cy="278280"/>
           </a:xfrm>
           <a:prstGeom prst="rect">
             <a:avLst/>
@@ -8943,7 +8961,7 @@
         <p:spPr>
           <a:xfrm>
             <a:off x="367560" y="2570040"/>
-            <a:ext cx="3958560" cy="1956240"/>
+            <a:ext cx="3958200" cy="1955880"/>
           </a:xfrm>
           <a:prstGeom prst="rect">
             <a:avLst/>
@@ -9109,7 +9127,7 @@
         <p:spPr>
           <a:xfrm>
             <a:off x="367560" y="3887640"/>
-            <a:ext cx="3958560" cy="478440"/>
+            <a:ext cx="3958200" cy="478080"/>
           </a:xfrm>
           <a:prstGeom prst="roundRect">
             <a:avLst>
@@ -9163,7 +9181,7 @@
         <p:spPr>
           <a:xfrm>
             <a:off x="477720" y="3887640"/>
-            <a:ext cx="3738600" cy="478440"/>
+            <a:ext cx="3738240" cy="478080"/>
           </a:xfrm>
           <a:prstGeom prst="rect">
             <a:avLst/>
@@ -9216,7 +9234,7 @@
         <p:spPr>
           <a:xfrm>
             <a:off x="367560" y="4487760"/>
-            <a:ext cx="3958560" cy="290880"/>
+            <a:ext cx="3958200" cy="290520"/>
           </a:xfrm>
           <a:prstGeom prst="roundRect">
             <a:avLst>
@@ -9279,7 +9297,7 @@
         <p:spPr>
           <a:xfrm>
             <a:off x="4637520" y="1180080"/>
-            <a:ext cx="4218480" cy="3698640"/>
+            <a:ext cx="4218120" cy="3698280"/>
           </a:xfrm>
           <a:prstGeom prst="roundRect">
             <a:avLst>
@@ -9337,7 +9355,7 @@
         <p:spPr>
           <a:xfrm>
             <a:off x="4767480" y="1310040"/>
-            <a:ext cx="338400" cy="338400"/>
+            <a:ext cx="338040" cy="338040"/>
           </a:xfrm>
           <a:prstGeom prst="rect">
             <a:avLst/>
@@ -9356,7 +9374,7 @@
         <p:spPr>
           <a:xfrm>
             <a:off x="4767480" y="1720080"/>
-            <a:ext cx="3958560" cy="198720"/>
+            <a:ext cx="3958200" cy="198360"/>
           </a:xfrm>
           <a:prstGeom prst="rect">
             <a:avLst/>
@@ -9409,7 +9427,7 @@
         <p:spPr>
           <a:xfrm>
             <a:off x="4767480" y="1929960"/>
-            <a:ext cx="3958560" cy="258480"/>
+            <a:ext cx="3958200" cy="258120"/>
           </a:xfrm>
           <a:prstGeom prst="rect">
             <a:avLst/>
@@ -9462,7 +9480,7 @@
         <p:spPr>
           <a:xfrm>
             <a:off x="4767480" y="2250000"/>
-            <a:ext cx="3958560" cy="278640"/>
+            <a:ext cx="3958200" cy="278280"/>
           </a:xfrm>
           <a:prstGeom prst="rect">
             <a:avLst/>
@@ -9524,7 +9542,7 @@
         <p:spPr>
           <a:xfrm>
             <a:off x="4767480" y="2570040"/>
-            <a:ext cx="3958560" cy="1956240"/>
+            <a:ext cx="3958200" cy="1955880"/>
           </a:xfrm>
           <a:prstGeom prst="rect">
             <a:avLst/>
@@ -9690,7 +9708,7 @@
         <p:spPr>
           <a:xfrm>
             <a:off x="4767480" y="3887640"/>
-            <a:ext cx="3958560" cy="478440"/>
+            <a:ext cx="3958200" cy="478080"/>
           </a:xfrm>
           <a:prstGeom prst="roundRect">
             <a:avLst>
@@ -9744,7 +9762,7 @@
         <p:spPr>
           <a:xfrm>
             <a:off x="4877640" y="3887640"/>
-            <a:ext cx="3738600" cy="478440"/>
+            <a:ext cx="3738240" cy="478080"/>
           </a:xfrm>
           <a:prstGeom prst="rect">
             <a:avLst/>
@@ -9797,7 +9815,7 @@
         <p:spPr>
           <a:xfrm>
             <a:off x="4767480" y="4487760"/>
-            <a:ext cx="3958560" cy="290880"/>
+            <a:ext cx="3958200" cy="290520"/>
           </a:xfrm>
           <a:prstGeom prst="roundRect">
             <a:avLst>
@@ -9897,7 +9915,7 @@
         <p:spPr>
           <a:xfrm>
             <a:off x="0" y="0"/>
-            <a:ext cx="52920" cy="5142240"/>
+            <a:ext cx="52560" cy="5141880"/>
           </a:xfrm>
           <a:prstGeom prst="rect">
             <a:avLst/>
@@ -9949,7 +9967,7 @@
         <p:spPr>
           <a:xfrm>
             <a:off x="274320" y="228600"/>
-            <a:ext cx="8593560" cy="217800"/>
+            <a:ext cx="8593200" cy="217440"/>
           </a:xfrm>
           <a:prstGeom prst="rect">
             <a:avLst/>
@@ -9976,7 +9994,7 @@
               </a:lnSpc>
             </a:pPr>
             <a:r>
-              <a:rPr b="1" lang="en-US" sz="850" spc="335" strike="noStrike">
+              <a:rPr b="1" lang="en-US" sz="850" spc="333" strike="noStrike">
                 <a:solidFill>
                   <a:srgbClr val="f5a623"/>
                 </a:solidFill>
@@ -10002,7 +10020,7 @@
         <p:spPr>
           <a:xfrm>
             <a:off x="274320" y="457200"/>
-            <a:ext cx="8593560" cy="546840"/>
+            <a:ext cx="8593200" cy="546480"/>
           </a:xfrm>
           <a:prstGeom prst="rect">
             <a:avLst/>
@@ -10055,7 +10073,7 @@
         <p:spPr>
           <a:xfrm>
             <a:off x="237600" y="1149840"/>
-            <a:ext cx="4478400" cy="238680"/>
+            <a:ext cx="4478040" cy="238320"/>
           </a:xfrm>
           <a:prstGeom prst="rect">
             <a:avLst/>
@@ -10108,7 +10126,7 @@
         <p:spPr>
           <a:xfrm>
             <a:off x="237600" y="1469880"/>
-            <a:ext cx="1498680" cy="253440"/>
+            <a:ext cx="1498320" cy="253080"/>
           </a:xfrm>
           <a:prstGeom prst="roundRect">
             <a:avLst>
@@ -10162,7 +10180,7 @@
         <p:spPr>
           <a:xfrm>
             <a:off x="1737720" y="1469880"/>
-            <a:ext cx="1488600" cy="253440"/>
+            <a:ext cx="1488240" cy="253080"/>
           </a:xfrm>
           <a:prstGeom prst="roundRect">
             <a:avLst>
@@ -10216,7 +10234,7 @@
         <p:spPr>
           <a:xfrm>
             <a:off x="1737720" y="1469880"/>
-            <a:ext cx="1488600" cy="253440"/>
+            <a:ext cx="1488240" cy="253080"/>
           </a:xfrm>
           <a:prstGeom prst="rect">
             <a:avLst/>
@@ -10269,7 +10287,7 @@
         <p:spPr>
           <a:xfrm>
             <a:off x="3227760" y="1469880"/>
-            <a:ext cx="1488600" cy="253440"/>
+            <a:ext cx="1488240" cy="253080"/>
           </a:xfrm>
           <a:prstGeom prst="roundRect">
             <a:avLst>
@@ -10323,7 +10341,7 @@
         <p:spPr>
           <a:xfrm>
             <a:off x="3227760" y="1469880"/>
-            <a:ext cx="1488600" cy="253440"/>
+            <a:ext cx="1488240" cy="253080"/>
           </a:xfrm>
           <a:prstGeom prst="rect">
             <a:avLst/>
@@ -10376,7 +10394,7 @@
         <p:spPr>
           <a:xfrm>
             <a:off x="237600" y="1744920"/>
-            <a:ext cx="4478400" cy="253440"/>
+            <a:ext cx="4478040" cy="253080"/>
           </a:xfrm>
           <a:prstGeom prst="rect">
             <a:avLst/>
@@ -10428,7 +10446,7 @@
         <p:spPr>
           <a:xfrm>
             <a:off x="297720" y="1744920"/>
-            <a:ext cx="1438560" cy="253440"/>
+            <a:ext cx="1438200" cy="253080"/>
           </a:xfrm>
           <a:prstGeom prst="rect">
             <a:avLst/>
@@ -10481,7 +10499,7 @@
         <p:spPr>
           <a:xfrm>
             <a:off x="1797480" y="1744920"/>
-            <a:ext cx="1388520" cy="253440"/>
+            <a:ext cx="1388160" cy="253080"/>
           </a:xfrm>
           <a:prstGeom prst="rect">
             <a:avLst/>
@@ -10534,7 +10552,7 @@
         <p:spPr>
           <a:xfrm>
             <a:off x="3287520" y="1744920"/>
-            <a:ext cx="1388520" cy="253440"/>
+            <a:ext cx="1388160" cy="253080"/>
           </a:xfrm>
           <a:prstGeom prst="rect">
             <a:avLst/>
@@ -10587,7 +10605,7 @@
         <p:spPr>
           <a:xfrm>
             <a:off x="297720" y="2000160"/>
-            <a:ext cx="1438560" cy="253440"/>
+            <a:ext cx="1438200" cy="253080"/>
           </a:xfrm>
           <a:prstGeom prst="rect">
             <a:avLst/>
@@ -10640,7 +10658,7 @@
         <p:spPr>
           <a:xfrm>
             <a:off x="1797480" y="2000160"/>
-            <a:ext cx="1388520" cy="253440"/>
+            <a:ext cx="1388160" cy="253080"/>
           </a:xfrm>
           <a:prstGeom prst="rect">
             <a:avLst/>
@@ -10693,7 +10711,7 @@
         <p:spPr>
           <a:xfrm>
             <a:off x="3287520" y="2000160"/>
-            <a:ext cx="1388520" cy="253440"/>
+            <a:ext cx="1388160" cy="253080"/>
           </a:xfrm>
           <a:prstGeom prst="rect">
             <a:avLst/>
@@ -10746,7 +10764,7 @@
         <p:spPr>
           <a:xfrm>
             <a:off x="237600" y="2255040"/>
-            <a:ext cx="4478400" cy="253440"/>
+            <a:ext cx="4478040" cy="253080"/>
           </a:xfrm>
           <a:prstGeom prst="rect">
             <a:avLst/>
@@ -10798,7 +10816,7 @@
         <p:spPr>
           <a:xfrm>
             <a:off x="297720" y="2255040"/>
-            <a:ext cx="1438560" cy="253440"/>
+            <a:ext cx="1438200" cy="253080"/>
           </a:xfrm>
           <a:prstGeom prst="rect">
             <a:avLst/>
@@ -10851,7 +10869,7 @@
         <p:spPr>
           <a:xfrm>
             <a:off x="1797480" y="2255040"/>
-            <a:ext cx="1388520" cy="253440"/>
+            <a:ext cx="1388160" cy="253080"/>
           </a:xfrm>
           <a:prstGeom prst="rect">
             <a:avLst/>
@@ -10904,7 +10922,7 @@
         <p:spPr>
           <a:xfrm>
             <a:off x="3287520" y="2255040"/>
-            <a:ext cx="1388520" cy="253440"/>
+            <a:ext cx="1388160" cy="253080"/>
           </a:xfrm>
           <a:prstGeom prst="rect">
             <a:avLst/>
@@ -10957,7 +10975,7 @@
         <p:spPr>
           <a:xfrm>
             <a:off x="297720" y="2509920"/>
-            <a:ext cx="1438560" cy="253440"/>
+            <a:ext cx="1438200" cy="253080"/>
           </a:xfrm>
           <a:prstGeom prst="rect">
             <a:avLst/>
@@ -11010,7 +11028,7 @@
         <p:spPr>
           <a:xfrm>
             <a:off x="1797480" y="2509920"/>
-            <a:ext cx="1388520" cy="253440"/>
+            <a:ext cx="1388160" cy="253080"/>
           </a:xfrm>
           <a:prstGeom prst="rect">
             <a:avLst/>
@@ -11063,7 +11081,7 @@
         <p:spPr>
           <a:xfrm>
             <a:off x="3287520" y="2509920"/>
-            <a:ext cx="1388520" cy="253440"/>
+            <a:ext cx="1388160" cy="253080"/>
           </a:xfrm>
           <a:prstGeom prst="rect">
             <a:avLst/>
@@ -11116,7 +11134,7 @@
         <p:spPr>
           <a:xfrm>
             <a:off x="237600" y="2765160"/>
-            <a:ext cx="4478400" cy="253440"/>
+            <a:ext cx="4478040" cy="253080"/>
           </a:xfrm>
           <a:prstGeom prst="rect">
             <a:avLst/>
@@ -11168,7 +11186,7 @@
         <p:spPr>
           <a:xfrm>
             <a:off x="297720" y="2765160"/>
-            <a:ext cx="1438560" cy="253440"/>
+            <a:ext cx="1438200" cy="253080"/>
           </a:xfrm>
           <a:prstGeom prst="rect">
             <a:avLst/>
@@ -11221,7 +11239,7 @@
         <p:spPr>
           <a:xfrm>
             <a:off x="1797480" y="2765160"/>
-            <a:ext cx="1388520" cy="253440"/>
+            <a:ext cx="1388160" cy="253080"/>
           </a:xfrm>
           <a:prstGeom prst="rect">
             <a:avLst/>
@@ -11274,7 +11292,7 @@
         <p:spPr>
           <a:xfrm>
             <a:off x="3287520" y="2765160"/>
-            <a:ext cx="1388520" cy="253440"/>
+            <a:ext cx="1388160" cy="253080"/>
           </a:xfrm>
           <a:prstGeom prst="rect">
             <a:avLst/>
@@ -11327,7 +11345,7 @@
         <p:spPr>
           <a:xfrm>
             <a:off x="297720" y="3020040"/>
-            <a:ext cx="1438560" cy="253440"/>
+            <a:ext cx="1438200" cy="253080"/>
           </a:xfrm>
           <a:prstGeom prst="rect">
             <a:avLst/>
@@ -11380,7 +11398,7 @@
         <p:spPr>
           <a:xfrm>
             <a:off x="1797480" y="3020040"/>
-            <a:ext cx="1388520" cy="253440"/>
+            <a:ext cx="1388160" cy="253080"/>
           </a:xfrm>
           <a:prstGeom prst="rect">
             <a:avLst/>
@@ -11433,7 +11451,7 @@
         <p:spPr>
           <a:xfrm>
             <a:off x="3287520" y="3020040"/>
-            <a:ext cx="1388520" cy="253440"/>
+            <a:ext cx="1388160" cy="253080"/>
           </a:xfrm>
           <a:prstGeom prst="rect">
             <a:avLst/>
@@ -11486,7 +11504,7 @@
         <p:spPr>
           <a:xfrm>
             <a:off x="5050080" y="1149840"/>
-            <a:ext cx="3853440" cy="556200"/>
+            <a:ext cx="3853080" cy="555840"/>
           </a:xfrm>
           <a:prstGeom prst="roundRect">
             <a:avLst>
@@ -11540,7 +11558,7 @@
         <p:spPr>
           <a:xfrm>
             <a:off x="5140080" y="1298880"/>
-            <a:ext cx="258480" cy="258480"/>
+            <a:ext cx="258120" cy="258120"/>
           </a:xfrm>
           <a:prstGeom prst="roundRect">
             <a:avLst>
@@ -11598,7 +11616,7 @@
         <p:spPr>
           <a:xfrm>
             <a:off x="5191920" y="1350720"/>
-            <a:ext cx="154440" cy="154440"/>
+            <a:ext cx="154080" cy="154080"/>
           </a:xfrm>
           <a:prstGeom prst="rect">
             <a:avLst/>
@@ -11617,7 +11635,7 @@
         <p:spPr>
           <a:xfrm>
             <a:off x="5510160" y="1220040"/>
-            <a:ext cx="3303720" cy="210240"/>
+            <a:ext cx="3303360" cy="209880"/>
           </a:xfrm>
           <a:prstGeom prst="rect">
             <a:avLst/>
@@ -11670,7 +11688,7 @@
         <p:spPr>
           <a:xfrm>
             <a:off x="5510160" y="1431720"/>
-            <a:ext cx="3303720" cy="214200"/>
+            <a:ext cx="3303360" cy="213840"/>
           </a:xfrm>
           <a:prstGeom prst="rect">
             <a:avLst/>
@@ -11723,7 +11741,7 @@
         <p:spPr>
           <a:xfrm>
             <a:off x="5050080" y="1797480"/>
-            <a:ext cx="3853440" cy="556200"/>
+            <a:ext cx="3853080" cy="555840"/>
           </a:xfrm>
           <a:prstGeom prst="roundRect">
             <a:avLst>
@@ -11777,7 +11795,7 @@
         <p:spPr>
           <a:xfrm>
             <a:off x="5140080" y="1946160"/>
-            <a:ext cx="258480" cy="258480"/>
+            <a:ext cx="258120" cy="258120"/>
           </a:xfrm>
           <a:prstGeom prst="roundRect">
             <a:avLst>
@@ -11835,7 +11853,7 @@
         <p:spPr>
           <a:xfrm>
             <a:off x="5191920" y="1998360"/>
-            <a:ext cx="154440" cy="154440"/>
+            <a:ext cx="154080" cy="154080"/>
           </a:xfrm>
           <a:prstGeom prst="rect">
             <a:avLst/>
@@ -11854,7 +11872,7 @@
         <p:spPr>
           <a:xfrm>
             <a:off x="5510160" y="1867680"/>
-            <a:ext cx="3303720" cy="210240"/>
+            <a:ext cx="3303360" cy="209880"/>
           </a:xfrm>
           <a:prstGeom prst="rect">
             <a:avLst/>
@@ -11907,7 +11925,7 @@
         <p:spPr>
           <a:xfrm>
             <a:off x="5510160" y="2079360"/>
-            <a:ext cx="3303720" cy="214200"/>
+            <a:ext cx="3303360" cy="213840"/>
           </a:xfrm>
           <a:prstGeom prst="rect">
             <a:avLst/>
@@ -11960,7 +11978,7 @@
         <p:spPr>
           <a:xfrm>
             <a:off x="5050080" y="2445120"/>
-            <a:ext cx="3853440" cy="556200"/>
+            <a:ext cx="3853080" cy="555840"/>
           </a:xfrm>
           <a:prstGeom prst="roundRect">
             <a:avLst>
@@ -12014,7 +12032,7 @@
         <p:spPr>
           <a:xfrm>
             <a:off x="5140080" y="2593800"/>
-            <a:ext cx="258480" cy="258480"/>
+            <a:ext cx="258120" cy="258120"/>
           </a:xfrm>
           <a:prstGeom prst="roundRect">
             <a:avLst>
@@ -12072,7 +12090,7 @@
         <p:spPr>
           <a:xfrm>
             <a:off x="5191920" y="2645640"/>
-            <a:ext cx="154440" cy="154440"/>
+            <a:ext cx="154080" cy="154080"/>
           </a:xfrm>
           <a:prstGeom prst="rect">
             <a:avLst/>
@@ -12091,7 +12109,7 @@
         <p:spPr>
           <a:xfrm>
             <a:off x="5510160" y="2514960"/>
-            <a:ext cx="3303720" cy="210240"/>
+            <a:ext cx="3303360" cy="209880"/>
           </a:xfrm>
           <a:prstGeom prst="rect">
             <a:avLst/>
@@ -12144,7 +12162,7 @@
         <p:spPr>
           <a:xfrm>
             <a:off x="5510160" y="2727000"/>
-            <a:ext cx="3303720" cy="214200"/>
+            <a:ext cx="3303360" cy="213840"/>
           </a:xfrm>
           <a:prstGeom prst="rect">
             <a:avLst/>
@@ -12197,7 +12215,7 @@
         <p:spPr>
           <a:xfrm>
             <a:off x="5050080" y="3092400"/>
-            <a:ext cx="3853440" cy="556200"/>
+            <a:ext cx="3853080" cy="555840"/>
           </a:xfrm>
           <a:prstGeom prst="roundRect">
             <a:avLst>
@@ -12251,7 +12269,7 @@
         <p:spPr>
           <a:xfrm>
             <a:off x="5140080" y="3241080"/>
-            <a:ext cx="258480" cy="258480"/>
+            <a:ext cx="258120" cy="258120"/>
           </a:xfrm>
           <a:prstGeom prst="roundRect">
             <a:avLst>
@@ -12309,7 +12327,7 @@
         <p:spPr>
           <a:xfrm>
             <a:off x="5191920" y="3293280"/>
-            <a:ext cx="154440" cy="154440"/>
+            <a:ext cx="154080" cy="154080"/>
           </a:xfrm>
           <a:prstGeom prst="rect">
             <a:avLst/>
@@ -12328,7 +12346,7 @@
         <p:spPr>
           <a:xfrm>
             <a:off x="5510160" y="3162600"/>
-            <a:ext cx="3303720" cy="210240"/>
+            <a:ext cx="3303360" cy="209880"/>
           </a:xfrm>
           <a:prstGeom prst="rect">
             <a:avLst/>
@@ -12381,7 +12399,7 @@
         <p:spPr>
           <a:xfrm>
             <a:off x="5510160" y="3374280"/>
-            <a:ext cx="3303720" cy="214200"/>
+            <a:ext cx="3303360" cy="213840"/>
           </a:xfrm>
           <a:prstGeom prst="rect">
             <a:avLst/>
@@ -12434,7 +12452,7 @@
         <p:spPr>
           <a:xfrm>
             <a:off x="321480" y="3650040"/>
-            <a:ext cx="4478400" cy="258480"/>
+            <a:ext cx="4478040" cy="258120"/>
           </a:xfrm>
           <a:prstGeom prst="rect">
             <a:avLst/>
@@ -12487,7 +12505,7 @@
         <p:spPr>
           <a:xfrm>
             <a:off x="255960" y="3970080"/>
-            <a:ext cx="1517040" cy="358560"/>
+            <a:ext cx="1516680" cy="358200"/>
           </a:xfrm>
           <a:prstGeom prst="roundRect">
             <a:avLst>
@@ -12550,7 +12568,7 @@
         <p:spPr>
           <a:xfrm>
             <a:off x="2030040" y="3970080"/>
-            <a:ext cx="1517040" cy="358560"/>
+            <a:ext cx="1516680" cy="358200"/>
           </a:xfrm>
           <a:prstGeom prst="roundRect">
             <a:avLst>
@@ -12613,7 +12631,7 @@
         <p:spPr>
           <a:xfrm>
             <a:off x="3803760" y="3970080"/>
-            <a:ext cx="1517040" cy="358560"/>
+            <a:ext cx="1516680" cy="358200"/>
           </a:xfrm>
           <a:prstGeom prst="roundRect">
             <a:avLst>
@@ -12676,7 +12694,7 @@
         <p:spPr>
           <a:xfrm>
             <a:off x="5577840" y="3970080"/>
-            <a:ext cx="1517040" cy="358560"/>
+            <a:ext cx="1516680" cy="358200"/>
           </a:xfrm>
           <a:prstGeom prst="roundRect">
             <a:avLst>
@@ -12739,7 +12757,7 @@
         <p:spPr>
           <a:xfrm>
             <a:off x="7351920" y="3970080"/>
-            <a:ext cx="1517040" cy="358560"/>
+            <a:ext cx="1516680" cy="358200"/>
           </a:xfrm>
           <a:prstGeom prst="roundRect">
             <a:avLst>
@@ -12802,7 +12820,7 @@
         <p:spPr>
           <a:xfrm>
             <a:off x="255960" y="4420080"/>
-            <a:ext cx="1517040" cy="358560"/>
+            <a:ext cx="1516680" cy="358200"/>
           </a:xfrm>
           <a:prstGeom prst="roundRect">
             <a:avLst>
@@ -12865,7 +12883,7 @@
         <p:spPr>
           <a:xfrm>
             <a:off x="3803760" y="4441320"/>
-            <a:ext cx="1517040" cy="358560"/>
+            <a:ext cx="1516680" cy="358200"/>
           </a:xfrm>
           <a:prstGeom prst="roundRect">
             <a:avLst>
@@ -12928,7 +12946,7 @@
         <p:spPr>
           <a:xfrm>
             <a:off x="5577840" y="4441320"/>
-            <a:ext cx="1517040" cy="358560"/>
+            <a:ext cx="1516680" cy="358200"/>
           </a:xfrm>
           <a:prstGeom prst="roundRect">
             <a:avLst>
@@ -12991,7 +13009,7 @@
         <p:spPr>
           <a:xfrm>
             <a:off x="7351920" y="4441320"/>
-            <a:ext cx="1517040" cy="358560"/>
+            <a:ext cx="1516680" cy="358200"/>
           </a:xfrm>
           <a:prstGeom prst="roundRect">
             <a:avLst>
@@ -13054,7 +13072,7 @@
         <p:spPr>
           <a:xfrm>
             <a:off x="2030040" y="4441320"/>
-            <a:ext cx="1517040" cy="358560"/>
+            <a:ext cx="1516680" cy="358200"/>
           </a:xfrm>
           <a:prstGeom prst="roundRect">
             <a:avLst>
@@ -13154,7 +13172,7 @@
         <p:spPr>
           <a:xfrm>
             <a:off x="0" y="0"/>
-            <a:ext cx="52920" cy="5142240"/>
+            <a:ext cx="52560" cy="5141880"/>
           </a:xfrm>
           <a:prstGeom prst="rect">
             <a:avLst/>
@@ -13206,7 +13224,7 @@
         <p:spPr>
           <a:xfrm>
             <a:off x="274320" y="228600"/>
-            <a:ext cx="8593560" cy="217800"/>
+            <a:ext cx="8593200" cy="217440"/>
           </a:xfrm>
           <a:prstGeom prst="rect">
             <a:avLst/>
@@ -13233,7 +13251,7 @@
               </a:lnSpc>
             </a:pPr>
             <a:r>
-              <a:rPr b="1" lang="en-US" sz="850" spc="335" strike="noStrike">
+              <a:rPr b="1" lang="en-US" sz="850" spc="333" strike="noStrike">
                 <a:solidFill>
                   <a:srgbClr val="f5a623"/>
                 </a:solidFill>
@@ -13259,7 +13277,7 @@
         <p:spPr>
           <a:xfrm>
             <a:off x="274320" y="479880"/>
-            <a:ext cx="8593560" cy="698400"/>
+            <a:ext cx="8593200" cy="698040"/>
           </a:xfrm>
           <a:prstGeom prst="rect">
             <a:avLst/>
@@ -13312,7 +13330,7 @@
         <p:spPr>
           <a:xfrm>
             <a:off x="274320" y="1230120"/>
-            <a:ext cx="8593560" cy="558720"/>
+            <a:ext cx="8593200" cy="558360"/>
           </a:xfrm>
           <a:prstGeom prst="rect">
             <a:avLst/>
@@ -13396,7 +13414,7 @@
         <p:spPr>
           <a:xfrm>
             <a:off x="237600" y="1919880"/>
-            <a:ext cx="1637640" cy="2398680"/>
+            <a:ext cx="1637280" cy="2398320"/>
           </a:xfrm>
           <a:prstGeom prst="roundRect">
             <a:avLst>
@@ -13450,7 +13468,7 @@
         <p:spPr>
           <a:xfrm>
             <a:off x="237600" y="2070000"/>
-            <a:ext cx="1637640" cy="698400"/>
+            <a:ext cx="1637280" cy="698040"/>
           </a:xfrm>
           <a:prstGeom prst="rect">
             <a:avLst/>
@@ -13503,7 +13521,7 @@
         <p:spPr>
           <a:xfrm>
             <a:off x="237600" y="2800080"/>
-            <a:ext cx="1637640" cy="258480"/>
+            <a:ext cx="1637280" cy="258120"/>
           </a:xfrm>
           <a:prstGeom prst="rect">
             <a:avLst/>
@@ -13556,7 +13574,7 @@
         <p:spPr>
           <a:xfrm>
             <a:off x="532440" y="3109680"/>
-            <a:ext cx="1050480" cy="1440"/>
+            <a:ext cx="1050840" cy="1800"/>
           </a:xfrm>
           <a:prstGeom prst="straightConnector1">
             <a:avLst/>
@@ -13578,7 +13596,7 @@
         <p:spPr>
           <a:xfrm>
             <a:off x="307440" y="3200040"/>
-            <a:ext cx="1497600" cy="1038600"/>
+            <a:ext cx="1497240" cy="1038240"/>
           </a:xfrm>
           <a:prstGeom prst="rect">
             <a:avLst/>
@@ -13675,7 +13693,7 @@
         <p:spPr>
           <a:xfrm>
             <a:off x="1976760" y="1919880"/>
-            <a:ext cx="1637640" cy="2398680"/>
+            <a:ext cx="1637280" cy="2398320"/>
           </a:xfrm>
           <a:prstGeom prst="roundRect">
             <a:avLst>
@@ -13729,7 +13747,7 @@
         <p:spPr>
           <a:xfrm>
             <a:off x="1976760" y="2070000"/>
-            <a:ext cx="1637640" cy="698400"/>
+            <a:ext cx="1637280" cy="698040"/>
           </a:xfrm>
           <a:prstGeom prst="rect">
             <a:avLst/>
@@ -13782,7 +13800,7 @@
         <p:spPr>
           <a:xfrm>
             <a:off x="1976760" y="2800080"/>
-            <a:ext cx="1637640" cy="258480"/>
+            <a:ext cx="1637280" cy="258120"/>
           </a:xfrm>
           <a:prstGeom prst="rect">
             <a:avLst/>
@@ -13835,7 +13853,7 @@
         <p:spPr>
           <a:xfrm>
             <a:off x="2271600" y="3109680"/>
-            <a:ext cx="1050120" cy="1440"/>
+            <a:ext cx="1050480" cy="1800"/>
           </a:xfrm>
           <a:prstGeom prst="straightConnector1">
             <a:avLst/>
@@ -13857,7 +13875,7 @@
         <p:spPr>
           <a:xfrm>
             <a:off x="2046600" y="3200040"/>
-            <a:ext cx="1497600" cy="1038600"/>
+            <a:ext cx="1497240" cy="1038240"/>
           </a:xfrm>
           <a:prstGeom prst="rect">
             <a:avLst/>
@@ -13954,7 +13972,7 @@
         <p:spPr>
           <a:xfrm>
             <a:off x="3715560" y="1919880"/>
-            <a:ext cx="1637640" cy="2398680"/>
+            <a:ext cx="1637280" cy="2398320"/>
           </a:xfrm>
           <a:prstGeom prst="roundRect">
             <a:avLst>
@@ -14008,7 +14026,7 @@
         <p:spPr>
           <a:xfrm>
             <a:off x="3715560" y="2070000"/>
-            <a:ext cx="1637640" cy="698400"/>
+            <a:ext cx="1637280" cy="698040"/>
           </a:xfrm>
           <a:prstGeom prst="rect">
             <a:avLst/>
@@ -14061,7 +14079,7 @@
         <p:spPr>
           <a:xfrm>
             <a:off x="3715560" y="2800080"/>
-            <a:ext cx="1637640" cy="258480"/>
+            <a:ext cx="1637280" cy="258120"/>
           </a:xfrm>
           <a:prstGeom prst="rect">
             <a:avLst/>
@@ -14114,7 +14132,7 @@
         <p:spPr>
           <a:xfrm>
             <a:off x="4010400" y="3109680"/>
-            <a:ext cx="1050480" cy="1440"/>
+            <a:ext cx="1050840" cy="1800"/>
           </a:xfrm>
           <a:prstGeom prst="straightConnector1">
             <a:avLst/>
@@ -14136,7 +14154,7 @@
         <p:spPr>
           <a:xfrm>
             <a:off x="3785760" y="3200040"/>
-            <a:ext cx="1497600" cy="1038600"/>
+            <a:ext cx="1497240" cy="1038240"/>
           </a:xfrm>
           <a:prstGeom prst="rect">
             <a:avLst/>
@@ -14233,7 +14251,7 @@
         <p:spPr>
           <a:xfrm>
             <a:off x="5454720" y="1919880"/>
-            <a:ext cx="1637640" cy="2398680"/>
+            <a:ext cx="1637280" cy="2398320"/>
           </a:xfrm>
           <a:prstGeom prst="roundRect">
             <a:avLst>
@@ -14287,7 +14305,7 @@
         <p:spPr>
           <a:xfrm>
             <a:off x="5454720" y="2070000"/>
-            <a:ext cx="1637640" cy="698400"/>
+            <a:ext cx="1637280" cy="698040"/>
           </a:xfrm>
           <a:prstGeom prst="rect">
             <a:avLst/>
@@ -14340,7 +14358,7 @@
         <p:spPr>
           <a:xfrm>
             <a:off x="5454720" y="2800080"/>
-            <a:ext cx="1637640" cy="258480"/>
+            <a:ext cx="1637280" cy="258120"/>
           </a:xfrm>
           <a:prstGeom prst="rect">
             <a:avLst/>
@@ -14393,7 +14411,7 @@
         <p:spPr>
           <a:xfrm>
             <a:off x="5749560" y="3109680"/>
-            <a:ext cx="1050120" cy="1440"/>
+            <a:ext cx="1050480" cy="1800"/>
           </a:xfrm>
           <a:prstGeom prst="straightConnector1">
             <a:avLst/>
@@ -14415,7 +14433,7 @@
         <p:spPr>
           <a:xfrm>
             <a:off x="5524560" y="3200040"/>
-            <a:ext cx="1497600" cy="1038600"/>
+            <a:ext cx="1497240" cy="1038240"/>
           </a:xfrm>
           <a:prstGeom prst="rect">
             <a:avLst/>
@@ -14512,7 +14530,7 @@
         <p:spPr>
           <a:xfrm>
             <a:off x="7193520" y="1919880"/>
-            <a:ext cx="1637640" cy="2398680"/>
+            <a:ext cx="1637280" cy="2398320"/>
           </a:xfrm>
           <a:prstGeom prst="roundRect">
             <a:avLst>
@@ -14566,7 +14584,7 @@
         <p:spPr>
           <a:xfrm>
             <a:off x="7193520" y="2070000"/>
-            <a:ext cx="1637640" cy="698400"/>
+            <a:ext cx="1637280" cy="698040"/>
           </a:xfrm>
           <a:prstGeom prst="rect">
             <a:avLst/>
@@ -14619,7 +14637,7 @@
         <p:spPr>
           <a:xfrm>
             <a:off x="7193520" y="2800080"/>
-            <a:ext cx="1637640" cy="258480"/>
+            <a:ext cx="1637280" cy="258120"/>
           </a:xfrm>
           <a:prstGeom prst="rect">
             <a:avLst/>
@@ -14672,7 +14690,7 @@
         <p:spPr>
           <a:xfrm>
             <a:off x="7488360" y="3109680"/>
-            <a:ext cx="1050480" cy="1440"/>
+            <a:ext cx="1050840" cy="1800"/>
           </a:xfrm>
           <a:prstGeom prst="straightConnector1">
             <a:avLst/>
@@ -14694,7 +14712,7 @@
         <p:spPr>
           <a:xfrm>
             <a:off x="7263720" y="3200040"/>
-            <a:ext cx="1497600" cy="1038600"/>
+            <a:ext cx="1497240" cy="1038240"/>
           </a:xfrm>
           <a:prstGeom prst="rect">
             <a:avLst/>
@@ -14791,7 +14809,7 @@
         <p:spPr>
           <a:xfrm>
             <a:off x="237600" y="4470120"/>
-            <a:ext cx="8593560" cy="598680"/>
+            <a:ext cx="8593200" cy="598320"/>
           </a:xfrm>
           <a:prstGeom prst="roundRect">
             <a:avLst>
@@ -14845,7 +14863,7 @@
         <p:spPr>
           <a:xfrm>
             <a:off x="349920" y="4470120"/>
-            <a:ext cx="1498680" cy="238680"/>
+            <a:ext cx="1498320" cy="238320"/>
           </a:xfrm>
           <a:prstGeom prst="rect">
             <a:avLst/>
@@ -14872,7 +14890,7 @@
               </a:lnSpc>
             </a:pPr>
             <a:r>
-              <a:rPr b="1" lang="en-US" sz="900" spc="239" strike="noStrike">
+              <a:rPr b="1" lang="en-US" sz="900" spc="236" strike="noStrike">
                 <a:solidFill>
                   <a:srgbClr val="f5a623"/>
                 </a:solidFill>
@@ -14898,7 +14916,7 @@
         <p:spPr>
           <a:xfrm>
             <a:off x="349920" y="4749840"/>
-            <a:ext cx="1498680" cy="258480"/>
+            <a:ext cx="1498320" cy="258120"/>
           </a:xfrm>
           <a:prstGeom prst="rect">
             <a:avLst/>
@@ -14951,7 +14969,7 @@
         <p:spPr>
           <a:xfrm>
             <a:off x="1917720" y="4470120"/>
-            <a:ext cx="1309680" cy="598680"/>
+            <a:ext cx="1309320" cy="598320"/>
           </a:xfrm>
           <a:prstGeom prst="rect">
             <a:avLst/>
@@ -15026,7 +15044,7 @@
         <p:spPr>
           <a:xfrm>
             <a:off x="3308760" y="4470120"/>
-            <a:ext cx="1309680" cy="598680"/>
+            <a:ext cx="1309320" cy="598320"/>
           </a:xfrm>
           <a:prstGeom prst="rect">
             <a:avLst/>
@@ -15101,7 +15119,7 @@
         <p:spPr>
           <a:xfrm>
             <a:off x="4699440" y="4470120"/>
-            <a:ext cx="1309680" cy="598680"/>
+            <a:ext cx="1309320" cy="598320"/>
           </a:xfrm>
           <a:prstGeom prst="rect">
             <a:avLst/>
@@ -15176,7 +15194,7 @@
         <p:spPr>
           <a:xfrm>
             <a:off x="6090480" y="4470120"/>
-            <a:ext cx="1309680" cy="598680"/>
+            <a:ext cx="1309320" cy="598320"/>
           </a:xfrm>
           <a:prstGeom prst="rect">
             <a:avLst/>
@@ -15229,7 +15247,7 @@
         <p:spPr>
           <a:xfrm>
             <a:off x="7481520" y="4470120"/>
-            <a:ext cx="1309680" cy="598680"/>
+            <a:ext cx="1309320" cy="598320"/>
           </a:xfrm>
           <a:prstGeom prst="rect">
             <a:avLst/>
@@ -15341,7 +15359,7 @@
         <p:spPr>
           <a:xfrm>
             <a:off x="0" y="0"/>
-            <a:ext cx="52920" cy="5142240"/>
+            <a:ext cx="52560" cy="5141880"/>
           </a:xfrm>
           <a:prstGeom prst="rect">
             <a:avLst/>
@@ -15393,7 +15411,7 @@
         <p:spPr>
           <a:xfrm>
             <a:off x="274320" y="228600"/>
-            <a:ext cx="8593560" cy="217800"/>
+            <a:ext cx="8593200" cy="217440"/>
           </a:xfrm>
           <a:prstGeom prst="rect">
             <a:avLst/>
@@ -15420,7 +15438,7 @@
               </a:lnSpc>
             </a:pPr>
             <a:r>
-              <a:rPr b="1" lang="en-US" sz="850" spc="335" strike="noStrike">
+              <a:rPr b="1" lang="en-US" sz="850" spc="333" strike="noStrike">
                 <a:solidFill>
                   <a:srgbClr val="f5a623"/>
                 </a:solidFill>
@@ -15446,7 +15464,7 @@
         <p:spPr>
           <a:xfrm>
             <a:off x="274320" y="457200"/>
-            <a:ext cx="6399000" cy="546840"/>
+            <a:ext cx="6398640" cy="546480"/>
           </a:xfrm>
           <a:prstGeom prst="rect">
             <a:avLst/>
@@ -15499,7 +15517,7 @@
         <p:spPr>
           <a:xfrm>
             <a:off x="237600" y="1115640"/>
-            <a:ext cx="2759760" cy="1698840"/>
+            <a:ext cx="2759400" cy="1698480"/>
           </a:xfrm>
           <a:prstGeom prst="roundRect">
             <a:avLst>
@@ -15560,7 +15578,7 @@
         <p:spPr>
           <a:xfrm>
             <a:off x="365760" y="1234800"/>
-            <a:ext cx="309240" cy="309240"/>
+            <a:ext cx="308880" cy="308880"/>
           </a:xfrm>
           <a:prstGeom prst="roundRect">
             <a:avLst>
@@ -15618,7 +15636,7 @@
         <p:spPr>
           <a:xfrm>
             <a:off x="424800" y="1293840"/>
-            <a:ext cx="191160" cy="191160"/>
+            <a:ext cx="190800" cy="190800"/>
           </a:xfrm>
           <a:prstGeom prst="rect">
             <a:avLst/>
@@ -15637,7 +15655,7 @@
         <p:spPr>
           <a:xfrm>
             <a:off x="2590560" y="1234800"/>
-            <a:ext cx="278640" cy="278640"/>
+            <a:ext cx="278280" cy="278280"/>
           </a:xfrm>
           <a:prstGeom prst="roundRect">
             <a:avLst>
@@ -15700,7 +15718,7 @@
         <p:spPr>
           <a:xfrm>
             <a:off x="365760" y="1591200"/>
-            <a:ext cx="2503440" cy="254160"/>
+            <a:ext cx="2503080" cy="253800"/>
           </a:xfrm>
           <a:prstGeom prst="rect">
             <a:avLst/>
@@ -15753,7 +15771,7 @@
         <p:spPr>
           <a:xfrm>
             <a:off x="365760" y="1883520"/>
-            <a:ext cx="2503440" cy="898920"/>
+            <a:ext cx="2503080" cy="898560"/>
           </a:xfrm>
           <a:prstGeom prst="rect">
             <a:avLst/>
@@ -15892,7 +15910,7 @@
         <p:spPr>
           <a:xfrm>
             <a:off x="3098520" y="1115640"/>
-            <a:ext cx="2759760" cy="1698840"/>
+            <a:ext cx="2759400" cy="1698480"/>
           </a:xfrm>
           <a:prstGeom prst="roundRect">
             <a:avLst>
@@ -15953,7 +15971,7 @@
         <p:spPr>
           <a:xfrm>
             <a:off x="3226680" y="1234800"/>
-            <a:ext cx="309240" cy="309240"/>
+            <a:ext cx="308880" cy="308880"/>
           </a:xfrm>
           <a:prstGeom prst="roundRect">
             <a:avLst>
@@ -16011,7 +16029,7 @@
         <p:spPr>
           <a:xfrm>
             <a:off x="3285720" y="1293840"/>
-            <a:ext cx="191160" cy="191160"/>
+            <a:ext cx="190800" cy="190800"/>
           </a:xfrm>
           <a:prstGeom prst="rect">
             <a:avLst/>
@@ -16030,7 +16048,7 @@
         <p:spPr>
           <a:xfrm>
             <a:off x="5451480" y="1234800"/>
-            <a:ext cx="278640" cy="278640"/>
+            <a:ext cx="278280" cy="278280"/>
           </a:xfrm>
           <a:prstGeom prst="roundRect">
             <a:avLst>
@@ -16093,7 +16111,7 @@
         <p:spPr>
           <a:xfrm>
             <a:off x="3226680" y="1591200"/>
-            <a:ext cx="2503440" cy="254160"/>
+            <a:ext cx="2503080" cy="253800"/>
           </a:xfrm>
           <a:prstGeom prst="rect">
             <a:avLst/>
@@ -16146,7 +16164,7 @@
         <p:spPr>
           <a:xfrm>
             <a:off x="3226680" y="1883520"/>
-            <a:ext cx="2503440" cy="898920"/>
+            <a:ext cx="2503080" cy="898560"/>
           </a:xfrm>
           <a:prstGeom prst="rect">
             <a:avLst/>
@@ -16285,7 +16303,7 @@
         <p:spPr>
           <a:xfrm>
             <a:off x="5959440" y="1115640"/>
-            <a:ext cx="2759760" cy="1698840"/>
+            <a:ext cx="2759400" cy="1698480"/>
           </a:xfrm>
           <a:prstGeom prst="roundRect">
             <a:avLst>
@@ -16346,7 +16364,7 @@
         <p:spPr>
           <a:xfrm>
             <a:off x="6087600" y="1234800"/>
-            <a:ext cx="309240" cy="309240"/>
+            <a:ext cx="308880" cy="308880"/>
           </a:xfrm>
           <a:prstGeom prst="roundRect">
             <a:avLst>
@@ -16404,7 +16422,7 @@
         <p:spPr>
           <a:xfrm>
             <a:off x="6146640" y="1293840"/>
-            <a:ext cx="191160" cy="191160"/>
+            <a:ext cx="190800" cy="190800"/>
           </a:xfrm>
           <a:prstGeom prst="rect">
             <a:avLst/>
@@ -16423,7 +16441,7 @@
         <p:spPr>
           <a:xfrm>
             <a:off x="8312400" y="1234800"/>
-            <a:ext cx="278640" cy="278640"/>
+            <a:ext cx="278280" cy="278280"/>
           </a:xfrm>
           <a:prstGeom prst="roundRect">
             <a:avLst>
@@ -16486,7 +16504,7 @@
         <p:spPr>
           <a:xfrm>
             <a:off x="6087600" y="1591200"/>
-            <a:ext cx="2503440" cy="254160"/>
+            <a:ext cx="2503080" cy="253800"/>
           </a:xfrm>
           <a:prstGeom prst="rect">
             <a:avLst/>
@@ -16539,7 +16557,7 @@
         <p:spPr>
           <a:xfrm>
             <a:off x="6087600" y="1883520"/>
-            <a:ext cx="2503440" cy="898920"/>
+            <a:ext cx="2503080" cy="898560"/>
           </a:xfrm>
           <a:prstGeom prst="rect">
             <a:avLst/>
@@ -16678,7 +16696,7 @@
         <p:spPr>
           <a:xfrm>
             <a:off x="237600" y="2945880"/>
-            <a:ext cx="2759760" cy="1698840"/>
+            <a:ext cx="2759400" cy="1698480"/>
           </a:xfrm>
           <a:prstGeom prst="roundRect">
             <a:avLst>
@@ -16739,7 +16757,7 @@
         <p:spPr>
           <a:xfrm>
             <a:off x="365760" y="3065040"/>
-            <a:ext cx="309240" cy="309240"/>
+            <a:ext cx="308880" cy="308880"/>
           </a:xfrm>
           <a:prstGeom prst="roundRect">
             <a:avLst>
@@ -16797,7 +16815,7 @@
         <p:spPr>
           <a:xfrm>
             <a:off x="424800" y="3124080"/>
-            <a:ext cx="191160" cy="191160"/>
+            <a:ext cx="190800" cy="190800"/>
           </a:xfrm>
           <a:prstGeom prst="rect">
             <a:avLst/>
@@ -16816,7 +16834,7 @@
         <p:spPr>
           <a:xfrm>
             <a:off x="2590560" y="3065040"/>
-            <a:ext cx="278640" cy="278640"/>
+            <a:ext cx="278280" cy="278280"/>
           </a:xfrm>
           <a:prstGeom prst="roundRect">
             <a:avLst>
@@ -16879,7 +16897,7 @@
         <p:spPr>
           <a:xfrm>
             <a:off x="365760" y="3421440"/>
-            <a:ext cx="2503440" cy="254160"/>
+            <a:ext cx="2503080" cy="253800"/>
           </a:xfrm>
           <a:prstGeom prst="rect">
             <a:avLst/>
@@ -16932,7 +16950,7 @@
         <p:spPr>
           <a:xfrm>
             <a:off x="365760" y="3713760"/>
-            <a:ext cx="2503440" cy="898920"/>
+            <a:ext cx="2503080" cy="898560"/>
           </a:xfrm>
           <a:prstGeom prst="rect">
             <a:avLst/>
@@ -17071,7 +17089,7 @@
         <p:spPr>
           <a:xfrm>
             <a:off x="3098520" y="2945880"/>
-            <a:ext cx="2759760" cy="1698840"/>
+            <a:ext cx="2759400" cy="1698480"/>
           </a:xfrm>
           <a:prstGeom prst="roundRect">
             <a:avLst>
@@ -17132,7 +17150,7 @@
         <p:spPr>
           <a:xfrm>
             <a:off x="3226680" y="3065040"/>
-            <a:ext cx="309240" cy="309240"/>
+            <a:ext cx="308880" cy="308880"/>
           </a:xfrm>
           <a:prstGeom prst="roundRect">
             <a:avLst>
@@ -17190,7 +17208,7 @@
         <p:spPr>
           <a:xfrm>
             <a:off x="3285720" y="3124080"/>
-            <a:ext cx="191160" cy="191160"/>
+            <a:ext cx="190800" cy="190800"/>
           </a:xfrm>
           <a:prstGeom prst="rect">
             <a:avLst/>
@@ -17209,7 +17227,7 @@
         <p:spPr>
           <a:xfrm>
             <a:off x="5451480" y="3065040"/>
-            <a:ext cx="278640" cy="278640"/>
+            <a:ext cx="278280" cy="278280"/>
           </a:xfrm>
           <a:prstGeom prst="roundRect">
             <a:avLst>
@@ -17272,7 +17290,7 @@
         <p:spPr>
           <a:xfrm>
             <a:off x="3226680" y="3421440"/>
-            <a:ext cx="2503440" cy="254160"/>
+            <a:ext cx="2503080" cy="253800"/>
           </a:xfrm>
           <a:prstGeom prst="rect">
             <a:avLst/>
@@ -17325,7 +17343,7 @@
         <p:spPr>
           <a:xfrm>
             <a:off x="3226680" y="3713760"/>
-            <a:ext cx="2503440" cy="898920"/>
+            <a:ext cx="2503080" cy="898560"/>
           </a:xfrm>
           <a:prstGeom prst="rect">
             <a:avLst/>
@@ -17464,7 +17482,7 @@
         <p:spPr>
           <a:xfrm>
             <a:off x="5959440" y="2945880"/>
-            <a:ext cx="2759760" cy="1698840"/>
+            <a:ext cx="2759400" cy="1698480"/>
           </a:xfrm>
           <a:prstGeom prst="roundRect">
             <a:avLst>
@@ -17525,7 +17543,7 @@
         <p:spPr>
           <a:xfrm>
             <a:off x="6087600" y="3065040"/>
-            <a:ext cx="309240" cy="309240"/>
+            <a:ext cx="308880" cy="308880"/>
           </a:xfrm>
           <a:prstGeom prst="roundRect">
             <a:avLst>
@@ -17583,7 +17601,7 @@
         <p:spPr>
           <a:xfrm>
             <a:off x="6146640" y="3124080"/>
-            <a:ext cx="191160" cy="191160"/>
+            <a:ext cx="190800" cy="190800"/>
           </a:xfrm>
           <a:prstGeom prst="rect">
             <a:avLst/>
@@ -17602,7 +17620,7 @@
         <p:spPr>
           <a:xfrm>
             <a:off x="8312400" y="3065040"/>
-            <a:ext cx="278640" cy="278640"/>
+            <a:ext cx="278280" cy="278280"/>
           </a:xfrm>
           <a:prstGeom prst="roundRect">
             <a:avLst>
@@ -17665,7 +17683,7 @@
         <p:spPr>
           <a:xfrm>
             <a:off x="6087600" y="3421440"/>
-            <a:ext cx="2503440" cy="254160"/>
+            <a:ext cx="2503080" cy="253800"/>
           </a:xfrm>
           <a:prstGeom prst="rect">
             <a:avLst/>
@@ -17718,7 +17736,7 @@
         <p:spPr>
           <a:xfrm>
             <a:off x="6087600" y="3713760"/>
-            <a:ext cx="2503440" cy="898920"/>
+            <a:ext cx="2503080" cy="898560"/>
           </a:xfrm>
           <a:prstGeom prst="rect">
             <a:avLst/>
@@ -17894,7 +17912,7 @@
         <p:spPr>
           <a:xfrm>
             <a:off x="0" y="0"/>
-            <a:ext cx="52920" cy="5141880"/>
+            <a:ext cx="52560" cy="5141520"/>
           </a:xfrm>
           <a:prstGeom prst="rect">
             <a:avLst/>
@@ -17943,7 +17961,7 @@
         <p:spPr>
           <a:xfrm>
             <a:off x="274320" y="228600"/>
-            <a:ext cx="8593560" cy="217800"/>
+            <a:ext cx="8593200" cy="217440"/>
           </a:xfrm>
           <a:prstGeom prst="rect">
             <a:avLst/>
@@ -17973,7 +17991,7 @@
               </a:tabLst>
             </a:pPr>
             <a:r>
-              <a:rPr b="1" lang="en-US" sz="850" spc="335" strike="noStrike">
+              <a:rPr b="1" lang="en-US" sz="850" spc="333" strike="noStrike">
                 <a:solidFill>
                   <a:srgbClr val="f5a623"/>
                 </a:solidFill>
@@ -18000,7 +18018,7 @@
         <p:spPr>
           <a:xfrm>
             <a:off x="274320" y="457200"/>
-            <a:ext cx="5667480" cy="546840"/>
+            <a:ext cx="5667120" cy="546480"/>
           </a:xfrm>
           <a:prstGeom prst="rect">
             <a:avLst/>
@@ -18057,7 +18075,7 @@
         <p:spPr>
           <a:xfrm>
             <a:off x="274320" y="1005840"/>
-            <a:ext cx="6399000" cy="272520"/>
+            <a:ext cx="6398640" cy="272160"/>
           </a:xfrm>
           <a:prstGeom prst="rect">
             <a:avLst/>
@@ -18114,7 +18132,7 @@
         <p:spPr>
           <a:xfrm>
             <a:off x="7644240" y="274320"/>
-            <a:ext cx="1113840" cy="802800"/>
+            <a:ext cx="1113480" cy="802440"/>
           </a:xfrm>
           <a:prstGeom prst="roundRect">
             <a:avLst>
@@ -18162,7 +18180,7 @@
         <p:spPr>
           <a:xfrm>
             <a:off x="7644240" y="292680"/>
-            <a:ext cx="1113840" cy="455400"/>
+            <a:ext cx="1113480" cy="455040"/>
           </a:xfrm>
           <a:prstGeom prst="rect">
             <a:avLst/>
@@ -18219,7 +18237,7 @@
         <p:spPr>
           <a:xfrm>
             <a:off x="7644240" y="768240"/>
-            <a:ext cx="1113840" cy="235800"/>
+            <a:ext cx="1113480" cy="235440"/>
           </a:xfrm>
           <a:prstGeom prst="rect">
             <a:avLst/>
@@ -18276,7 +18294,7 @@
         <p:spPr>
           <a:xfrm>
             <a:off x="7644240" y="1261800"/>
-            <a:ext cx="1113840" cy="455400"/>
+            <a:ext cx="1113480" cy="455040"/>
           </a:xfrm>
           <a:prstGeom prst="rect">
             <a:avLst/>
@@ -18333,7 +18351,7 @@
         <p:spPr>
           <a:xfrm>
             <a:off x="7644240" y="1737360"/>
-            <a:ext cx="1113840" cy="235800"/>
+            <a:ext cx="1113480" cy="235440"/>
           </a:xfrm>
           <a:prstGeom prst="rect">
             <a:avLst/>
@@ -18390,7 +18408,7 @@
         <p:spPr>
           <a:xfrm>
             <a:off x="237600" y="1389960"/>
-            <a:ext cx="2778120" cy="3509640"/>
+            <a:ext cx="2777760" cy="3509280"/>
           </a:xfrm>
           <a:prstGeom prst="roundRect">
             <a:avLst>
@@ -18449,7 +18467,7 @@
         <p:spPr>
           <a:xfrm>
             <a:off x="402480" y="1536120"/>
-            <a:ext cx="364320" cy="364320"/>
+            <a:ext cx="363960" cy="363960"/>
           </a:xfrm>
           <a:prstGeom prst="rect">
             <a:avLst/>
@@ -18468,7 +18486,7 @@
         <p:spPr>
           <a:xfrm>
             <a:off x="402480" y="1901880"/>
-            <a:ext cx="912600" cy="199440"/>
+            <a:ext cx="912240" cy="199080"/>
           </a:xfrm>
           <a:prstGeom prst="rect">
             <a:avLst/>
@@ -18525,7 +18543,7 @@
         <p:spPr>
           <a:xfrm>
             <a:off x="402480" y="2103120"/>
-            <a:ext cx="2448720" cy="272520"/>
+            <a:ext cx="2448360" cy="272160"/>
           </a:xfrm>
           <a:prstGeom prst="rect">
             <a:avLst/>
@@ -18582,7 +18600,7 @@
         <p:spPr>
           <a:xfrm>
             <a:off x="394920" y="2515320"/>
-            <a:ext cx="2448720" cy="18360"/>
+            <a:ext cx="2448360" cy="18000"/>
           </a:xfrm>
           <a:prstGeom prst="rect">
             <a:avLst/>
@@ -18631,7 +18649,7 @@
         <p:spPr>
           <a:xfrm>
             <a:off x="394920" y="2675880"/>
-            <a:ext cx="2448720" cy="1955160"/>
+            <a:ext cx="2448360" cy="1954800"/>
           </a:xfrm>
           <a:prstGeom prst="rect">
             <a:avLst/>
@@ -18802,7 +18820,7 @@
         <p:spPr>
           <a:xfrm>
             <a:off x="402480" y="4480560"/>
-            <a:ext cx="2448720" cy="290880"/>
+            <a:ext cx="2448360" cy="290520"/>
           </a:xfrm>
           <a:prstGeom prst="roundRect">
             <a:avLst>
@@ -18850,7 +18868,7 @@
         <p:spPr>
           <a:xfrm>
             <a:off x="402480" y="4480560"/>
-            <a:ext cx="2448720" cy="290880"/>
+            <a:ext cx="2448360" cy="290520"/>
           </a:xfrm>
           <a:prstGeom prst="rect">
             <a:avLst/>
@@ -18907,7 +18925,7 @@
         <p:spPr>
           <a:xfrm>
             <a:off x="3182040" y="1389960"/>
-            <a:ext cx="2778120" cy="3509640"/>
+            <a:ext cx="2777760" cy="3509280"/>
           </a:xfrm>
           <a:prstGeom prst="roundRect">
             <a:avLst>
@@ -18966,7 +18984,7 @@
         <p:spPr>
           <a:xfrm>
             <a:off x="3346560" y="1536120"/>
-            <a:ext cx="364320" cy="364320"/>
+            <a:ext cx="363960" cy="363960"/>
           </a:xfrm>
           <a:prstGeom prst="rect">
             <a:avLst/>
@@ -18985,7 +19003,7 @@
         <p:spPr>
           <a:xfrm>
             <a:off x="3346560" y="1902240"/>
-            <a:ext cx="912600" cy="199440"/>
+            <a:ext cx="912240" cy="199080"/>
           </a:xfrm>
           <a:prstGeom prst="rect">
             <a:avLst/>
@@ -19042,7 +19060,7 @@
         <p:spPr>
           <a:xfrm>
             <a:off x="3346560" y="2103120"/>
-            <a:ext cx="2448720" cy="272520"/>
+            <a:ext cx="2448360" cy="272160"/>
           </a:xfrm>
           <a:prstGeom prst="rect">
             <a:avLst/>
@@ -19099,7 +19117,7 @@
         <p:spPr>
           <a:xfrm>
             <a:off x="3346560" y="2512440"/>
-            <a:ext cx="2448720" cy="18360"/>
+            <a:ext cx="2448360" cy="18000"/>
           </a:xfrm>
           <a:prstGeom prst="rect">
             <a:avLst/>
@@ -19148,7 +19166,7 @@
         <p:spPr>
           <a:xfrm>
             <a:off x="3331440" y="2697840"/>
-            <a:ext cx="2448720" cy="1955160"/>
+            <a:ext cx="2448360" cy="1954800"/>
           </a:xfrm>
           <a:prstGeom prst="rect">
             <a:avLst/>
@@ -19319,7 +19337,7 @@
         <p:spPr>
           <a:xfrm>
             <a:off x="3346560" y="4480560"/>
-            <a:ext cx="2448720" cy="290880"/>
+            <a:ext cx="2448360" cy="290520"/>
           </a:xfrm>
           <a:prstGeom prst="roundRect">
             <a:avLst>
@@ -19367,7 +19385,7 @@
         <p:spPr>
           <a:xfrm>
             <a:off x="3346560" y="4480560"/>
-            <a:ext cx="2448720" cy="290880"/>
+            <a:ext cx="2448360" cy="290520"/>
           </a:xfrm>
           <a:prstGeom prst="rect">
             <a:avLst/>
@@ -19424,7 +19442,7 @@
         <p:spPr>
           <a:xfrm>
             <a:off x="6126480" y="1389960"/>
-            <a:ext cx="2778120" cy="3509640"/>
+            <a:ext cx="2777760" cy="3509280"/>
           </a:xfrm>
           <a:prstGeom prst="roundRect">
             <a:avLst>
@@ -19483,7 +19501,7 @@
         <p:spPr>
           <a:xfrm>
             <a:off x="6291000" y="1536120"/>
-            <a:ext cx="364320" cy="364320"/>
+            <a:ext cx="363960" cy="363960"/>
           </a:xfrm>
           <a:prstGeom prst="rect">
             <a:avLst/>
@@ -19502,7 +19520,7 @@
         <p:spPr>
           <a:xfrm>
             <a:off x="6291000" y="1917000"/>
-            <a:ext cx="912600" cy="199440"/>
+            <a:ext cx="912240" cy="199080"/>
           </a:xfrm>
           <a:prstGeom prst="rect">
             <a:avLst/>
@@ -19559,7 +19577,7 @@
         <p:spPr>
           <a:xfrm>
             <a:off x="6291000" y="2103120"/>
-            <a:ext cx="2448720" cy="272520"/>
+            <a:ext cx="2448360" cy="272160"/>
           </a:xfrm>
           <a:prstGeom prst="rect">
             <a:avLst/>
@@ -19616,7 +19634,7 @@
         <p:spPr>
           <a:xfrm>
             <a:off x="6291000" y="2500200"/>
-            <a:ext cx="2448720" cy="18360"/>
+            <a:ext cx="2448360" cy="18000"/>
           </a:xfrm>
           <a:prstGeom prst="rect">
             <a:avLst/>
@@ -19665,7 +19683,7 @@
         <p:spPr>
           <a:xfrm>
             <a:off x="6275880" y="2649960"/>
-            <a:ext cx="2448720" cy="1955160"/>
+            <a:ext cx="2448360" cy="1954800"/>
           </a:xfrm>
           <a:prstGeom prst="rect">
             <a:avLst/>
@@ -19836,7 +19854,7 @@
         <p:spPr>
           <a:xfrm>
             <a:off x="6291000" y="4480560"/>
-            <a:ext cx="2448720" cy="290880"/>
+            <a:ext cx="2448360" cy="290520"/>
           </a:xfrm>
           <a:prstGeom prst="roundRect">
             <a:avLst>
@@ -19884,7 +19902,7 @@
         <p:spPr>
           <a:xfrm>
             <a:off x="6291000" y="4480560"/>
-            <a:ext cx="2448720" cy="290880"/>
+            <a:ext cx="2448360" cy="290520"/>
           </a:xfrm>
           <a:prstGeom prst="rect">
             <a:avLst/>
@@ -19978,7 +19996,7 @@
         <p:spPr>
           <a:xfrm>
             <a:off x="0" y="0"/>
-            <a:ext cx="52920" cy="5141880"/>
+            <a:ext cx="52560" cy="5141520"/>
           </a:xfrm>
           <a:prstGeom prst="rect">
             <a:avLst/>
@@ -20027,7 +20045,7 @@
         <p:spPr>
           <a:xfrm>
             <a:off x="274320" y="228600"/>
-            <a:ext cx="8593560" cy="217800"/>
+            <a:ext cx="8593200" cy="217440"/>
           </a:xfrm>
           <a:prstGeom prst="rect">
             <a:avLst/>
@@ -20057,7 +20075,7 @@
               </a:tabLst>
             </a:pPr>
             <a:r>
-              <a:rPr b="1" lang="en-US" sz="850" spc="335" strike="noStrike">
+              <a:rPr b="1" lang="en-US" sz="850" spc="333" strike="noStrike">
                 <a:solidFill>
                   <a:srgbClr val="f5a623"/>
                 </a:solidFill>
@@ -20084,7 +20102,7 @@
         <p:spPr>
           <a:xfrm>
             <a:off x="274320" y="457200"/>
-            <a:ext cx="6399000" cy="546840"/>
+            <a:ext cx="6398640" cy="546480"/>
           </a:xfrm>
           <a:prstGeom prst="rect">
             <a:avLst/>
@@ -20141,7 +20159,7 @@
         <p:spPr>
           <a:xfrm>
             <a:off x="237600" y="1115640"/>
-            <a:ext cx="4222800" cy="3912120"/>
+            <a:ext cx="4222440" cy="3911760"/>
           </a:xfrm>
           <a:prstGeom prst="roundRect">
             <a:avLst>
@@ -20200,7 +20218,7 @@
         <p:spPr>
           <a:xfrm>
             <a:off x="420480" y="1261800"/>
-            <a:ext cx="327240" cy="327240"/>
+            <a:ext cx="326880" cy="326880"/>
           </a:xfrm>
           <a:prstGeom prst="rect">
             <a:avLst/>
@@ -20219,7 +20237,7 @@
         <p:spPr>
           <a:xfrm>
             <a:off x="822960" y="1280160"/>
-            <a:ext cx="912600" cy="181080"/>
+            <a:ext cx="912240" cy="180720"/>
           </a:xfrm>
           <a:prstGeom prst="rect">
             <a:avLst/>
@@ -20276,7 +20294,7 @@
         <p:spPr>
           <a:xfrm>
             <a:off x="420480" y="1627560"/>
-            <a:ext cx="3857040" cy="290880"/>
+            <a:ext cx="3856680" cy="290520"/>
           </a:xfrm>
           <a:prstGeom prst="rect">
             <a:avLst/>
@@ -20333,7 +20351,7 @@
         <p:spPr>
           <a:xfrm>
             <a:off x="420480" y="1938600"/>
-            <a:ext cx="3857040" cy="235800"/>
+            <a:ext cx="3856680" cy="235440"/>
           </a:xfrm>
           <a:prstGeom prst="rect">
             <a:avLst/>
@@ -20390,7 +20408,7 @@
         <p:spPr>
           <a:xfrm>
             <a:off x="420480" y="2286000"/>
-            <a:ext cx="3857040" cy="400680"/>
+            <a:ext cx="3856680" cy="400320"/>
           </a:xfrm>
           <a:prstGeom prst="roundRect">
             <a:avLst>
@@ -20438,7 +20456,7 @@
         <p:spPr>
           <a:xfrm>
             <a:off x="420480" y="2286000"/>
-            <a:ext cx="52920" cy="400680"/>
+            <a:ext cx="52560" cy="400320"/>
           </a:xfrm>
           <a:prstGeom prst="roundRect">
             <a:avLst>
@@ -20489,7 +20507,7 @@
         <p:spPr>
           <a:xfrm>
             <a:off x="548640" y="2304360"/>
-            <a:ext cx="3655800" cy="162720"/>
+            <a:ext cx="3655440" cy="162360"/>
           </a:xfrm>
           <a:prstGeom prst="rect">
             <a:avLst/>
@@ -20546,7 +20564,7 @@
         <p:spPr>
           <a:xfrm>
             <a:off x="548640" y="2487240"/>
-            <a:ext cx="3655800" cy="162720"/>
+            <a:ext cx="3655440" cy="162360"/>
           </a:xfrm>
           <a:prstGeom prst="rect">
             <a:avLst/>
@@ -20603,7 +20621,7 @@
         <p:spPr>
           <a:xfrm>
             <a:off x="420480" y="2788920"/>
-            <a:ext cx="3857040" cy="400680"/>
+            <a:ext cx="3856680" cy="400320"/>
           </a:xfrm>
           <a:prstGeom prst="roundRect">
             <a:avLst>
@@ -20651,7 +20669,7 @@
         <p:spPr>
           <a:xfrm>
             <a:off x="420480" y="2788920"/>
-            <a:ext cx="52920" cy="400680"/>
+            <a:ext cx="52560" cy="400320"/>
           </a:xfrm>
           <a:prstGeom prst="roundRect">
             <a:avLst>
@@ -20702,7 +20720,7 @@
         <p:spPr>
           <a:xfrm>
             <a:off x="548640" y="2807280"/>
-            <a:ext cx="3655800" cy="162720"/>
+            <a:ext cx="3655440" cy="162360"/>
           </a:xfrm>
           <a:prstGeom prst="rect">
             <a:avLst/>
@@ -20759,7 +20777,7 @@
         <p:spPr>
           <a:xfrm>
             <a:off x="548640" y="2990160"/>
-            <a:ext cx="3655800" cy="162720"/>
+            <a:ext cx="3655440" cy="162360"/>
           </a:xfrm>
           <a:prstGeom prst="rect">
             <a:avLst/>
@@ -20816,7 +20834,7 @@
         <p:spPr>
           <a:xfrm>
             <a:off x="420480" y="3291840"/>
-            <a:ext cx="3857040" cy="400680"/>
+            <a:ext cx="3856680" cy="400320"/>
           </a:xfrm>
           <a:prstGeom prst="roundRect">
             <a:avLst>
@@ -20864,7 +20882,7 @@
         <p:spPr>
           <a:xfrm>
             <a:off x="420480" y="3291840"/>
-            <a:ext cx="52920" cy="400680"/>
+            <a:ext cx="52560" cy="400320"/>
           </a:xfrm>
           <a:prstGeom prst="roundRect">
             <a:avLst>
@@ -20915,7 +20933,7 @@
         <p:spPr>
           <a:xfrm>
             <a:off x="548640" y="3310200"/>
-            <a:ext cx="3655800" cy="162720"/>
+            <a:ext cx="3655440" cy="162360"/>
           </a:xfrm>
           <a:prstGeom prst="rect">
             <a:avLst/>
@@ -20972,7 +20990,7 @@
         <p:spPr>
           <a:xfrm>
             <a:off x="548640" y="3493080"/>
-            <a:ext cx="3655800" cy="162720"/>
+            <a:ext cx="3655440" cy="162360"/>
           </a:xfrm>
           <a:prstGeom prst="rect">
             <a:avLst/>
@@ -21029,7 +21047,7 @@
         <p:spPr>
           <a:xfrm>
             <a:off x="420480" y="3794760"/>
-            <a:ext cx="3857040" cy="400680"/>
+            <a:ext cx="3856680" cy="400320"/>
           </a:xfrm>
           <a:prstGeom prst="roundRect">
             <a:avLst>
@@ -21077,7 +21095,7 @@
         <p:spPr>
           <a:xfrm>
             <a:off x="420480" y="3794760"/>
-            <a:ext cx="52920" cy="400680"/>
+            <a:ext cx="52560" cy="400320"/>
           </a:xfrm>
           <a:prstGeom prst="roundRect">
             <a:avLst>
@@ -21128,7 +21146,7 @@
         <p:spPr>
           <a:xfrm>
             <a:off x="548640" y="3813120"/>
-            <a:ext cx="3655800" cy="162720"/>
+            <a:ext cx="3655440" cy="162360"/>
           </a:xfrm>
           <a:prstGeom prst="rect">
             <a:avLst/>
@@ -21185,7 +21203,7 @@
         <p:spPr>
           <a:xfrm>
             <a:off x="548640" y="3996000"/>
-            <a:ext cx="3655800" cy="162720"/>
+            <a:ext cx="3655440" cy="162360"/>
           </a:xfrm>
           <a:prstGeom prst="rect">
             <a:avLst/>
@@ -21242,7 +21260,7 @@
         <p:spPr>
           <a:xfrm>
             <a:off x="420480" y="4297680"/>
-            <a:ext cx="3857040" cy="400680"/>
+            <a:ext cx="3856680" cy="400320"/>
           </a:xfrm>
           <a:prstGeom prst="roundRect">
             <a:avLst>
@@ -21290,7 +21308,7 @@
         <p:spPr>
           <a:xfrm>
             <a:off x="420480" y="4297680"/>
-            <a:ext cx="52920" cy="400680"/>
+            <a:ext cx="52560" cy="400320"/>
           </a:xfrm>
           <a:prstGeom prst="roundRect">
             <a:avLst>
@@ -21341,7 +21359,7 @@
         <p:spPr>
           <a:xfrm>
             <a:off x="548640" y="4316040"/>
-            <a:ext cx="3655800" cy="162720"/>
+            <a:ext cx="3655440" cy="162360"/>
           </a:xfrm>
           <a:prstGeom prst="rect">
             <a:avLst/>
@@ -21398,7 +21416,7 @@
         <p:spPr>
           <a:xfrm>
             <a:off x="548640" y="4498920"/>
-            <a:ext cx="3655800" cy="162720"/>
+            <a:ext cx="3655440" cy="162360"/>
           </a:xfrm>
           <a:prstGeom prst="rect">
             <a:avLst/>
@@ -21455,7 +21473,7 @@
         <p:spPr>
           <a:xfrm>
             <a:off x="4626720" y="1115640"/>
-            <a:ext cx="4287240" cy="3912120"/>
+            <a:ext cx="4286880" cy="3911760"/>
           </a:xfrm>
           <a:prstGeom prst="roundRect">
             <a:avLst>
@@ -21514,7 +21532,7 @@
         <p:spPr>
           <a:xfrm>
             <a:off x="4809600" y="1261800"/>
-            <a:ext cx="327240" cy="327240"/>
+            <a:ext cx="326880" cy="326880"/>
           </a:xfrm>
           <a:prstGeom prst="rect">
             <a:avLst/>
@@ -21533,7 +21551,7 @@
         <p:spPr>
           <a:xfrm>
             <a:off x="5212080" y="1280160"/>
-            <a:ext cx="912600" cy="181080"/>
+            <a:ext cx="912240" cy="180720"/>
           </a:xfrm>
           <a:prstGeom prst="rect">
             <a:avLst/>
@@ -21590,7 +21608,7 @@
         <p:spPr>
           <a:xfrm>
             <a:off x="4809600" y="1627560"/>
-            <a:ext cx="3911760" cy="290880"/>
+            <a:ext cx="3911400" cy="290520"/>
           </a:xfrm>
           <a:prstGeom prst="rect">
             <a:avLst/>
@@ -21647,7 +21665,7 @@
         <p:spPr>
           <a:xfrm>
             <a:off x="4809600" y="1938600"/>
-            <a:ext cx="3911760" cy="235800"/>
+            <a:ext cx="3911400" cy="235440"/>
           </a:xfrm>
           <a:prstGeom prst="rect">
             <a:avLst/>
@@ -21704,7 +21722,7 @@
         <p:spPr>
           <a:xfrm>
             <a:off x="4809600" y="2249280"/>
-            <a:ext cx="3911760" cy="235800"/>
+            <a:ext cx="3911400" cy="235440"/>
           </a:xfrm>
           <a:prstGeom prst="rect">
             <a:avLst/>
@@ -21761,7 +21779,7 @@
         <p:spPr>
           <a:xfrm>
             <a:off x="4809600" y="2560320"/>
-            <a:ext cx="867960" cy="437040"/>
+            <a:ext cx="867600" cy="436680"/>
           </a:xfrm>
           <a:prstGeom prst="roundRect">
             <a:avLst>
@@ -21809,7 +21827,7 @@
         <p:spPr>
           <a:xfrm>
             <a:off x="4809600" y="2560320"/>
-            <a:ext cx="867960" cy="437040"/>
+            <a:ext cx="867600" cy="436680"/>
           </a:xfrm>
           <a:prstGeom prst="rect">
             <a:avLst/>
@@ -21866,7 +21884,7 @@
         <p:spPr>
           <a:xfrm>
             <a:off x="5696640" y="2633400"/>
-            <a:ext cx="89640" cy="272520"/>
+            <a:ext cx="89280" cy="272160"/>
           </a:xfrm>
           <a:prstGeom prst="rect">
             <a:avLst/>
@@ -21923,7 +21941,7 @@
         <p:spPr>
           <a:xfrm>
             <a:off x="5833800" y="2560320"/>
-            <a:ext cx="867960" cy="437040"/>
+            <a:ext cx="867600" cy="436680"/>
           </a:xfrm>
           <a:prstGeom prst="roundRect">
             <a:avLst>
@@ -21971,7 +21989,7 @@
         <p:spPr>
           <a:xfrm>
             <a:off x="5833800" y="2560320"/>
-            <a:ext cx="867960" cy="437040"/>
+            <a:ext cx="867600" cy="436680"/>
           </a:xfrm>
           <a:prstGeom prst="rect">
             <a:avLst/>
@@ -22028,7 +22046,7 @@
         <p:spPr>
           <a:xfrm>
             <a:off x="6720840" y="2633400"/>
-            <a:ext cx="89640" cy="272520"/>
+            <a:ext cx="89280" cy="272160"/>
           </a:xfrm>
           <a:prstGeom prst="rect">
             <a:avLst/>
@@ -22085,7 +22103,7 @@
         <p:spPr>
           <a:xfrm>
             <a:off x="6858000" y="2560320"/>
-            <a:ext cx="867960" cy="437040"/>
+            <a:ext cx="867600" cy="436680"/>
           </a:xfrm>
           <a:prstGeom prst="roundRect">
             <a:avLst>
@@ -22133,7 +22151,7 @@
         <p:spPr>
           <a:xfrm>
             <a:off x="6858000" y="2560320"/>
-            <a:ext cx="867960" cy="437040"/>
+            <a:ext cx="867600" cy="436680"/>
           </a:xfrm>
           <a:prstGeom prst="rect">
             <a:avLst/>
@@ -22190,7 +22208,7 @@
         <p:spPr>
           <a:xfrm>
             <a:off x="7745040" y="2633400"/>
-            <a:ext cx="89640" cy="272520"/>
+            <a:ext cx="89280" cy="272160"/>
           </a:xfrm>
           <a:prstGeom prst="rect">
             <a:avLst/>
@@ -22247,7 +22265,7 @@
         <p:spPr>
           <a:xfrm>
             <a:off x="7882200" y="2560320"/>
-            <a:ext cx="867960" cy="437040"/>
+            <a:ext cx="867600" cy="436680"/>
           </a:xfrm>
           <a:prstGeom prst="roundRect">
             <a:avLst>
@@ -22295,7 +22313,7 @@
         <p:spPr>
           <a:xfrm>
             <a:off x="7882200" y="2560320"/>
-            <a:ext cx="867960" cy="437040"/>
+            <a:ext cx="867600" cy="436680"/>
           </a:xfrm>
           <a:prstGeom prst="rect">
             <a:avLst/>
@@ -22352,7 +22370,7 @@
         <p:spPr>
           <a:xfrm>
             <a:off x="4809600" y="3163680"/>
-            <a:ext cx="867960" cy="437040"/>
+            <a:ext cx="867600" cy="436680"/>
           </a:xfrm>
           <a:prstGeom prst="roundRect">
             <a:avLst>
@@ -22400,7 +22418,7 @@
         <p:spPr>
           <a:xfrm>
             <a:off x="4809600" y="3163680"/>
-            <a:ext cx="867960" cy="437040"/>
+            <a:ext cx="867600" cy="436680"/>
           </a:xfrm>
           <a:prstGeom prst="rect">
             <a:avLst/>
@@ -22457,7 +22475,7 @@
         <p:spPr>
           <a:xfrm>
             <a:off x="5696640" y="3237120"/>
-            <a:ext cx="89640" cy="272520"/>
+            <a:ext cx="89280" cy="272160"/>
           </a:xfrm>
           <a:prstGeom prst="rect">
             <a:avLst/>
@@ -22514,7 +22532,7 @@
         <p:spPr>
           <a:xfrm>
             <a:off x="5833800" y="3163680"/>
-            <a:ext cx="867960" cy="437040"/>
+            <a:ext cx="867600" cy="436680"/>
           </a:xfrm>
           <a:prstGeom prst="roundRect">
             <a:avLst>
@@ -22562,7 +22580,7 @@
         <p:spPr>
           <a:xfrm>
             <a:off x="5833800" y="3163680"/>
-            <a:ext cx="867960" cy="437040"/>
+            <a:ext cx="867600" cy="436680"/>
           </a:xfrm>
           <a:prstGeom prst="rect">
             <a:avLst/>
@@ -22619,7 +22637,7 @@
         <p:spPr>
           <a:xfrm>
             <a:off x="6720840" y="3237120"/>
-            <a:ext cx="89640" cy="272520"/>
+            <a:ext cx="89280" cy="272160"/>
           </a:xfrm>
           <a:prstGeom prst="rect">
             <a:avLst/>
@@ -22676,7 +22694,7 @@
         <p:spPr>
           <a:xfrm>
             <a:off x="6858000" y="3163680"/>
-            <a:ext cx="867960" cy="437040"/>
+            <a:ext cx="867600" cy="436680"/>
           </a:xfrm>
           <a:prstGeom prst="roundRect">
             <a:avLst>
@@ -22724,7 +22742,7 @@
         <p:spPr>
           <a:xfrm>
             <a:off x="6858000" y="3163680"/>
-            <a:ext cx="867960" cy="437040"/>
+            <a:ext cx="867600" cy="436680"/>
           </a:xfrm>
           <a:prstGeom prst="rect">
             <a:avLst/>
@@ -22781,7 +22799,7 @@
         <p:spPr>
           <a:xfrm>
             <a:off x="7745040" y="3237120"/>
-            <a:ext cx="89640" cy="272520"/>
+            <a:ext cx="89280" cy="272160"/>
           </a:xfrm>
           <a:prstGeom prst="rect">
             <a:avLst/>
@@ -22838,7 +22856,7 @@
         <p:spPr>
           <a:xfrm>
             <a:off x="7882200" y="3163680"/>
-            <a:ext cx="867960" cy="437040"/>
+            <a:ext cx="867600" cy="436680"/>
           </a:xfrm>
           <a:prstGeom prst="roundRect">
             <a:avLst>
@@ -22886,7 +22904,7 @@
         <p:spPr>
           <a:xfrm>
             <a:off x="7882200" y="3163680"/>
-            <a:ext cx="867960" cy="437040"/>
+            <a:ext cx="867600" cy="436680"/>
           </a:xfrm>
           <a:prstGeom prst="rect">
             <a:avLst/>
@@ -22943,7 +22961,7 @@
         <p:spPr>
           <a:xfrm>
             <a:off x="4809600" y="3877200"/>
-            <a:ext cx="3911760" cy="217800"/>
+            <a:ext cx="3911400" cy="217440"/>
           </a:xfrm>
           <a:prstGeom prst="rect">
             <a:avLst/>
@@ -23000,7 +23018,7 @@
         <p:spPr>
           <a:xfrm>
             <a:off x="4809600" y="4133160"/>
-            <a:ext cx="821160" cy="181080"/>
+            <a:ext cx="820800" cy="180720"/>
           </a:xfrm>
           <a:prstGeom prst="rect">
             <a:avLst/>
@@ -23057,7 +23075,7 @@
         <p:spPr>
           <a:xfrm>
             <a:off x="5486400" y="4133160"/>
-            <a:ext cx="3052440" cy="181080"/>
+            <a:ext cx="3052080" cy="180720"/>
           </a:xfrm>
           <a:prstGeom prst="rect">
             <a:avLst/>
@@ -23114,7 +23132,7 @@
         <p:spPr>
           <a:xfrm>
             <a:off x="4809600" y="4334400"/>
-            <a:ext cx="821160" cy="181080"/>
+            <a:ext cx="820800" cy="180720"/>
           </a:xfrm>
           <a:prstGeom prst="rect">
             <a:avLst/>
@@ -23171,7 +23189,7 @@
         <p:spPr>
           <a:xfrm>
             <a:off x="5486400" y="4334400"/>
-            <a:ext cx="3052440" cy="181080"/>
+            <a:ext cx="3052080" cy="180720"/>
           </a:xfrm>
           <a:prstGeom prst="rect">
             <a:avLst/>
@@ -23228,7 +23246,7 @@
         <p:spPr>
           <a:xfrm>
             <a:off x="4809600" y="4535280"/>
-            <a:ext cx="821160" cy="181080"/>
+            <a:ext cx="820800" cy="180720"/>
           </a:xfrm>
           <a:prstGeom prst="rect">
             <a:avLst/>
@@ -23285,7 +23303,7 @@
         <p:spPr>
           <a:xfrm>
             <a:off x="5486400" y="4544640"/>
-            <a:ext cx="3052440" cy="181080"/>
+            <a:ext cx="3052080" cy="180720"/>
           </a:xfrm>
           <a:prstGeom prst="rect">
             <a:avLst/>
@@ -23342,7 +23360,7 @@
         <p:spPr>
           <a:xfrm>
             <a:off x="4809600" y="4736520"/>
-            <a:ext cx="821160" cy="181080"/>
+            <a:ext cx="820800" cy="180720"/>
           </a:xfrm>
           <a:prstGeom prst="rect">
             <a:avLst/>
@@ -23399,7 +23417,7 @@
         <p:spPr>
           <a:xfrm>
             <a:off x="5486400" y="4736520"/>
-            <a:ext cx="3427560" cy="181080"/>
+            <a:ext cx="3427200" cy="180720"/>
           </a:xfrm>
           <a:prstGeom prst="rect">
             <a:avLst/>
@@ -23493,7 +23511,7 @@
         <p:spPr>
           <a:xfrm>
             <a:off x="0" y="0"/>
-            <a:ext cx="52920" cy="5141880"/>
+            <a:ext cx="52560" cy="5141520"/>
           </a:xfrm>
           <a:prstGeom prst="rect">
             <a:avLst/>
@@ -23542,7 +23560,7 @@
         <p:spPr>
           <a:xfrm>
             <a:off x="274320" y="228600"/>
-            <a:ext cx="8593560" cy="217800"/>
+            <a:ext cx="8593200" cy="217440"/>
           </a:xfrm>
           <a:prstGeom prst="rect">
             <a:avLst/>
@@ -23572,7 +23590,7 @@
               </a:tabLst>
             </a:pPr>
             <a:r>
-              <a:rPr b="1" lang="en-US" sz="850" spc="335" strike="noStrike">
+              <a:rPr b="1" lang="en-US" sz="850" spc="333" strike="noStrike">
                 <a:solidFill>
                   <a:srgbClr val="f5a623"/>
                 </a:solidFill>
@@ -23599,7 +23617,7 @@
         <p:spPr>
           <a:xfrm>
             <a:off x="274320" y="457200"/>
-            <a:ext cx="7313400" cy="546840"/>
+            <a:ext cx="7313040" cy="546480"/>
           </a:xfrm>
           <a:prstGeom prst="rect">
             <a:avLst/>
@@ -23656,7 +23674,7 @@
         <p:spPr>
           <a:xfrm>
             <a:off x="274320" y="1005840"/>
-            <a:ext cx="8410680" cy="290880"/>
+            <a:ext cx="8410320" cy="290520"/>
           </a:xfrm>
           <a:prstGeom prst="rect">
             <a:avLst/>
@@ -23713,7 +23731,7 @@
         <p:spPr>
           <a:xfrm>
             <a:off x="255960" y="1444680"/>
-            <a:ext cx="1516320" cy="1333080"/>
+            <a:ext cx="1515960" cy="1332720"/>
           </a:xfrm>
           <a:prstGeom prst="roundRect">
             <a:avLst>
@@ -23772,7 +23790,7 @@
         <p:spPr>
           <a:xfrm>
             <a:off x="868680" y="1572840"/>
-            <a:ext cx="345600" cy="345600"/>
+            <a:ext cx="345240" cy="345240"/>
           </a:xfrm>
           <a:prstGeom prst="rect">
             <a:avLst/>
@@ -23791,7 +23809,7 @@
         <p:spPr>
           <a:xfrm>
             <a:off x="255960" y="1993320"/>
-            <a:ext cx="1571400" cy="235800"/>
+            <a:ext cx="1571040" cy="235440"/>
           </a:xfrm>
           <a:prstGeom prst="rect">
             <a:avLst/>
@@ -23848,7 +23866,7 @@
         <p:spPr>
           <a:xfrm>
             <a:off x="255960" y="2249280"/>
-            <a:ext cx="1516320" cy="528480"/>
+            <a:ext cx="1515960" cy="528120"/>
           </a:xfrm>
           <a:prstGeom prst="rect">
             <a:avLst/>
@@ -23931,7 +23949,7 @@
         <p:spPr>
           <a:xfrm>
             <a:off x="1828800" y="1993320"/>
-            <a:ext cx="163080" cy="327240"/>
+            <a:ext cx="162720" cy="326880"/>
           </a:xfrm>
           <a:prstGeom prst="rect">
             <a:avLst/>
@@ -23988,7 +24006,7 @@
         <p:spPr>
           <a:xfrm>
             <a:off x="2048400" y="1444680"/>
-            <a:ext cx="1515960" cy="1333080"/>
+            <a:ext cx="1515600" cy="1332720"/>
           </a:xfrm>
           <a:prstGeom prst="roundRect">
             <a:avLst>
@@ -24047,7 +24065,7 @@
         <p:spPr>
           <a:xfrm>
             <a:off x="2624760" y="1572840"/>
-            <a:ext cx="345600" cy="345600"/>
+            <a:ext cx="345240" cy="345240"/>
           </a:xfrm>
           <a:prstGeom prst="rect">
             <a:avLst/>
@@ -24066,7 +24084,7 @@
         <p:spPr>
           <a:xfrm>
             <a:off x="2030400" y="1993320"/>
-            <a:ext cx="1533960" cy="235800"/>
+            <a:ext cx="1533600" cy="235440"/>
           </a:xfrm>
           <a:prstGeom prst="rect">
             <a:avLst/>
@@ -24123,7 +24141,7 @@
         <p:spPr>
           <a:xfrm>
             <a:off x="2048400" y="2249280"/>
-            <a:ext cx="1515960" cy="528480"/>
+            <a:ext cx="1515600" cy="528120"/>
           </a:xfrm>
           <a:prstGeom prst="rect">
             <a:avLst/>
@@ -24206,7 +24224,7 @@
         <p:spPr>
           <a:xfrm>
             <a:off x="3602880" y="1993320"/>
-            <a:ext cx="181440" cy="327240"/>
+            <a:ext cx="181080" cy="326880"/>
           </a:xfrm>
           <a:prstGeom prst="rect">
             <a:avLst/>
@@ -24263,7 +24281,7 @@
         <p:spPr>
           <a:xfrm>
             <a:off x="3886200" y="1444680"/>
-            <a:ext cx="1415520" cy="1333080"/>
+            <a:ext cx="1415160" cy="1332720"/>
           </a:xfrm>
           <a:prstGeom prst="roundRect">
             <a:avLst>
@@ -24322,7 +24340,7 @@
         <p:spPr>
           <a:xfrm>
             <a:off x="4343400" y="1572840"/>
-            <a:ext cx="345600" cy="345600"/>
+            <a:ext cx="345240" cy="345240"/>
           </a:xfrm>
           <a:prstGeom prst="rect">
             <a:avLst/>
@@ -24341,7 +24359,7 @@
         <p:spPr>
           <a:xfrm>
             <a:off x="3785760" y="2012040"/>
-            <a:ext cx="1571040" cy="235800"/>
+            <a:ext cx="1570680" cy="235440"/>
           </a:xfrm>
           <a:prstGeom prst="rect">
             <a:avLst/>
@@ -24398,7 +24416,7 @@
         <p:spPr>
           <a:xfrm>
             <a:off x="3785760" y="2249280"/>
-            <a:ext cx="1515960" cy="528480"/>
+            <a:ext cx="1515600" cy="528120"/>
           </a:xfrm>
           <a:prstGeom prst="rect">
             <a:avLst/>
@@ -24481,7 +24499,7 @@
         <p:spPr>
           <a:xfrm>
             <a:off x="5340240" y="1993320"/>
-            <a:ext cx="126360" cy="327240"/>
+            <a:ext cx="126000" cy="326880"/>
           </a:xfrm>
           <a:prstGeom prst="rect">
             <a:avLst/>
@@ -24538,7 +24556,7 @@
         <p:spPr>
           <a:xfrm>
             <a:off x="5554080" y="1444680"/>
-            <a:ext cx="1522080" cy="1333080"/>
+            <a:ext cx="1521720" cy="1332720"/>
           </a:xfrm>
           <a:prstGeom prst="roundRect">
             <a:avLst>
@@ -24597,7 +24615,7 @@
         <p:spPr>
           <a:xfrm>
             <a:off x="6172200" y="1572840"/>
-            <a:ext cx="345600" cy="345600"/>
+            <a:ext cx="345240" cy="345240"/>
           </a:xfrm>
           <a:prstGeom prst="rect">
             <a:avLst/>
@@ -24616,7 +24634,7 @@
         <p:spPr>
           <a:xfrm>
             <a:off x="5554080" y="1993320"/>
-            <a:ext cx="1552680" cy="235800"/>
+            <a:ext cx="1552320" cy="235440"/>
           </a:xfrm>
           <a:prstGeom prst="rect">
             <a:avLst/>
@@ -24673,7 +24691,7 @@
         <p:spPr>
           <a:xfrm>
             <a:off x="5614920" y="2249280"/>
-            <a:ext cx="1461240" cy="528480"/>
+            <a:ext cx="1460880" cy="528120"/>
           </a:xfrm>
           <a:prstGeom prst="rect">
             <a:avLst/>
@@ -24756,7 +24774,7 @@
         <p:spPr>
           <a:xfrm>
             <a:off x="7108200" y="1993320"/>
-            <a:ext cx="205560" cy="327240"/>
+            <a:ext cx="205200" cy="326880"/>
           </a:xfrm>
           <a:prstGeom prst="rect">
             <a:avLst/>
@@ -24813,7 +24831,7 @@
         <p:spPr>
           <a:xfrm>
             <a:off x="7315200" y="1444680"/>
-            <a:ext cx="1461240" cy="1333080"/>
+            <a:ext cx="1460880" cy="1332720"/>
           </a:xfrm>
           <a:prstGeom prst="roundRect">
             <a:avLst>
@@ -24872,7 +24890,7 @@
         <p:spPr>
           <a:xfrm>
             <a:off x="7818120" y="1572840"/>
-            <a:ext cx="345600" cy="345600"/>
+            <a:ext cx="345240" cy="345240"/>
           </a:xfrm>
           <a:prstGeom prst="rect">
             <a:avLst/>
@@ -24891,7 +24909,7 @@
         <p:spPr>
           <a:xfrm>
             <a:off x="7205400" y="1993320"/>
-            <a:ext cx="1571040" cy="235800"/>
+            <a:ext cx="1570680" cy="235440"/>
           </a:xfrm>
           <a:prstGeom prst="rect">
             <a:avLst/>
@@ -24948,7 +24966,7 @@
         <p:spPr>
           <a:xfrm>
             <a:off x="7260480" y="2249280"/>
-            <a:ext cx="1461240" cy="528480"/>
+            <a:ext cx="1460880" cy="528120"/>
           </a:xfrm>
           <a:prstGeom prst="rect">
             <a:avLst/>
@@ -25031,7 +25049,7 @@
         <p:spPr>
           <a:xfrm>
             <a:off x="237600" y="3054240"/>
-            <a:ext cx="2796120" cy="1874160"/>
+            <a:ext cx="2795760" cy="1873800"/>
           </a:xfrm>
           <a:prstGeom prst="roundRect">
             <a:avLst>
@@ -25086,7 +25104,7 @@
         <p:spPr>
           <a:xfrm>
             <a:off x="365760" y="3173040"/>
-            <a:ext cx="309240" cy="309240"/>
+            <a:ext cx="308880" cy="308880"/>
           </a:xfrm>
           <a:prstGeom prst="roundRect">
             <a:avLst>
@@ -25134,7 +25152,7 @@
         <p:spPr>
           <a:xfrm>
             <a:off x="365760" y="3173040"/>
-            <a:ext cx="309240" cy="309240"/>
+            <a:ext cx="308880" cy="308880"/>
           </a:xfrm>
           <a:prstGeom prst="rect">
             <a:avLst/>
@@ -25191,7 +25209,7 @@
         <p:spPr>
           <a:xfrm>
             <a:off x="768240" y="3182040"/>
-            <a:ext cx="2138040" cy="272520"/>
+            <a:ext cx="2137680" cy="272160"/>
           </a:xfrm>
           <a:prstGeom prst="rect">
             <a:avLst/>
@@ -25248,7 +25266,7 @@
         <p:spPr>
           <a:xfrm>
             <a:off x="365760" y="3529440"/>
-            <a:ext cx="2540160" cy="14760"/>
+            <a:ext cx="2539800" cy="14400"/>
           </a:xfrm>
           <a:prstGeom prst="rect">
             <a:avLst/>
@@ -25297,7 +25315,7 @@
         <p:spPr>
           <a:xfrm>
             <a:off x="365760" y="3666960"/>
-            <a:ext cx="2540160" cy="1132200"/>
+            <a:ext cx="2539800" cy="1131840"/>
           </a:xfrm>
           <a:prstGeom prst="rect">
             <a:avLst/>
@@ -25440,7 +25458,7 @@
         <p:spPr>
           <a:xfrm>
             <a:off x="3218760" y="3054240"/>
-            <a:ext cx="2796120" cy="1874160"/>
+            <a:ext cx="2795760" cy="1873800"/>
           </a:xfrm>
           <a:prstGeom prst="roundRect">
             <a:avLst>
@@ -25495,7 +25513,7 @@
         <p:spPr>
           <a:xfrm>
             <a:off x="3346560" y="3173040"/>
-            <a:ext cx="309240" cy="309240"/>
+            <a:ext cx="308880" cy="308880"/>
           </a:xfrm>
           <a:prstGeom prst="roundRect">
             <a:avLst>
@@ -25543,7 +25561,7 @@
         <p:spPr>
           <a:xfrm>
             <a:off x="3346560" y="3173040"/>
-            <a:ext cx="309240" cy="309240"/>
+            <a:ext cx="308880" cy="308880"/>
           </a:xfrm>
           <a:prstGeom prst="rect">
             <a:avLst/>
@@ -25600,7 +25618,7 @@
         <p:spPr>
           <a:xfrm>
             <a:off x="3749040" y="3182040"/>
-            <a:ext cx="2138040" cy="272520"/>
+            <a:ext cx="2137680" cy="272160"/>
           </a:xfrm>
           <a:prstGeom prst="rect">
             <a:avLst/>
@@ -25657,7 +25675,7 @@
         <p:spPr>
           <a:xfrm>
             <a:off x="3346560" y="3529440"/>
-            <a:ext cx="2540160" cy="14760"/>
+            <a:ext cx="2539800" cy="14400"/>
           </a:xfrm>
           <a:prstGeom prst="rect">
             <a:avLst/>
@@ -25706,7 +25724,7 @@
         <p:spPr>
           <a:xfrm>
             <a:off x="3346560" y="3657600"/>
-            <a:ext cx="2540160" cy="1132200"/>
+            <a:ext cx="2539800" cy="1131840"/>
           </a:xfrm>
           <a:prstGeom prst="rect">
             <a:avLst/>
@@ -25821,7 +25839,7 @@
         <p:spPr>
           <a:xfrm>
             <a:off x="6199560" y="3054240"/>
-            <a:ext cx="2796120" cy="1874160"/>
+            <a:ext cx="2795760" cy="1873800"/>
           </a:xfrm>
           <a:prstGeom prst="roundRect">
             <a:avLst>
@@ -25876,7 +25894,7 @@
         <p:spPr>
           <a:xfrm>
             <a:off x="6327720" y="3173040"/>
-            <a:ext cx="309240" cy="309240"/>
+            <a:ext cx="308880" cy="308880"/>
           </a:xfrm>
           <a:prstGeom prst="roundRect">
             <a:avLst>
@@ -25924,7 +25942,7 @@
         <p:spPr>
           <a:xfrm>
             <a:off x="6327720" y="3173040"/>
-            <a:ext cx="309240" cy="309240"/>
+            <a:ext cx="308880" cy="308880"/>
           </a:xfrm>
           <a:prstGeom prst="rect">
             <a:avLst/>
@@ -25981,7 +25999,7 @@
         <p:spPr>
           <a:xfrm>
             <a:off x="6729840" y="3182040"/>
-            <a:ext cx="2138040" cy="272520"/>
+            <a:ext cx="2137680" cy="272160"/>
           </a:xfrm>
           <a:prstGeom prst="rect">
             <a:avLst/>
@@ -26038,7 +26056,7 @@
         <p:spPr>
           <a:xfrm>
             <a:off x="6327720" y="3529440"/>
-            <a:ext cx="2540160" cy="14760"/>
+            <a:ext cx="2539800" cy="14400"/>
           </a:xfrm>
           <a:prstGeom prst="rect">
             <a:avLst/>
@@ -26087,7 +26105,7 @@
         <p:spPr>
           <a:xfrm>
             <a:off x="6327720" y="3657600"/>
-            <a:ext cx="2540160" cy="1059120"/>
+            <a:ext cx="2539800" cy="1058760"/>
           </a:xfrm>
           <a:prstGeom prst="rect">
             <a:avLst/>
@@ -26267,7 +26285,7 @@
         <p:spPr>
           <a:xfrm>
             <a:off x="0" y="0"/>
-            <a:ext cx="52920" cy="5141880"/>
+            <a:ext cx="52560" cy="5141520"/>
           </a:xfrm>
           <a:prstGeom prst="rect">
             <a:avLst/>
@@ -26316,7 +26334,7 @@
         <p:spPr>
           <a:xfrm>
             <a:off x="274320" y="228600"/>
-            <a:ext cx="8593560" cy="217800"/>
+            <a:ext cx="8593200" cy="217440"/>
           </a:xfrm>
           <a:prstGeom prst="rect">
             <a:avLst/>
@@ -26346,7 +26364,7 @@
               </a:tabLst>
             </a:pPr>
             <a:r>
-              <a:rPr b="1" lang="en-US" sz="850" spc="335" strike="noStrike">
+              <a:rPr b="1" lang="en-US" sz="850" spc="333" strike="noStrike">
                 <a:solidFill>
                   <a:srgbClr val="f5a623"/>
                 </a:solidFill>
@@ -26373,7 +26391,7 @@
         <p:spPr>
           <a:xfrm>
             <a:off x="274320" y="457200"/>
-            <a:ext cx="6399000" cy="528480"/>
+            <a:ext cx="6398640" cy="528120"/>
           </a:xfrm>
           <a:prstGeom prst="rect">
             <a:avLst/>
@@ -26429,8 +26447,8 @@
         </p:nvSpPr>
         <p:spPr>
           <a:xfrm>
-            <a:off x="237600" y="1078920"/>
-            <a:ext cx="4204440" cy="254160"/>
+            <a:off x="237600" y="1033200"/>
+            <a:ext cx="4204080" cy="253800"/>
           </a:xfrm>
           <a:prstGeom prst="rect">
             <a:avLst/>
@@ -27809,7 +27827,7 @@
         <p:spPr>
           <a:xfrm>
             <a:off x="4681800" y="1078920"/>
-            <a:ext cx="4222800" cy="1150200"/>
+            <a:ext cx="4222440" cy="1149840"/>
           </a:xfrm>
           <a:prstGeom prst="roundRect">
             <a:avLst>
@@ -27868,7 +27886,7 @@
         <p:spPr>
           <a:xfrm>
             <a:off x="4846320" y="1207080"/>
-            <a:ext cx="327240" cy="327240"/>
+            <a:ext cx="326880" cy="326880"/>
           </a:xfrm>
           <a:prstGeom prst="rect">
             <a:avLst/>
@@ -27887,7 +27905,7 @@
         <p:spPr>
           <a:xfrm>
             <a:off x="5266800" y="1188720"/>
-            <a:ext cx="3472920" cy="254160"/>
+            <a:ext cx="3472560" cy="253800"/>
           </a:xfrm>
           <a:prstGeom prst="rect">
             <a:avLst/>
@@ -27944,7 +27962,7 @@
         <p:spPr>
           <a:xfrm>
             <a:off x="5266800" y="1463040"/>
-            <a:ext cx="3472920" cy="656640"/>
+            <a:ext cx="3472560" cy="656280"/>
           </a:xfrm>
           <a:prstGeom prst="rect">
             <a:avLst/>
@@ -28001,7 +28019,7 @@
         <p:spPr>
           <a:xfrm>
             <a:off x="4681800" y="2340720"/>
-            <a:ext cx="4222800" cy="1150200"/>
+            <a:ext cx="4222440" cy="1149840"/>
           </a:xfrm>
           <a:prstGeom prst="roundRect">
             <a:avLst>
@@ -28060,7 +28078,7 @@
         <p:spPr>
           <a:xfrm>
             <a:off x="4846320" y="2468880"/>
-            <a:ext cx="327240" cy="327240"/>
+            <a:ext cx="326880" cy="326880"/>
           </a:xfrm>
           <a:prstGeom prst="rect">
             <a:avLst/>
@@ -28079,7 +28097,7 @@
         <p:spPr>
           <a:xfrm>
             <a:off x="5266800" y="2450520"/>
-            <a:ext cx="3472920" cy="254160"/>
+            <a:ext cx="3472560" cy="253800"/>
           </a:xfrm>
           <a:prstGeom prst="rect">
             <a:avLst/>
@@ -28136,7 +28154,7 @@
         <p:spPr>
           <a:xfrm>
             <a:off x="5266800" y="2724840"/>
-            <a:ext cx="3472920" cy="656640"/>
+            <a:ext cx="3472560" cy="656280"/>
           </a:xfrm>
           <a:prstGeom prst="rect">
             <a:avLst/>
@@ -28193,7 +28211,7 @@
         <p:spPr>
           <a:xfrm>
             <a:off x="4681800" y="3602880"/>
-            <a:ext cx="4222800" cy="1150200"/>
+            <a:ext cx="4222440" cy="1149840"/>
           </a:xfrm>
           <a:prstGeom prst="roundRect">
             <a:avLst>
@@ -28252,7 +28270,7 @@
         <p:spPr>
           <a:xfrm>
             <a:off x="4846320" y="3730680"/>
-            <a:ext cx="327240" cy="327240"/>
+            <a:ext cx="326880" cy="326880"/>
           </a:xfrm>
           <a:prstGeom prst="rect">
             <a:avLst/>
@@ -28271,7 +28289,7 @@
         <p:spPr>
           <a:xfrm>
             <a:off x="5266800" y="3712320"/>
-            <a:ext cx="3472920" cy="254160"/>
+            <a:ext cx="3472560" cy="253800"/>
           </a:xfrm>
           <a:prstGeom prst="rect">
             <a:avLst/>
@@ -28328,7 +28346,7 @@
         <p:spPr>
           <a:xfrm>
             <a:off x="5266800" y="3986640"/>
-            <a:ext cx="3472920" cy="656640"/>
+            <a:ext cx="3472560" cy="656280"/>
           </a:xfrm>
           <a:prstGeom prst="rect">
             <a:avLst/>
@@ -28384,8 +28402,8 @@
         </p:nvSpPr>
         <p:spPr>
           <a:xfrm>
-            <a:off x="237600" y="3885840"/>
-            <a:ext cx="4570200" cy="199440"/>
+            <a:off x="228600" y="4144320"/>
+            <a:ext cx="4569840" cy="199080"/>
           </a:xfrm>
           <a:prstGeom prst="rect">
             <a:avLst/>
@@ -28441,8 +28459,8 @@
         </p:nvSpPr>
         <p:spPr>
           <a:xfrm>
-            <a:off x="237600" y="4187880"/>
-            <a:ext cx="1242360" cy="309240"/>
+            <a:off x="237600" y="4389120"/>
+            <a:ext cx="1242000" cy="308880"/>
           </a:xfrm>
           <a:prstGeom prst="roundRect">
             <a:avLst>
@@ -28489,8 +28507,8 @@
         </p:nvSpPr>
         <p:spPr>
           <a:xfrm>
-            <a:off x="237600" y="4187880"/>
-            <a:ext cx="1242360" cy="309240"/>
+            <a:off x="237600" y="4389120"/>
+            <a:ext cx="1242000" cy="308880"/>
           </a:xfrm>
           <a:prstGeom prst="rect">
             <a:avLst/>
@@ -28546,8 +28564,8 @@
         </p:nvSpPr>
         <p:spPr>
           <a:xfrm>
-            <a:off x="1719000" y="4187880"/>
-            <a:ext cx="1188720" cy="309240"/>
+            <a:off x="1719000" y="4389120"/>
+            <a:ext cx="1188360" cy="308880"/>
           </a:xfrm>
           <a:prstGeom prst="roundRect">
             <a:avLst>
@@ -28594,8 +28612,8 @@
         </p:nvSpPr>
         <p:spPr>
           <a:xfrm>
-            <a:off x="1719000" y="4187880"/>
-            <a:ext cx="1188720" cy="309240"/>
+            <a:off x="1719000" y="4389120"/>
+            <a:ext cx="1188360" cy="308880"/>
           </a:xfrm>
           <a:prstGeom prst="rect">
             <a:avLst/>
@@ -28651,8 +28669,8 @@
         </p:nvSpPr>
         <p:spPr>
           <a:xfrm>
-            <a:off x="3108960" y="4187880"/>
-            <a:ext cx="1325880" cy="309240"/>
+            <a:off x="3108960" y="4389120"/>
+            <a:ext cx="1325520" cy="308880"/>
           </a:xfrm>
           <a:prstGeom prst="roundRect">
             <a:avLst>
@@ -28699,8 +28717,8 @@
         </p:nvSpPr>
         <p:spPr>
           <a:xfrm>
-            <a:off x="3108960" y="4187880"/>
-            <a:ext cx="1325880" cy="309240"/>
+            <a:off x="3108960" y="4389120"/>
+            <a:ext cx="1325520" cy="308880"/>
           </a:xfrm>
           <a:prstGeom prst="rect">
             <a:avLst/>
@@ -28756,8 +28774,8 @@
         </p:nvSpPr>
         <p:spPr>
           <a:xfrm>
-            <a:off x="228600" y="4572000"/>
-            <a:ext cx="1251360" cy="309240"/>
+            <a:off x="228600" y="4754880"/>
+            <a:ext cx="1251000" cy="308880"/>
           </a:xfrm>
           <a:prstGeom prst="roundRect">
             <a:avLst>
@@ -28804,8 +28822,8 @@
         </p:nvSpPr>
         <p:spPr>
           <a:xfrm>
-            <a:off x="228600" y="4572000"/>
-            <a:ext cx="1251360" cy="309240"/>
+            <a:off x="228600" y="4754880"/>
+            <a:ext cx="1251000" cy="308880"/>
           </a:xfrm>
           <a:prstGeom prst="rect">
             <a:avLst/>
@@ -28861,8 +28879,8 @@
         </p:nvSpPr>
         <p:spPr>
           <a:xfrm>
-            <a:off x="3108960" y="4572000"/>
-            <a:ext cx="1325880" cy="309240"/>
+            <a:off x="3108960" y="4754880"/>
+            <a:ext cx="1325520" cy="308880"/>
           </a:xfrm>
           <a:prstGeom prst="roundRect">
             <a:avLst>
@@ -28909,8 +28927,8 @@
         </p:nvSpPr>
         <p:spPr>
           <a:xfrm>
-            <a:off x="1481400" y="4572000"/>
-            <a:ext cx="1150200" cy="309240"/>
+            <a:off x="1481400" y="4754880"/>
+            <a:ext cx="1149840" cy="308880"/>
           </a:xfrm>
           <a:prstGeom prst="rect">
             <a:avLst/>
@@ -28966,8 +28984,8 @@
         </p:nvSpPr>
         <p:spPr>
           <a:xfrm>
-            <a:off x="1719000" y="4572000"/>
-            <a:ext cx="1188720" cy="309240"/>
+            <a:off x="1719000" y="4754880"/>
+            <a:ext cx="1188360" cy="308880"/>
           </a:xfrm>
           <a:prstGeom prst="roundRect">
             <a:avLst>
@@ -29014,8 +29032,8 @@
         </p:nvSpPr>
         <p:spPr>
           <a:xfrm>
-            <a:off x="3108960" y="4572000"/>
-            <a:ext cx="1325880" cy="309240"/>
+            <a:off x="3108960" y="4754880"/>
+            <a:ext cx="1325520" cy="308880"/>
           </a:xfrm>
           <a:prstGeom prst="rect">
             <a:avLst/>
@@ -29071,8 +29089,8 @@
         </p:nvSpPr>
         <p:spPr>
           <a:xfrm>
-            <a:off x="1719000" y="4572000"/>
-            <a:ext cx="1188720" cy="309240"/>
+            <a:off x="1719000" y="4754880"/>
+            <a:ext cx="1188360" cy="308880"/>
           </a:xfrm>
           <a:prstGeom prst="rect">
             <a:avLst/>
@@ -29166,7 +29184,7 @@
         <p:spPr>
           <a:xfrm>
             <a:off x="0" y="0"/>
-            <a:ext cx="52920" cy="5141880"/>
+            <a:ext cx="52560" cy="5141520"/>
           </a:xfrm>
           <a:prstGeom prst="rect">
             <a:avLst/>
@@ -29215,7 +29233,7 @@
         <p:spPr>
           <a:xfrm>
             <a:off x="274320" y="228600"/>
-            <a:ext cx="8593560" cy="217800"/>
+            <a:ext cx="8593200" cy="217440"/>
           </a:xfrm>
           <a:prstGeom prst="rect">
             <a:avLst/>
@@ -29245,7 +29263,7 @@
               </a:tabLst>
             </a:pPr>
             <a:r>
-              <a:rPr b="1" lang="en-US" sz="850" spc="335" strike="noStrike">
+              <a:rPr b="1" lang="en-US" sz="850" spc="333" strike="noStrike">
                 <a:solidFill>
                   <a:srgbClr val="f5a623"/>
                 </a:solidFill>
@@ -29272,7 +29290,7 @@
         <p:spPr>
           <a:xfrm>
             <a:off x="274320" y="457200"/>
-            <a:ext cx="6399000" cy="546840"/>
+            <a:ext cx="6398640" cy="546480"/>
           </a:xfrm>
           <a:prstGeom prst="rect">
             <a:avLst/>
@@ -29329,7 +29347,7 @@
         <p:spPr>
           <a:xfrm>
             <a:off x="237600" y="1115640"/>
-            <a:ext cx="2759760" cy="1698840"/>
+            <a:ext cx="2759400" cy="1698480"/>
           </a:xfrm>
           <a:prstGeom prst="roundRect">
             <a:avLst>
@@ -29384,7 +29402,7 @@
         <p:spPr>
           <a:xfrm>
             <a:off x="365760" y="1234440"/>
-            <a:ext cx="309240" cy="309240"/>
+            <a:ext cx="308880" cy="308880"/>
           </a:xfrm>
           <a:prstGeom prst="roundRect">
             <a:avLst>
@@ -29432,7 +29450,7 @@
         <p:spPr>
           <a:xfrm>
             <a:off x="365760" y="1234440"/>
-            <a:ext cx="309240" cy="309240"/>
+            <a:ext cx="308880" cy="308880"/>
           </a:xfrm>
           <a:prstGeom prst="rect">
             <a:avLst/>
@@ -29493,7 +29511,7 @@
         <p:spPr>
           <a:xfrm>
             <a:off x="2597040" y="1225440"/>
-            <a:ext cx="254160" cy="254160"/>
+            <a:ext cx="253800" cy="253800"/>
           </a:xfrm>
           <a:prstGeom prst="rect">
             <a:avLst/>
@@ -29512,7 +29530,7 @@
         <p:spPr>
           <a:xfrm>
             <a:off x="365760" y="1591200"/>
-            <a:ext cx="2503800" cy="254160"/>
+            <a:ext cx="2503440" cy="253800"/>
           </a:xfrm>
           <a:prstGeom prst="rect">
             <a:avLst/>
@@ -29569,7 +29587,7 @@
         <p:spPr>
           <a:xfrm>
             <a:off x="365760" y="1883520"/>
-            <a:ext cx="2503800" cy="802800"/>
+            <a:ext cx="2503440" cy="802440"/>
           </a:xfrm>
           <a:prstGeom prst="rect">
             <a:avLst/>
@@ -29712,7 +29730,7 @@
         <p:spPr>
           <a:xfrm>
             <a:off x="3182040" y="1115640"/>
-            <a:ext cx="2759760" cy="1698840"/>
+            <a:ext cx="2759400" cy="1698480"/>
           </a:xfrm>
           <a:prstGeom prst="roundRect">
             <a:avLst>
@@ -29767,7 +29785,7 @@
         <p:spPr>
           <a:xfrm>
             <a:off x="3310200" y="1234440"/>
-            <a:ext cx="309240" cy="309240"/>
+            <a:ext cx="308880" cy="308880"/>
           </a:xfrm>
           <a:prstGeom prst="roundRect">
             <a:avLst>
@@ -29815,7 +29833,7 @@
         <p:spPr>
           <a:xfrm>
             <a:off x="3310200" y="1234440"/>
-            <a:ext cx="309240" cy="309240"/>
+            <a:ext cx="308880" cy="308880"/>
           </a:xfrm>
           <a:prstGeom prst="rect">
             <a:avLst/>
@@ -29876,7 +29894,7 @@
         <p:spPr>
           <a:xfrm>
             <a:off x="5541120" y="1225440"/>
-            <a:ext cx="254160" cy="254160"/>
+            <a:ext cx="253800" cy="253800"/>
           </a:xfrm>
           <a:prstGeom prst="rect">
             <a:avLst/>
@@ -29895,7 +29913,7 @@
         <p:spPr>
           <a:xfrm>
             <a:off x="3310200" y="1591200"/>
-            <a:ext cx="2503800" cy="254160"/>
+            <a:ext cx="2503440" cy="253800"/>
           </a:xfrm>
           <a:prstGeom prst="rect">
             <a:avLst/>
@@ -29952,7 +29970,7 @@
         <p:spPr>
           <a:xfrm>
             <a:off x="3310200" y="1883520"/>
-            <a:ext cx="2503800" cy="802800"/>
+            <a:ext cx="2503440" cy="802440"/>
           </a:xfrm>
           <a:prstGeom prst="rect">
             <a:avLst/>
@@ -30095,7 +30113,7 @@
         <p:spPr>
           <a:xfrm>
             <a:off x="6126480" y="1115640"/>
-            <a:ext cx="2759760" cy="1698840"/>
+            <a:ext cx="2759400" cy="1698480"/>
           </a:xfrm>
           <a:prstGeom prst="roundRect">
             <a:avLst>
@@ -30150,7 +30168,7 @@
         <p:spPr>
           <a:xfrm>
             <a:off x="6254640" y="1234440"/>
-            <a:ext cx="309240" cy="309240"/>
+            <a:ext cx="308880" cy="308880"/>
           </a:xfrm>
           <a:prstGeom prst="roundRect">
             <a:avLst>
@@ -30198,7 +30216,7 @@
         <p:spPr>
           <a:xfrm>
             <a:off x="6254640" y="1234440"/>
-            <a:ext cx="309240" cy="309240"/>
+            <a:ext cx="308880" cy="308880"/>
           </a:xfrm>
           <a:prstGeom prst="rect">
             <a:avLst/>
@@ -30259,7 +30277,7 @@
         <p:spPr>
           <a:xfrm>
             <a:off x="8485560" y="1225440"/>
-            <a:ext cx="254160" cy="254160"/>
+            <a:ext cx="253800" cy="253800"/>
           </a:xfrm>
           <a:prstGeom prst="rect">
             <a:avLst/>
@@ -30278,7 +30296,7 @@
         <p:spPr>
           <a:xfrm>
             <a:off x="6254640" y="1591200"/>
-            <a:ext cx="2503800" cy="254160"/>
+            <a:ext cx="2503440" cy="253800"/>
           </a:xfrm>
           <a:prstGeom prst="rect">
             <a:avLst/>
@@ -30335,7 +30353,7 @@
         <p:spPr>
           <a:xfrm>
             <a:off x="6254640" y="1883520"/>
-            <a:ext cx="2503800" cy="802800"/>
+            <a:ext cx="2503440" cy="802440"/>
           </a:xfrm>
           <a:prstGeom prst="rect">
             <a:avLst/>
@@ -30478,7 +30496,7 @@
         <p:spPr>
           <a:xfrm>
             <a:off x="237600" y="2944440"/>
-            <a:ext cx="2759760" cy="1698840"/>
+            <a:ext cx="2759400" cy="1698480"/>
           </a:xfrm>
           <a:prstGeom prst="roundRect">
             <a:avLst>
@@ -30533,7 +30551,7 @@
         <p:spPr>
           <a:xfrm>
             <a:off x="365760" y="3063240"/>
-            <a:ext cx="309240" cy="309240"/>
+            <a:ext cx="308880" cy="308880"/>
           </a:xfrm>
           <a:prstGeom prst="roundRect">
             <a:avLst>
@@ -30581,7 +30599,7 @@
         <p:spPr>
           <a:xfrm>
             <a:off x="365760" y="3063240"/>
-            <a:ext cx="309240" cy="309240"/>
+            <a:ext cx="308880" cy="308880"/>
           </a:xfrm>
           <a:prstGeom prst="rect">
             <a:avLst/>
@@ -30642,7 +30660,7 @@
         <p:spPr>
           <a:xfrm>
             <a:off x="2597040" y="3054240"/>
-            <a:ext cx="254160" cy="254160"/>
+            <a:ext cx="253800" cy="253800"/>
           </a:xfrm>
           <a:prstGeom prst="rect">
             <a:avLst/>
@@ -30661,7 +30679,7 @@
         <p:spPr>
           <a:xfrm>
             <a:off x="365760" y="3420000"/>
-            <a:ext cx="2503800" cy="254160"/>
+            <a:ext cx="2503440" cy="253800"/>
           </a:xfrm>
           <a:prstGeom prst="rect">
             <a:avLst/>
@@ -30718,7 +30736,7 @@
         <p:spPr>
           <a:xfrm>
             <a:off x="365760" y="3712320"/>
-            <a:ext cx="2503800" cy="802800"/>
+            <a:ext cx="2503440" cy="802440"/>
           </a:xfrm>
           <a:prstGeom prst="rect">
             <a:avLst/>
@@ -30861,7 +30879,7 @@
         <p:spPr>
           <a:xfrm>
             <a:off x="3182040" y="2944440"/>
-            <a:ext cx="2759760" cy="1698840"/>
+            <a:ext cx="2759400" cy="1698480"/>
           </a:xfrm>
           <a:prstGeom prst="roundRect">
             <a:avLst>
@@ -30916,7 +30934,7 @@
         <p:spPr>
           <a:xfrm>
             <a:off x="3310200" y="3063240"/>
-            <a:ext cx="309240" cy="309240"/>
+            <a:ext cx="308880" cy="308880"/>
           </a:xfrm>
           <a:prstGeom prst="roundRect">
             <a:avLst>
@@ -30964,7 +30982,7 @@
         <p:spPr>
           <a:xfrm>
             <a:off x="3310200" y="3063240"/>
-            <a:ext cx="309240" cy="309240"/>
+            <a:ext cx="308880" cy="308880"/>
           </a:xfrm>
           <a:prstGeom prst="rect">
             <a:avLst/>
@@ -31025,7 +31043,7 @@
         <p:spPr>
           <a:xfrm>
             <a:off x="5541120" y="3054240"/>
-            <a:ext cx="254160" cy="254160"/>
+            <a:ext cx="253800" cy="253800"/>
           </a:xfrm>
           <a:prstGeom prst="rect">
             <a:avLst/>
@@ -31044,7 +31062,7 @@
         <p:spPr>
           <a:xfrm>
             <a:off x="3310200" y="3420000"/>
-            <a:ext cx="2503800" cy="254160"/>
+            <a:ext cx="2503440" cy="253800"/>
           </a:xfrm>
           <a:prstGeom prst="rect">
             <a:avLst/>
@@ -31101,7 +31119,7 @@
         <p:spPr>
           <a:xfrm>
             <a:off x="3310200" y="3712320"/>
-            <a:ext cx="2503800" cy="802800"/>
+            <a:ext cx="2503440" cy="802440"/>
           </a:xfrm>
           <a:prstGeom prst="rect">
             <a:avLst/>
@@ -31244,7 +31262,7 @@
         <p:spPr>
           <a:xfrm>
             <a:off x="6126480" y="2944440"/>
-            <a:ext cx="2759760" cy="1698840"/>
+            <a:ext cx="2759400" cy="1698480"/>
           </a:xfrm>
           <a:prstGeom prst="roundRect">
             <a:avLst>
@@ -31299,7 +31317,7 @@
         <p:spPr>
           <a:xfrm>
             <a:off x="6254640" y="3063240"/>
-            <a:ext cx="309240" cy="309240"/>
+            <a:ext cx="308880" cy="308880"/>
           </a:xfrm>
           <a:prstGeom prst="roundRect">
             <a:avLst>
@@ -31347,7 +31365,7 @@
         <p:spPr>
           <a:xfrm>
             <a:off x="6254640" y="3063240"/>
-            <a:ext cx="309240" cy="309240"/>
+            <a:ext cx="308880" cy="308880"/>
           </a:xfrm>
           <a:prstGeom prst="rect">
             <a:avLst/>
@@ -31408,7 +31426,7 @@
         <p:spPr>
           <a:xfrm>
             <a:off x="8485560" y="3054240"/>
-            <a:ext cx="254160" cy="254160"/>
+            <a:ext cx="253800" cy="253800"/>
           </a:xfrm>
           <a:prstGeom prst="rect">
             <a:avLst/>
@@ -31427,7 +31445,7 @@
         <p:spPr>
           <a:xfrm>
             <a:off x="6254640" y="3420000"/>
-            <a:ext cx="2503800" cy="254160"/>
+            <a:ext cx="2503440" cy="253800"/>
           </a:xfrm>
           <a:prstGeom prst="rect">
             <a:avLst/>
@@ -31484,7 +31502,7 @@
         <p:spPr>
           <a:xfrm>
             <a:off x="6254640" y="3712320"/>
-            <a:ext cx="2503800" cy="802800"/>
+            <a:ext cx="2503440" cy="802440"/>
           </a:xfrm>
           <a:prstGeom prst="rect">
             <a:avLst/>
@@ -31664,7 +31682,7 @@
         <p:spPr>
           <a:xfrm>
             <a:off x="0" y="0"/>
-            <a:ext cx="52920" cy="5142240"/>
+            <a:ext cx="52560" cy="5141880"/>
           </a:xfrm>
           <a:prstGeom prst="rect">
             <a:avLst/>
@@ -31716,7 +31734,7 @@
         <p:spPr>
           <a:xfrm>
             <a:off x="274320" y="228600"/>
-            <a:ext cx="8593560" cy="217800"/>
+            <a:ext cx="8593200" cy="217440"/>
           </a:xfrm>
           <a:prstGeom prst="rect">
             <a:avLst/>
@@ -31743,7 +31761,7 @@
               </a:lnSpc>
             </a:pPr>
             <a:r>
-              <a:rPr b="1" lang="en-US" sz="850" spc="335" strike="noStrike">
+              <a:rPr b="1" lang="en-US" sz="850" spc="333" strike="noStrike">
                 <a:solidFill>
                   <a:srgbClr val="f5a623"/>
                 </a:solidFill>
@@ -31769,7 +31787,7 @@
         <p:spPr>
           <a:xfrm>
             <a:off x="274320" y="479880"/>
-            <a:ext cx="8593560" cy="698400"/>
+            <a:ext cx="8593200" cy="698040"/>
           </a:xfrm>
           <a:prstGeom prst="rect">
             <a:avLst/>
@@ -31822,7 +31840,7 @@
         <p:spPr>
           <a:xfrm>
             <a:off x="274320" y="1230120"/>
-            <a:ext cx="8593560" cy="558720"/>
+            <a:ext cx="8593200" cy="558360"/>
           </a:xfrm>
           <a:prstGeom prst="rect">
             <a:avLst/>
@@ -31906,7 +31924,7 @@
         <p:spPr>
           <a:xfrm>
             <a:off x="237600" y="1919880"/>
-            <a:ext cx="1637640" cy="2398680"/>
+            <a:ext cx="1637280" cy="2398320"/>
           </a:xfrm>
           <a:prstGeom prst="roundRect">
             <a:avLst>
@@ -31960,7 +31978,7 @@
         <p:spPr>
           <a:xfrm>
             <a:off x="237600" y="2070000"/>
-            <a:ext cx="1637640" cy="698400"/>
+            <a:ext cx="1637280" cy="698040"/>
           </a:xfrm>
           <a:prstGeom prst="rect">
             <a:avLst/>
@@ -32013,7 +32031,7 @@
         <p:spPr>
           <a:xfrm>
             <a:off x="237600" y="2800080"/>
-            <a:ext cx="1637640" cy="258480"/>
+            <a:ext cx="1637280" cy="258120"/>
           </a:xfrm>
           <a:prstGeom prst="rect">
             <a:avLst/>
@@ -32066,7 +32084,7 @@
         <p:spPr>
           <a:xfrm>
             <a:off x="532440" y="3109680"/>
-            <a:ext cx="1050480" cy="1440"/>
+            <a:ext cx="1050840" cy="1800"/>
           </a:xfrm>
           <a:prstGeom prst="straightConnector1">
             <a:avLst/>
@@ -32088,7 +32106,7 @@
         <p:spPr>
           <a:xfrm>
             <a:off x="307440" y="3200040"/>
-            <a:ext cx="1497600" cy="1038600"/>
+            <a:ext cx="1497240" cy="1038240"/>
           </a:xfrm>
           <a:prstGeom prst="rect">
             <a:avLst/>
@@ -32185,7 +32203,7 @@
         <p:spPr>
           <a:xfrm>
             <a:off x="1976760" y="1919880"/>
-            <a:ext cx="1637640" cy="2398680"/>
+            <a:ext cx="1637280" cy="2398320"/>
           </a:xfrm>
           <a:prstGeom prst="roundRect">
             <a:avLst>
@@ -32239,7 +32257,7 @@
         <p:spPr>
           <a:xfrm>
             <a:off x="1976760" y="2070000"/>
-            <a:ext cx="1637640" cy="698400"/>
+            <a:ext cx="1637280" cy="698040"/>
           </a:xfrm>
           <a:prstGeom prst="rect">
             <a:avLst/>
@@ -32292,7 +32310,7 @@
         <p:spPr>
           <a:xfrm>
             <a:off x="1976760" y="2800080"/>
-            <a:ext cx="1637640" cy="258480"/>
+            <a:ext cx="1637280" cy="258120"/>
           </a:xfrm>
           <a:prstGeom prst="rect">
             <a:avLst/>
@@ -32345,7 +32363,7 @@
         <p:spPr>
           <a:xfrm>
             <a:off x="2271600" y="3109680"/>
-            <a:ext cx="1050120" cy="1440"/>
+            <a:ext cx="1050480" cy="1800"/>
           </a:xfrm>
           <a:prstGeom prst="straightConnector1">
             <a:avLst/>
@@ -32367,7 +32385,7 @@
         <p:spPr>
           <a:xfrm>
             <a:off x="2046600" y="3200040"/>
-            <a:ext cx="1497600" cy="1038600"/>
+            <a:ext cx="1497240" cy="1038240"/>
           </a:xfrm>
           <a:prstGeom prst="rect">
             <a:avLst/>
@@ -32464,7 +32482,7 @@
         <p:spPr>
           <a:xfrm>
             <a:off x="3715560" y="1919880"/>
-            <a:ext cx="1637640" cy="2398680"/>
+            <a:ext cx="1637280" cy="2398320"/>
           </a:xfrm>
           <a:prstGeom prst="roundRect">
             <a:avLst>
@@ -32518,7 +32536,7 @@
         <p:spPr>
           <a:xfrm>
             <a:off x="3715560" y="2070000"/>
-            <a:ext cx="1637640" cy="698400"/>
+            <a:ext cx="1637280" cy="698040"/>
           </a:xfrm>
           <a:prstGeom prst="rect">
             <a:avLst/>
@@ -32571,7 +32589,7 @@
         <p:spPr>
           <a:xfrm>
             <a:off x="3715560" y="2800080"/>
-            <a:ext cx="1637640" cy="258480"/>
+            <a:ext cx="1637280" cy="258120"/>
           </a:xfrm>
           <a:prstGeom prst="rect">
             <a:avLst/>
@@ -32624,7 +32642,7 @@
         <p:spPr>
           <a:xfrm>
             <a:off x="4010400" y="3109680"/>
-            <a:ext cx="1050480" cy="1440"/>
+            <a:ext cx="1050840" cy="1800"/>
           </a:xfrm>
           <a:prstGeom prst="straightConnector1">
             <a:avLst/>
@@ -32646,7 +32664,7 @@
         <p:spPr>
           <a:xfrm>
             <a:off x="3785760" y="3200040"/>
-            <a:ext cx="1497600" cy="1038600"/>
+            <a:ext cx="1497240" cy="1038240"/>
           </a:xfrm>
           <a:prstGeom prst="rect">
             <a:avLst/>
@@ -32743,7 +32761,7 @@
         <p:spPr>
           <a:xfrm>
             <a:off x="5454720" y="1919880"/>
-            <a:ext cx="1637640" cy="2398680"/>
+            <a:ext cx="1637280" cy="2398320"/>
           </a:xfrm>
           <a:prstGeom prst="roundRect">
             <a:avLst>
@@ -32797,7 +32815,7 @@
         <p:spPr>
           <a:xfrm>
             <a:off x="5454720" y="2070000"/>
-            <a:ext cx="1637640" cy="698400"/>
+            <a:ext cx="1637280" cy="698040"/>
           </a:xfrm>
           <a:prstGeom prst="rect">
             <a:avLst/>
@@ -32850,7 +32868,7 @@
         <p:spPr>
           <a:xfrm>
             <a:off x="5454720" y="2800080"/>
-            <a:ext cx="1637640" cy="258480"/>
+            <a:ext cx="1637280" cy="258120"/>
           </a:xfrm>
           <a:prstGeom prst="rect">
             <a:avLst/>
@@ -32903,7 +32921,7 @@
         <p:spPr>
           <a:xfrm>
             <a:off x="5749560" y="3109680"/>
-            <a:ext cx="1050120" cy="1440"/>
+            <a:ext cx="1050480" cy="1800"/>
           </a:xfrm>
           <a:prstGeom prst="straightConnector1">
             <a:avLst/>
@@ -32925,7 +32943,7 @@
         <p:spPr>
           <a:xfrm>
             <a:off x="5524560" y="3200040"/>
-            <a:ext cx="1497600" cy="1038600"/>
+            <a:ext cx="1497240" cy="1038240"/>
           </a:xfrm>
           <a:prstGeom prst="rect">
             <a:avLst/>
@@ -33022,7 +33040,7 @@
         <p:spPr>
           <a:xfrm>
             <a:off x="7193520" y="1919880"/>
-            <a:ext cx="1637640" cy="2398680"/>
+            <a:ext cx="1637280" cy="2398320"/>
           </a:xfrm>
           <a:prstGeom prst="roundRect">
             <a:avLst>
@@ -33076,7 +33094,7 @@
         <p:spPr>
           <a:xfrm>
             <a:off x="7193520" y="2070000"/>
-            <a:ext cx="1637640" cy="698400"/>
+            <a:ext cx="1637280" cy="698040"/>
           </a:xfrm>
           <a:prstGeom prst="rect">
             <a:avLst/>
@@ -33129,7 +33147,7 @@
         <p:spPr>
           <a:xfrm>
             <a:off x="7193520" y="2800080"/>
-            <a:ext cx="1637640" cy="258480"/>
+            <a:ext cx="1637280" cy="258120"/>
           </a:xfrm>
           <a:prstGeom prst="rect">
             <a:avLst/>
@@ -33182,7 +33200,7 @@
         <p:spPr>
           <a:xfrm>
             <a:off x="7488360" y="3109680"/>
-            <a:ext cx="1050480" cy="1440"/>
+            <a:ext cx="1050840" cy="1800"/>
           </a:xfrm>
           <a:prstGeom prst="straightConnector1">
             <a:avLst/>
@@ -33204,7 +33222,7 @@
         <p:spPr>
           <a:xfrm>
             <a:off x="7263720" y="3200040"/>
-            <a:ext cx="1497600" cy="1038600"/>
+            <a:ext cx="1497240" cy="1038240"/>
           </a:xfrm>
           <a:prstGeom prst="rect">
             <a:avLst/>
@@ -33310,7 +33328,7 @@
         <p:spPr>
           <a:xfrm>
             <a:off x="237600" y="4470120"/>
-            <a:ext cx="8593560" cy="598680"/>
+            <a:ext cx="8593200" cy="598320"/>
           </a:xfrm>
           <a:prstGeom prst="roundRect">
             <a:avLst>
@@ -33364,7 +33382,7 @@
         <p:spPr>
           <a:xfrm>
             <a:off x="349920" y="4470120"/>
-            <a:ext cx="1498680" cy="238680"/>
+            <a:ext cx="2164680" cy="238320"/>
           </a:xfrm>
           <a:prstGeom prst="rect">
             <a:avLst/>
@@ -33391,7 +33409,7 @@
               </a:lnSpc>
             </a:pPr>
             <a:r>
-              <a:rPr b="1" lang="en-US" sz="900" spc="239" strike="noStrike">
+              <a:rPr b="1" lang="en-US" sz="900" spc="236" strike="noStrike">
                 <a:solidFill>
                   <a:srgbClr val="f5a623"/>
                 </a:solidFill>
@@ -33417,7 +33435,7 @@
         <p:spPr>
           <a:xfrm>
             <a:off x="349920" y="4749840"/>
-            <a:ext cx="1498680" cy="258480"/>
+            <a:ext cx="1498320" cy="258120"/>
           </a:xfrm>
           <a:prstGeom prst="rect">
             <a:avLst/>
@@ -33470,7 +33488,7 @@
         <p:spPr>
           <a:xfrm>
             <a:off x="1917720" y="4470120"/>
-            <a:ext cx="1309680" cy="598680"/>
+            <a:ext cx="1309320" cy="598320"/>
           </a:xfrm>
           <a:prstGeom prst="rect">
             <a:avLst/>
@@ -33545,7 +33563,7 @@
         <p:spPr>
           <a:xfrm>
             <a:off x="3308760" y="4470120"/>
-            <a:ext cx="1309680" cy="598680"/>
+            <a:ext cx="1309320" cy="598320"/>
           </a:xfrm>
           <a:prstGeom prst="rect">
             <a:avLst/>
@@ -33620,7 +33638,7 @@
         <p:spPr>
           <a:xfrm>
             <a:off x="4699440" y="4470120"/>
-            <a:ext cx="1309680" cy="598680"/>
+            <a:ext cx="1309320" cy="598320"/>
           </a:xfrm>
           <a:prstGeom prst="rect">
             <a:avLst/>
@@ -33695,7 +33713,7 @@
         <p:spPr>
           <a:xfrm>
             <a:off x="6090480" y="4470120"/>
-            <a:ext cx="1309680" cy="598680"/>
+            <a:ext cx="1309320" cy="598320"/>
           </a:xfrm>
           <a:prstGeom prst="rect">
             <a:avLst/>
@@ -33728,6 +33746,15 @@
                 </a:solidFill>
                 <a:latin typeface="Calibri"/>
               </a:rPr>
+              <a:t>               </a:t>
+            </a:r>
+            <a:r>
+              <a:rPr b="0" lang="en-US" sz="1000" spc="-1" strike="noStrike">
+                <a:solidFill>
+                  <a:srgbClr val="ffffff"/>
+                </a:solidFill>
+                <a:latin typeface="Calibri"/>
+              </a:rPr>
               <a:t>AI-102</a:t>
             </a:r>
             <a:endParaRPr b="0" lang="en-US" sz="1000" spc="-1" strike="noStrike">
@@ -33770,7 +33797,7 @@
         <p:spPr>
           <a:xfrm>
             <a:off x="7481520" y="4470120"/>
-            <a:ext cx="1309680" cy="598680"/>
+            <a:ext cx="1309320" cy="598320"/>
           </a:xfrm>
           <a:prstGeom prst="rect">
             <a:avLst/>
@@ -33882,7 +33909,7 @@
         <p:spPr>
           <a:xfrm>
             <a:off x="0" y="0"/>
-            <a:ext cx="52920" cy="5141880"/>
+            <a:ext cx="52560" cy="5141520"/>
           </a:xfrm>
           <a:prstGeom prst="rect">
             <a:avLst/>
@@ -33931,7 +33958,7 @@
         <p:spPr>
           <a:xfrm>
             <a:off x="274320" y="228600"/>
-            <a:ext cx="8593560" cy="217800"/>
+            <a:ext cx="8593200" cy="217440"/>
           </a:xfrm>
           <a:prstGeom prst="rect">
             <a:avLst/>
@@ -33961,7 +33988,7 @@
               </a:tabLst>
             </a:pPr>
             <a:r>
-              <a:rPr b="1" lang="en-US" sz="850" spc="335" strike="noStrike">
+              <a:rPr b="1" lang="en-US" sz="850" spc="333" strike="noStrike">
                 <a:solidFill>
                   <a:srgbClr val="f5a623"/>
                 </a:solidFill>
@@ -33988,7 +34015,7 @@
         <p:spPr>
           <a:xfrm>
             <a:off x="274320" y="457200"/>
-            <a:ext cx="5667480" cy="546840"/>
+            <a:ext cx="5667120" cy="546480"/>
           </a:xfrm>
           <a:prstGeom prst="rect">
             <a:avLst/>
@@ -34045,7 +34072,7 @@
         <p:spPr>
           <a:xfrm>
             <a:off x="274320" y="1005840"/>
-            <a:ext cx="6399000" cy="272520"/>
+            <a:ext cx="6398640" cy="272160"/>
           </a:xfrm>
           <a:prstGeom prst="rect">
             <a:avLst/>
@@ -34102,7 +34129,7 @@
         <p:spPr>
           <a:xfrm>
             <a:off x="7644240" y="274320"/>
-            <a:ext cx="1113840" cy="802800"/>
+            <a:ext cx="1113480" cy="802440"/>
           </a:xfrm>
           <a:prstGeom prst="roundRect">
             <a:avLst>
@@ -34150,7 +34177,7 @@
         <p:spPr>
           <a:xfrm>
             <a:off x="7644240" y="292680"/>
-            <a:ext cx="1113840" cy="455400"/>
+            <a:ext cx="1113480" cy="455040"/>
           </a:xfrm>
           <a:prstGeom prst="rect">
             <a:avLst/>
@@ -34207,7 +34234,7 @@
         <p:spPr>
           <a:xfrm>
             <a:off x="7644240" y="768240"/>
-            <a:ext cx="1113840" cy="235800"/>
+            <a:ext cx="1113480" cy="235440"/>
           </a:xfrm>
           <a:prstGeom prst="rect">
             <a:avLst/>
@@ -34264,7 +34291,7 @@
         <p:spPr>
           <a:xfrm>
             <a:off x="7644240" y="1261800"/>
-            <a:ext cx="1113840" cy="455400"/>
+            <a:ext cx="1113480" cy="455040"/>
           </a:xfrm>
           <a:prstGeom prst="rect">
             <a:avLst/>
@@ -34321,7 +34348,7 @@
         <p:spPr>
           <a:xfrm>
             <a:off x="7644240" y="1737360"/>
-            <a:ext cx="1113840" cy="235800"/>
+            <a:ext cx="1113480" cy="235440"/>
           </a:xfrm>
           <a:prstGeom prst="rect">
             <a:avLst/>
@@ -34378,7 +34405,7 @@
         <p:spPr>
           <a:xfrm>
             <a:off x="237600" y="1389960"/>
-            <a:ext cx="2778120" cy="3509640"/>
+            <a:ext cx="2777760" cy="3509280"/>
           </a:xfrm>
           <a:prstGeom prst="roundRect">
             <a:avLst>
@@ -34437,7 +34464,7 @@
         <p:spPr>
           <a:xfrm>
             <a:off x="402480" y="1536120"/>
-            <a:ext cx="364320" cy="364320"/>
+            <a:ext cx="363960" cy="363960"/>
           </a:xfrm>
           <a:prstGeom prst="rect">
             <a:avLst/>
@@ -34456,7 +34483,7 @@
         <p:spPr>
           <a:xfrm>
             <a:off x="402480" y="1901880"/>
-            <a:ext cx="912600" cy="199440"/>
+            <a:ext cx="912240" cy="199080"/>
           </a:xfrm>
           <a:prstGeom prst="rect">
             <a:avLst/>
@@ -34513,7 +34540,7 @@
         <p:spPr>
           <a:xfrm>
             <a:off x="402480" y="2103120"/>
-            <a:ext cx="2448720" cy="272520"/>
+            <a:ext cx="2448360" cy="272160"/>
           </a:xfrm>
           <a:prstGeom prst="rect">
             <a:avLst/>
@@ -34570,7 +34597,7 @@
         <p:spPr>
           <a:xfrm>
             <a:off x="394920" y="2515320"/>
-            <a:ext cx="2448720" cy="18360"/>
+            <a:ext cx="2448360" cy="18000"/>
           </a:xfrm>
           <a:prstGeom prst="rect">
             <a:avLst/>
@@ -34619,7 +34646,7 @@
         <p:spPr>
           <a:xfrm>
             <a:off x="394920" y="2675880"/>
-            <a:ext cx="2448720" cy="1955160"/>
+            <a:ext cx="2448360" cy="1954800"/>
           </a:xfrm>
           <a:prstGeom prst="rect">
             <a:avLst/>
@@ -34790,7 +34817,7 @@
         <p:spPr>
           <a:xfrm>
             <a:off x="402480" y="4480560"/>
-            <a:ext cx="2448720" cy="290880"/>
+            <a:ext cx="2448360" cy="290520"/>
           </a:xfrm>
           <a:prstGeom prst="roundRect">
             <a:avLst>
@@ -34838,7 +34865,7 @@
         <p:spPr>
           <a:xfrm>
             <a:off x="402480" y="4480560"/>
-            <a:ext cx="2448720" cy="290880"/>
+            <a:ext cx="2448360" cy="290520"/>
           </a:xfrm>
           <a:prstGeom prst="rect">
             <a:avLst/>
@@ -34895,7 +34922,7 @@
         <p:spPr>
           <a:xfrm>
             <a:off x="3182040" y="1389960"/>
-            <a:ext cx="2778120" cy="3509640"/>
+            <a:ext cx="2777760" cy="3509280"/>
           </a:xfrm>
           <a:prstGeom prst="roundRect">
             <a:avLst>
@@ -34954,7 +34981,7 @@
         <p:spPr>
           <a:xfrm>
             <a:off x="3346560" y="1536120"/>
-            <a:ext cx="364320" cy="364320"/>
+            <a:ext cx="363960" cy="363960"/>
           </a:xfrm>
           <a:prstGeom prst="rect">
             <a:avLst/>
@@ -34973,7 +35000,7 @@
         <p:spPr>
           <a:xfrm>
             <a:off x="3346560" y="1902240"/>
-            <a:ext cx="912600" cy="199440"/>
+            <a:ext cx="912240" cy="199080"/>
           </a:xfrm>
           <a:prstGeom prst="rect">
             <a:avLst/>
@@ -35030,7 +35057,7 @@
         <p:spPr>
           <a:xfrm>
             <a:off x="3346560" y="2103120"/>
-            <a:ext cx="2448720" cy="272520"/>
+            <a:ext cx="2448360" cy="272160"/>
           </a:xfrm>
           <a:prstGeom prst="rect">
             <a:avLst/>
@@ -35087,7 +35114,7 @@
         <p:spPr>
           <a:xfrm>
             <a:off x="3346560" y="2512440"/>
-            <a:ext cx="2448720" cy="18360"/>
+            <a:ext cx="2448360" cy="18000"/>
           </a:xfrm>
           <a:prstGeom prst="rect">
             <a:avLst/>
@@ -35136,7 +35163,7 @@
         <p:spPr>
           <a:xfrm>
             <a:off x="3331440" y="2697840"/>
-            <a:ext cx="2448720" cy="1955160"/>
+            <a:ext cx="2448360" cy="1954800"/>
           </a:xfrm>
           <a:prstGeom prst="rect">
             <a:avLst/>
@@ -35307,7 +35334,7 @@
         <p:spPr>
           <a:xfrm>
             <a:off x="3346560" y="4480560"/>
-            <a:ext cx="2448720" cy="290880"/>
+            <a:ext cx="2448360" cy="290520"/>
           </a:xfrm>
           <a:prstGeom prst="roundRect">
             <a:avLst>
@@ -35355,7 +35382,7 @@
         <p:spPr>
           <a:xfrm>
             <a:off x="3346560" y="4480560"/>
-            <a:ext cx="2448720" cy="290880"/>
+            <a:ext cx="2448360" cy="290520"/>
           </a:xfrm>
           <a:prstGeom prst="rect">
             <a:avLst/>
@@ -35412,7 +35439,7 @@
         <p:spPr>
           <a:xfrm>
             <a:off x="6126480" y="1389960"/>
-            <a:ext cx="2778120" cy="3509640"/>
+            <a:ext cx="2777760" cy="3509280"/>
           </a:xfrm>
           <a:prstGeom prst="roundRect">
             <a:avLst>
@@ -35471,7 +35498,7 @@
         <p:spPr>
           <a:xfrm>
             <a:off x="6291000" y="1536120"/>
-            <a:ext cx="364320" cy="364320"/>
+            <a:ext cx="363960" cy="363960"/>
           </a:xfrm>
           <a:prstGeom prst="rect">
             <a:avLst/>
@@ -35490,7 +35517,7 @@
         <p:spPr>
           <a:xfrm>
             <a:off x="6291000" y="1917000"/>
-            <a:ext cx="912600" cy="199440"/>
+            <a:ext cx="912240" cy="199080"/>
           </a:xfrm>
           <a:prstGeom prst="rect">
             <a:avLst/>
@@ -35547,7 +35574,7 @@
         <p:spPr>
           <a:xfrm>
             <a:off x="6291000" y="2103120"/>
-            <a:ext cx="2448720" cy="272520"/>
+            <a:ext cx="2448360" cy="272160"/>
           </a:xfrm>
           <a:prstGeom prst="rect">
             <a:avLst/>
@@ -35604,7 +35631,7 @@
         <p:spPr>
           <a:xfrm>
             <a:off x="6291000" y="2500200"/>
-            <a:ext cx="2448720" cy="18360"/>
+            <a:ext cx="2448360" cy="18000"/>
           </a:xfrm>
           <a:prstGeom prst="rect">
             <a:avLst/>
@@ -35653,7 +35680,7 @@
         <p:spPr>
           <a:xfrm>
             <a:off x="6275880" y="2649960"/>
-            <a:ext cx="2448720" cy="1955160"/>
+            <a:ext cx="2448360" cy="1954800"/>
           </a:xfrm>
           <a:prstGeom prst="rect">
             <a:avLst/>
@@ -35824,7 +35851,7 @@
         <p:spPr>
           <a:xfrm>
             <a:off x="6291000" y="4480560"/>
-            <a:ext cx="2448720" cy="290880"/>
+            <a:ext cx="2448360" cy="290520"/>
           </a:xfrm>
           <a:prstGeom prst="roundRect">
             <a:avLst>
@@ -35872,7 +35899,7 @@
         <p:spPr>
           <a:xfrm>
             <a:off x="6291000" y="4480560"/>
-            <a:ext cx="2448720" cy="290880"/>
+            <a:ext cx="2448360" cy="290520"/>
           </a:xfrm>
           <a:prstGeom prst="rect">
             <a:avLst/>
@@ -35966,7 +35993,7 @@
         <p:spPr>
           <a:xfrm>
             <a:off x="0" y="0"/>
-            <a:ext cx="52920" cy="5141880"/>
+            <a:ext cx="52560" cy="5141520"/>
           </a:xfrm>
           <a:prstGeom prst="rect">
             <a:avLst/>
@@ -36015,7 +36042,7 @@
         <p:spPr>
           <a:xfrm>
             <a:off x="274320" y="228600"/>
-            <a:ext cx="8593560" cy="217800"/>
+            <a:ext cx="8593200" cy="217440"/>
           </a:xfrm>
           <a:prstGeom prst="rect">
             <a:avLst/>
@@ -36045,7 +36072,7 @@
               </a:tabLst>
             </a:pPr>
             <a:r>
-              <a:rPr b="1" lang="en-US" sz="850" spc="335" strike="noStrike">
+              <a:rPr b="1" lang="en-US" sz="850" spc="333" strike="noStrike">
                 <a:solidFill>
                   <a:srgbClr val="f5a623"/>
                 </a:solidFill>
@@ -36072,7 +36099,7 @@
         <p:spPr>
           <a:xfrm>
             <a:off x="274320" y="457200"/>
-            <a:ext cx="6399000" cy="546840"/>
+            <a:ext cx="6398640" cy="546480"/>
           </a:xfrm>
           <a:prstGeom prst="rect">
             <a:avLst/>
@@ -36129,7 +36156,7 @@
         <p:spPr>
           <a:xfrm>
             <a:off x="237600" y="1115640"/>
-            <a:ext cx="4222800" cy="3912120"/>
+            <a:ext cx="4222440" cy="3911760"/>
           </a:xfrm>
           <a:prstGeom prst="roundRect">
             <a:avLst>
@@ -36188,7 +36215,7 @@
         <p:spPr>
           <a:xfrm>
             <a:off x="420480" y="1261800"/>
-            <a:ext cx="327240" cy="327240"/>
+            <a:ext cx="326880" cy="326880"/>
           </a:xfrm>
           <a:prstGeom prst="rect">
             <a:avLst/>
@@ -36207,7 +36234,7 @@
         <p:spPr>
           <a:xfrm>
             <a:off x="822960" y="1280160"/>
-            <a:ext cx="912600" cy="181080"/>
+            <a:ext cx="912240" cy="180720"/>
           </a:xfrm>
           <a:prstGeom prst="rect">
             <a:avLst/>
@@ -36264,7 +36291,7 @@
         <p:spPr>
           <a:xfrm>
             <a:off x="420480" y="1627560"/>
-            <a:ext cx="3857040" cy="290880"/>
+            <a:ext cx="3856680" cy="290520"/>
           </a:xfrm>
           <a:prstGeom prst="rect">
             <a:avLst/>
@@ -36321,7 +36348,7 @@
         <p:spPr>
           <a:xfrm>
             <a:off x="420480" y="1938600"/>
-            <a:ext cx="3857040" cy="235800"/>
+            <a:ext cx="3856680" cy="235440"/>
           </a:xfrm>
           <a:prstGeom prst="rect">
             <a:avLst/>
@@ -36378,7 +36405,7 @@
         <p:spPr>
           <a:xfrm>
             <a:off x="420480" y="2286000"/>
-            <a:ext cx="3857040" cy="400680"/>
+            <a:ext cx="3856680" cy="400320"/>
           </a:xfrm>
           <a:prstGeom prst="roundRect">
             <a:avLst>
@@ -36426,7 +36453,7 @@
         <p:spPr>
           <a:xfrm>
             <a:off x="420480" y="2286000"/>
-            <a:ext cx="52920" cy="400680"/>
+            <a:ext cx="52560" cy="400320"/>
           </a:xfrm>
           <a:prstGeom prst="roundRect">
             <a:avLst>
@@ -36477,7 +36504,7 @@
         <p:spPr>
           <a:xfrm>
             <a:off x="548640" y="2304360"/>
-            <a:ext cx="3655800" cy="162720"/>
+            <a:ext cx="3655440" cy="162360"/>
           </a:xfrm>
           <a:prstGeom prst="rect">
             <a:avLst/>
@@ -36534,7 +36561,7 @@
         <p:spPr>
           <a:xfrm>
             <a:off x="548640" y="2487240"/>
-            <a:ext cx="3655800" cy="162720"/>
+            <a:ext cx="3655440" cy="162360"/>
           </a:xfrm>
           <a:prstGeom prst="rect">
             <a:avLst/>
@@ -36591,7 +36618,7 @@
         <p:spPr>
           <a:xfrm>
             <a:off x="420480" y="2788920"/>
-            <a:ext cx="3857040" cy="400680"/>
+            <a:ext cx="3856680" cy="400320"/>
           </a:xfrm>
           <a:prstGeom prst="roundRect">
             <a:avLst>
@@ -36639,7 +36666,7 @@
         <p:spPr>
           <a:xfrm>
             <a:off x="420480" y="2788920"/>
-            <a:ext cx="52920" cy="400680"/>
+            <a:ext cx="52560" cy="400320"/>
           </a:xfrm>
           <a:prstGeom prst="roundRect">
             <a:avLst>
@@ -36690,7 +36717,7 @@
         <p:spPr>
           <a:xfrm>
             <a:off x="548640" y="2807280"/>
-            <a:ext cx="3655800" cy="162720"/>
+            <a:ext cx="3655440" cy="162360"/>
           </a:xfrm>
           <a:prstGeom prst="rect">
             <a:avLst/>
@@ -36747,7 +36774,7 @@
         <p:spPr>
           <a:xfrm>
             <a:off x="548640" y="2990160"/>
-            <a:ext cx="3655800" cy="162720"/>
+            <a:ext cx="3655440" cy="162360"/>
           </a:xfrm>
           <a:prstGeom prst="rect">
             <a:avLst/>
@@ -36804,7 +36831,7 @@
         <p:spPr>
           <a:xfrm>
             <a:off x="420480" y="3291840"/>
-            <a:ext cx="3857040" cy="400680"/>
+            <a:ext cx="3856680" cy="400320"/>
           </a:xfrm>
           <a:prstGeom prst="roundRect">
             <a:avLst>
@@ -36852,7 +36879,7 @@
         <p:spPr>
           <a:xfrm>
             <a:off x="420480" y="3291840"/>
-            <a:ext cx="52920" cy="400680"/>
+            <a:ext cx="52560" cy="400320"/>
           </a:xfrm>
           <a:prstGeom prst="roundRect">
             <a:avLst>
@@ -36903,7 +36930,7 @@
         <p:spPr>
           <a:xfrm>
             <a:off x="548640" y="3310200"/>
-            <a:ext cx="3655800" cy="162720"/>
+            <a:ext cx="3655440" cy="162360"/>
           </a:xfrm>
           <a:prstGeom prst="rect">
             <a:avLst/>
@@ -36960,7 +36987,7 @@
         <p:spPr>
           <a:xfrm>
             <a:off x="548640" y="3493080"/>
-            <a:ext cx="3655800" cy="162720"/>
+            <a:ext cx="3655440" cy="162360"/>
           </a:xfrm>
           <a:prstGeom prst="rect">
             <a:avLst/>
@@ -37017,7 +37044,7 @@
         <p:spPr>
           <a:xfrm>
             <a:off x="420480" y="3794760"/>
-            <a:ext cx="3857040" cy="400680"/>
+            <a:ext cx="3856680" cy="400320"/>
           </a:xfrm>
           <a:prstGeom prst="roundRect">
             <a:avLst>
@@ -37065,7 +37092,7 @@
         <p:spPr>
           <a:xfrm>
             <a:off x="420480" y="3794760"/>
-            <a:ext cx="52920" cy="400680"/>
+            <a:ext cx="52560" cy="400320"/>
           </a:xfrm>
           <a:prstGeom prst="roundRect">
             <a:avLst>
@@ -37116,7 +37143,7 @@
         <p:spPr>
           <a:xfrm>
             <a:off x="548640" y="3813120"/>
-            <a:ext cx="3655800" cy="162720"/>
+            <a:ext cx="3655440" cy="162360"/>
           </a:xfrm>
           <a:prstGeom prst="rect">
             <a:avLst/>
@@ -37173,7 +37200,7 @@
         <p:spPr>
           <a:xfrm>
             <a:off x="548640" y="3996000"/>
-            <a:ext cx="3655800" cy="162720"/>
+            <a:ext cx="3655440" cy="162360"/>
           </a:xfrm>
           <a:prstGeom prst="rect">
             <a:avLst/>
@@ -37230,7 +37257,7 @@
         <p:spPr>
           <a:xfrm>
             <a:off x="420480" y="4297680"/>
-            <a:ext cx="3857040" cy="400680"/>
+            <a:ext cx="3856680" cy="400320"/>
           </a:xfrm>
           <a:prstGeom prst="roundRect">
             <a:avLst>
@@ -37278,7 +37305,7 @@
         <p:spPr>
           <a:xfrm>
             <a:off x="420480" y="4297680"/>
-            <a:ext cx="52920" cy="400680"/>
+            <a:ext cx="52560" cy="400320"/>
           </a:xfrm>
           <a:prstGeom prst="roundRect">
             <a:avLst>
@@ -37329,7 +37356,7 @@
         <p:spPr>
           <a:xfrm>
             <a:off x="548640" y="4316040"/>
-            <a:ext cx="3655800" cy="162720"/>
+            <a:ext cx="3655440" cy="162360"/>
           </a:xfrm>
           <a:prstGeom prst="rect">
             <a:avLst/>
@@ -37386,7 +37413,7 @@
         <p:spPr>
           <a:xfrm>
             <a:off x="548640" y="4498920"/>
-            <a:ext cx="3655800" cy="162720"/>
+            <a:ext cx="3655440" cy="162360"/>
           </a:xfrm>
           <a:prstGeom prst="rect">
             <a:avLst/>
@@ -37443,7 +37470,7 @@
         <p:spPr>
           <a:xfrm>
             <a:off x="4626720" y="1115640"/>
-            <a:ext cx="4287240" cy="3912120"/>
+            <a:ext cx="4286880" cy="3911760"/>
           </a:xfrm>
           <a:prstGeom prst="roundRect">
             <a:avLst>
@@ -37502,7 +37529,7 @@
         <p:spPr>
           <a:xfrm>
             <a:off x="4809600" y="1261800"/>
-            <a:ext cx="327240" cy="327240"/>
+            <a:ext cx="326880" cy="326880"/>
           </a:xfrm>
           <a:prstGeom prst="rect">
             <a:avLst/>
@@ -37521,7 +37548,7 @@
         <p:spPr>
           <a:xfrm>
             <a:off x="5212080" y="1280160"/>
-            <a:ext cx="912600" cy="181080"/>
+            <a:ext cx="912240" cy="180720"/>
           </a:xfrm>
           <a:prstGeom prst="rect">
             <a:avLst/>
@@ -37578,7 +37605,7 @@
         <p:spPr>
           <a:xfrm>
             <a:off x="4809600" y="1627560"/>
-            <a:ext cx="3911760" cy="290880"/>
+            <a:ext cx="3911400" cy="290520"/>
           </a:xfrm>
           <a:prstGeom prst="rect">
             <a:avLst/>
@@ -37635,7 +37662,7 @@
         <p:spPr>
           <a:xfrm>
             <a:off x="4809600" y="1938600"/>
-            <a:ext cx="3911760" cy="235800"/>
+            <a:ext cx="3911400" cy="235440"/>
           </a:xfrm>
           <a:prstGeom prst="rect">
             <a:avLst/>
@@ -37692,7 +37719,7 @@
         <p:spPr>
           <a:xfrm>
             <a:off x="4809600" y="2249280"/>
-            <a:ext cx="3911760" cy="235800"/>
+            <a:ext cx="3911400" cy="235440"/>
           </a:xfrm>
           <a:prstGeom prst="rect">
             <a:avLst/>
@@ -37749,7 +37776,7 @@
         <p:spPr>
           <a:xfrm>
             <a:off x="4809600" y="2560320"/>
-            <a:ext cx="867960" cy="437040"/>
+            <a:ext cx="867600" cy="436680"/>
           </a:xfrm>
           <a:prstGeom prst="roundRect">
             <a:avLst>
@@ -37797,7 +37824,7 @@
         <p:spPr>
           <a:xfrm>
             <a:off x="4809600" y="2560320"/>
-            <a:ext cx="867960" cy="437040"/>
+            <a:ext cx="867600" cy="436680"/>
           </a:xfrm>
           <a:prstGeom prst="rect">
             <a:avLst/>
@@ -37854,7 +37881,7 @@
         <p:spPr>
           <a:xfrm>
             <a:off x="5696640" y="2633400"/>
-            <a:ext cx="89640" cy="272520"/>
+            <a:ext cx="89280" cy="272160"/>
           </a:xfrm>
           <a:prstGeom prst="rect">
             <a:avLst/>
@@ -37911,7 +37938,7 @@
         <p:spPr>
           <a:xfrm>
             <a:off x="5833800" y="2560320"/>
-            <a:ext cx="867960" cy="437040"/>
+            <a:ext cx="867600" cy="436680"/>
           </a:xfrm>
           <a:prstGeom prst="roundRect">
             <a:avLst>
@@ -37959,7 +37986,7 @@
         <p:spPr>
           <a:xfrm>
             <a:off x="5833800" y="2560320"/>
-            <a:ext cx="867960" cy="437040"/>
+            <a:ext cx="867600" cy="436680"/>
           </a:xfrm>
           <a:prstGeom prst="rect">
             <a:avLst/>
@@ -38016,7 +38043,7 @@
         <p:spPr>
           <a:xfrm>
             <a:off x="6720840" y="2633400"/>
-            <a:ext cx="89640" cy="272520"/>
+            <a:ext cx="89280" cy="272160"/>
           </a:xfrm>
           <a:prstGeom prst="rect">
             <a:avLst/>
@@ -38073,7 +38100,7 @@
         <p:spPr>
           <a:xfrm>
             <a:off x="6858000" y="2560320"/>
-            <a:ext cx="867960" cy="437040"/>
+            <a:ext cx="867600" cy="436680"/>
           </a:xfrm>
           <a:prstGeom prst="roundRect">
             <a:avLst>
@@ -38121,7 +38148,7 @@
         <p:spPr>
           <a:xfrm>
             <a:off x="6858000" y="2560320"/>
-            <a:ext cx="867960" cy="437040"/>
+            <a:ext cx="867600" cy="436680"/>
           </a:xfrm>
           <a:prstGeom prst="rect">
             <a:avLst/>
@@ -38178,7 +38205,7 @@
         <p:spPr>
           <a:xfrm>
             <a:off x="7745040" y="2633400"/>
-            <a:ext cx="89640" cy="272520"/>
+            <a:ext cx="89280" cy="272160"/>
           </a:xfrm>
           <a:prstGeom prst="rect">
             <a:avLst/>
@@ -38235,7 +38262,7 @@
         <p:spPr>
           <a:xfrm>
             <a:off x="7882200" y="2560320"/>
-            <a:ext cx="867960" cy="437040"/>
+            <a:ext cx="867600" cy="436680"/>
           </a:xfrm>
           <a:prstGeom prst="roundRect">
             <a:avLst>
@@ -38283,7 +38310,7 @@
         <p:spPr>
           <a:xfrm>
             <a:off x="7882200" y="2560320"/>
-            <a:ext cx="867960" cy="437040"/>
+            <a:ext cx="867600" cy="436680"/>
           </a:xfrm>
           <a:prstGeom prst="rect">
             <a:avLst/>
@@ -38340,7 +38367,7 @@
         <p:spPr>
           <a:xfrm>
             <a:off x="4809600" y="3163680"/>
-            <a:ext cx="867960" cy="437040"/>
+            <a:ext cx="867600" cy="436680"/>
           </a:xfrm>
           <a:prstGeom prst="roundRect">
             <a:avLst>
@@ -38388,7 +38415,7 @@
         <p:spPr>
           <a:xfrm>
             <a:off x="4809600" y="3163680"/>
-            <a:ext cx="867960" cy="437040"/>
+            <a:ext cx="867600" cy="436680"/>
           </a:xfrm>
           <a:prstGeom prst="rect">
             <a:avLst/>
@@ -38445,7 +38472,7 @@
         <p:spPr>
           <a:xfrm>
             <a:off x="5696640" y="3237120"/>
-            <a:ext cx="89640" cy="272520"/>
+            <a:ext cx="89280" cy="272160"/>
           </a:xfrm>
           <a:prstGeom prst="rect">
             <a:avLst/>
@@ -38502,7 +38529,7 @@
         <p:spPr>
           <a:xfrm>
             <a:off x="5833800" y="3163680"/>
-            <a:ext cx="867960" cy="437040"/>
+            <a:ext cx="867600" cy="436680"/>
           </a:xfrm>
           <a:prstGeom prst="roundRect">
             <a:avLst>
@@ -38550,7 +38577,7 @@
         <p:spPr>
           <a:xfrm>
             <a:off x="5833800" y="3163680"/>
-            <a:ext cx="867960" cy="437040"/>
+            <a:ext cx="867600" cy="436680"/>
           </a:xfrm>
           <a:prstGeom prst="rect">
             <a:avLst/>
@@ -38607,7 +38634,7 @@
         <p:spPr>
           <a:xfrm>
             <a:off x="6720840" y="3237120"/>
-            <a:ext cx="89640" cy="272520"/>
+            <a:ext cx="89280" cy="272160"/>
           </a:xfrm>
           <a:prstGeom prst="rect">
             <a:avLst/>
@@ -38664,7 +38691,7 @@
         <p:spPr>
           <a:xfrm>
             <a:off x="6858000" y="3163680"/>
-            <a:ext cx="867960" cy="437040"/>
+            <a:ext cx="867600" cy="436680"/>
           </a:xfrm>
           <a:prstGeom prst="roundRect">
             <a:avLst>
@@ -38712,7 +38739,7 @@
         <p:spPr>
           <a:xfrm>
             <a:off x="6858000" y="3163680"/>
-            <a:ext cx="867960" cy="437040"/>
+            <a:ext cx="867600" cy="436680"/>
           </a:xfrm>
           <a:prstGeom prst="rect">
             <a:avLst/>
@@ -38769,7 +38796,7 @@
         <p:spPr>
           <a:xfrm>
             <a:off x="7745040" y="3237120"/>
-            <a:ext cx="89640" cy="272520"/>
+            <a:ext cx="89280" cy="272160"/>
           </a:xfrm>
           <a:prstGeom prst="rect">
             <a:avLst/>
@@ -38826,7 +38853,7 @@
         <p:spPr>
           <a:xfrm>
             <a:off x="7882200" y="3163680"/>
-            <a:ext cx="867960" cy="437040"/>
+            <a:ext cx="867600" cy="436680"/>
           </a:xfrm>
           <a:prstGeom prst="roundRect">
             <a:avLst>
@@ -38874,7 +38901,7 @@
         <p:spPr>
           <a:xfrm>
             <a:off x="7882200" y="3163680"/>
-            <a:ext cx="867960" cy="437040"/>
+            <a:ext cx="867600" cy="436680"/>
           </a:xfrm>
           <a:prstGeom prst="rect">
             <a:avLst/>
@@ -38931,7 +38958,7 @@
         <p:spPr>
           <a:xfrm>
             <a:off x="4809600" y="3877200"/>
-            <a:ext cx="3911760" cy="217800"/>
+            <a:ext cx="3911400" cy="217440"/>
           </a:xfrm>
           <a:prstGeom prst="rect">
             <a:avLst/>
@@ -38988,7 +39015,7 @@
         <p:spPr>
           <a:xfrm>
             <a:off x="4809600" y="4133160"/>
-            <a:ext cx="821160" cy="181080"/>
+            <a:ext cx="820800" cy="180720"/>
           </a:xfrm>
           <a:prstGeom prst="rect">
             <a:avLst/>
@@ -39045,7 +39072,7 @@
         <p:spPr>
           <a:xfrm>
             <a:off x="5486400" y="4151880"/>
-            <a:ext cx="3052440" cy="181080"/>
+            <a:ext cx="3052080" cy="180720"/>
           </a:xfrm>
           <a:prstGeom prst="rect">
             <a:avLst/>
@@ -39102,7 +39129,7 @@
         <p:spPr>
           <a:xfrm>
             <a:off x="4809600" y="4334400"/>
-            <a:ext cx="821160" cy="181080"/>
+            <a:ext cx="820800" cy="180720"/>
           </a:xfrm>
           <a:prstGeom prst="rect">
             <a:avLst/>
@@ -39159,7 +39186,7 @@
         <p:spPr>
           <a:xfrm>
             <a:off x="5486400" y="4334400"/>
-            <a:ext cx="3052440" cy="181080"/>
+            <a:ext cx="3052080" cy="180720"/>
           </a:xfrm>
           <a:prstGeom prst="rect">
             <a:avLst/>
@@ -39216,7 +39243,7 @@
         <p:spPr>
           <a:xfrm>
             <a:off x="4809600" y="4535280"/>
-            <a:ext cx="821160" cy="181080"/>
+            <a:ext cx="820800" cy="180720"/>
           </a:xfrm>
           <a:prstGeom prst="rect">
             <a:avLst/>
@@ -39273,7 +39300,7 @@
         <p:spPr>
           <a:xfrm>
             <a:off x="5486400" y="4554000"/>
-            <a:ext cx="3052440" cy="181080"/>
+            <a:ext cx="3052080" cy="180720"/>
           </a:xfrm>
           <a:prstGeom prst="rect">
             <a:avLst/>
@@ -39330,7 +39357,7 @@
         <p:spPr>
           <a:xfrm>
             <a:off x="4809600" y="4736520"/>
-            <a:ext cx="821160" cy="181080"/>
+            <a:ext cx="820800" cy="180720"/>
           </a:xfrm>
           <a:prstGeom prst="rect">
             <a:avLst/>
@@ -39387,7 +39414,7 @@
         <p:spPr>
           <a:xfrm>
             <a:off x="5486400" y="4791240"/>
-            <a:ext cx="3427560" cy="181080"/>
+            <a:ext cx="3427200" cy="180720"/>
           </a:xfrm>
           <a:prstGeom prst="rect">
             <a:avLst/>
@@ -39444,7 +39471,7 @@
         <p:spPr>
           <a:xfrm>
             <a:off x="4628160" y="530280"/>
-            <a:ext cx="4286160" cy="473760"/>
+            <a:ext cx="4285800" cy="473400"/>
           </a:xfrm>
           <a:prstGeom prst="roundRect">
             <a:avLst>
@@ -39492,7 +39519,7 @@
         <p:spPr>
           <a:xfrm>
             <a:off x="4800600" y="530280"/>
-            <a:ext cx="4113720" cy="437040"/>
+            <a:ext cx="4113360" cy="436680"/>
           </a:xfrm>
           <a:prstGeom prst="rect">
             <a:avLst/>
@@ -39586,7 +39613,7 @@
         <p:spPr>
           <a:xfrm>
             <a:off x="0" y="0"/>
-            <a:ext cx="52920" cy="5141880"/>
+            <a:ext cx="52560" cy="5141520"/>
           </a:xfrm>
           <a:prstGeom prst="rect">
             <a:avLst/>
@@ -39635,7 +39662,7 @@
         <p:spPr>
           <a:xfrm>
             <a:off x="274320" y="228600"/>
-            <a:ext cx="8593560" cy="217800"/>
+            <a:ext cx="8593200" cy="217440"/>
           </a:xfrm>
           <a:prstGeom prst="rect">
             <a:avLst/>
@@ -39665,7 +39692,7 @@
               </a:tabLst>
             </a:pPr>
             <a:r>
-              <a:rPr b="1" lang="en-US" sz="850" spc="335" strike="noStrike">
+              <a:rPr b="1" lang="en-US" sz="850" spc="333" strike="noStrike">
                 <a:solidFill>
                   <a:srgbClr val="f5a623"/>
                 </a:solidFill>
@@ -39692,7 +39719,7 @@
         <p:spPr>
           <a:xfrm>
             <a:off x="274320" y="457200"/>
-            <a:ext cx="7313400" cy="546840"/>
+            <a:ext cx="7313040" cy="546480"/>
           </a:xfrm>
           <a:prstGeom prst="rect">
             <a:avLst/>
@@ -39749,7 +39776,7 @@
         <p:spPr>
           <a:xfrm>
             <a:off x="274320" y="1005840"/>
-            <a:ext cx="8410680" cy="290880"/>
+            <a:ext cx="8410320" cy="290520"/>
           </a:xfrm>
           <a:prstGeom prst="rect">
             <a:avLst/>
@@ -39806,7 +39833,7 @@
         <p:spPr>
           <a:xfrm>
             <a:off x="255960" y="1444680"/>
-            <a:ext cx="1516320" cy="1333080"/>
+            <a:ext cx="1515960" cy="1332720"/>
           </a:xfrm>
           <a:prstGeom prst="roundRect">
             <a:avLst>
@@ -39865,7 +39892,7 @@
         <p:spPr>
           <a:xfrm>
             <a:off x="868680" y="1572840"/>
-            <a:ext cx="345600" cy="345600"/>
+            <a:ext cx="345240" cy="345240"/>
           </a:xfrm>
           <a:prstGeom prst="rect">
             <a:avLst/>
@@ -39884,7 +39911,7 @@
         <p:spPr>
           <a:xfrm>
             <a:off x="255960" y="1993320"/>
-            <a:ext cx="1571400" cy="235800"/>
+            <a:ext cx="1571040" cy="235440"/>
           </a:xfrm>
           <a:prstGeom prst="rect">
             <a:avLst/>
@@ -39941,7 +39968,7 @@
         <p:spPr>
           <a:xfrm>
             <a:off x="255960" y="2249280"/>
-            <a:ext cx="1516320" cy="528480"/>
+            <a:ext cx="1515960" cy="528120"/>
           </a:xfrm>
           <a:prstGeom prst="rect">
             <a:avLst/>
@@ -40024,7 +40051,7 @@
         <p:spPr>
           <a:xfrm>
             <a:off x="1828800" y="1993320"/>
-            <a:ext cx="163080" cy="327240"/>
+            <a:ext cx="162720" cy="326880"/>
           </a:xfrm>
           <a:prstGeom prst="rect">
             <a:avLst/>
@@ -40081,7 +40108,7 @@
         <p:spPr>
           <a:xfrm>
             <a:off x="2048400" y="1444680"/>
-            <a:ext cx="1515960" cy="1333080"/>
+            <a:ext cx="1515600" cy="1332720"/>
           </a:xfrm>
           <a:prstGeom prst="roundRect">
             <a:avLst>
@@ -40140,7 +40167,7 @@
         <p:spPr>
           <a:xfrm>
             <a:off x="2624760" y="1572840"/>
-            <a:ext cx="345600" cy="345600"/>
+            <a:ext cx="345240" cy="345240"/>
           </a:xfrm>
           <a:prstGeom prst="rect">
             <a:avLst/>
@@ -40159,7 +40186,7 @@
         <p:spPr>
           <a:xfrm>
             <a:off x="2030400" y="1993320"/>
-            <a:ext cx="1533960" cy="235800"/>
+            <a:ext cx="1533600" cy="235440"/>
           </a:xfrm>
           <a:prstGeom prst="rect">
             <a:avLst/>
@@ -40216,7 +40243,7 @@
         <p:spPr>
           <a:xfrm>
             <a:off x="2048400" y="2249280"/>
-            <a:ext cx="1515960" cy="528480"/>
+            <a:ext cx="1515600" cy="528120"/>
           </a:xfrm>
           <a:prstGeom prst="rect">
             <a:avLst/>
@@ -40299,7 +40326,7 @@
         <p:spPr>
           <a:xfrm>
             <a:off x="3602880" y="1993320"/>
-            <a:ext cx="181440" cy="327240"/>
+            <a:ext cx="181080" cy="326880"/>
           </a:xfrm>
           <a:prstGeom prst="rect">
             <a:avLst/>
@@ -40356,7 +40383,7 @@
         <p:spPr>
           <a:xfrm>
             <a:off x="3886200" y="1444680"/>
-            <a:ext cx="1415520" cy="1333080"/>
+            <a:ext cx="1415160" cy="1332720"/>
           </a:xfrm>
           <a:prstGeom prst="roundRect">
             <a:avLst>
@@ -40415,7 +40442,7 @@
         <p:spPr>
           <a:xfrm>
             <a:off x="4343400" y="1572840"/>
-            <a:ext cx="345600" cy="345600"/>
+            <a:ext cx="345240" cy="345240"/>
           </a:xfrm>
           <a:prstGeom prst="rect">
             <a:avLst/>
@@ -40434,7 +40461,7 @@
         <p:spPr>
           <a:xfrm>
             <a:off x="3785760" y="2012040"/>
-            <a:ext cx="1571040" cy="235800"/>
+            <a:ext cx="1570680" cy="235440"/>
           </a:xfrm>
           <a:prstGeom prst="rect">
             <a:avLst/>
@@ -40491,7 +40518,7 @@
         <p:spPr>
           <a:xfrm>
             <a:off x="3785760" y="2249280"/>
-            <a:ext cx="1515960" cy="528480"/>
+            <a:ext cx="1515600" cy="528120"/>
           </a:xfrm>
           <a:prstGeom prst="rect">
             <a:avLst/>
@@ -40574,7 +40601,7 @@
         <p:spPr>
           <a:xfrm>
             <a:off x="5340240" y="1993320"/>
-            <a:ext cx="126360" cy="327240"/>
+            <a:ext cx="126000" cy="326880"/>
           </a:xfrm>
           <a:prstGeom prst="rect">
             <a:avLst/>
@@ -40631,7 +40658,7 @@
         <p:spPr>
           <a:xfrm>
             <a:off x="5554080" y="1444680"/>
-            <a:ext cx="1522080" cy="1333080"/>
+            <a:ext cx="1521720" cy="1332720"/>
           </a:xfrm>
           <a:prstGeom prst="roundRect">
             <a:avLst>
@@ -40690,7 +40717,7 @@
         <p:spPr>
           <a:xfrm>
             <a:off x="6172200" y="1572840"/>
-            <a:ext cx="345600" cy="345600"/>
+            <a:ext cx="345240" cy="345240"/>
           </a:xfrm>
           <a:prstGeom prst="rect">
             <a:avLst/>
@@ -40709,7 +40736,7 @@
         <p:spPr>
           <a:xfrm>
             <a:off x="5554080" y="1993320"/>
-            <a:ext cx="1552680" cy="235800"/>
+            <a:ext cx="1552320" cy="235440"/>
           </a:xfrm>
           <a:prstGeom prst="rect">
             <a:avLst/>
@@ -40766,7 +40793,7 @@
         <p:spPr>
           <a:xfrm>
             <a:off x="5614920" y="2249280"/>
-            <a:ext cx="1461240" cy="528480"/>
+            <a:ext cx="1460880" cy="528120"/>
           </a:xfrm>
           <a:prstGeom prst="rect">
             <a:avLst/>
@@ -40849,7 +40876,7 @@
         <p:spPr>
           <a:xfrm>
             <a:off x="7108200" y="1993320"/>
-            <a:ext cx="205560" cy="327240"/>
+            <a:ext cx="205200" cy="326880"/>
           </a:xfrm>
           <a:prstGeom prst="rect">
             <a:avLst/>
@@ -40906,7 +40933,7 @@
         <p:spPr>
           <a:xfrm>
             <a:off x="7315200" y="1444680"/>
-            <a:ext cx="1461240" cy="1333080"/>
+            <a:ext cx="1460880" cy="1332720"/>
           </a:xfrm>
           <a:prstGeom prst="roundRect">
             <a:avLst>
@@ -40965,7 +40992,7 @@
         <p:spPr>
           <a:xfrm>
             <a:off x="7818120" y="1572840"/>
-            <a:ext cx="345600" cy="345600"/>
+            <a:ext cx="345240" cy="345240"/>
           </a:xfrm>
           <a:prstGeom prst="rect">
             <a:avLst/>
@@ -40984,7 +41011,7 @@
         <p:spPr>
           <a:xfrm>
             <a:off x="7205400" y="1993320"/>
-            <a:ext cx="1571040" cy="235800"/>
+            <a:ext cx="1570680" cy="235440"/>
           </a:xfrm>
           <a:prstGeom prst="rect">
             <a:avLst/>
@@ -41041,7 +41068,7 @@
         <p:spPr>
           <a:xfrm>
             <a:off x="7260480" y="2249280"/>
-            <a:ext cx="1461240" cy="528480"/>
+            <a:ext cx="1460880" cy="528120"/>
           </a:xfrm>
           <a:prstGeom prst="rect">
             <a:avLst/>
@@ -41124,7 +41151,7 @@
         <p:spPr>
           <a:xfrm>
             <a:off x="237600" y="3054240"/>
-            <a:ext cx="2796120" cy="1790280"/>
+            <a:ext cx="2795760" cy="1789920"/>
           </a:xfrm>
           <a:prstGeom prst="roundRect">
             <a:avLst>
@@ -41179,7 +41206,7 @@
         <p:spPr>
           <a:xfrm>
             <a:off x="365760" y="3173040"/>
-            <a:ext cx="309240" cy="309240"/>
+            <a:ext cx="308880" cy="308880"/>
           </a:xfrm>
           <a:prstGeom prst="roundRect">
             <a:avLst>
@@ -41227,7 +41254,7 @@
         <p:spPr>
           <a:xfrm>
             <a:off x="365760" y="3173040"/>
-            <a:ext cx="309240" cy="309240"/>
+            <a:ext cx="308880" cy="308880"/>
           </a:xfrm>
           <a:prstGeom prst="rect">
             <a:avLst/>
@@ -41284,7 +41311,7 @@
         <p:spPr>
           <a:xfrm>
             <a:off x="768240" y="3182040"/>
-            <a:ext cx="2138040" cy="272520"/>
+            <a:ext cx="2137680" cy="272160"/>
           </a:xfrm>
           <a:prstGeom prst="rect">
             <a:avLst/>
@@ -41341,7 +41368,7 @@
         <p:spPr>
           <a:xfrm>
             <a:off x="365760" y="3529440"/>
-            <a:ext cx="2540160" cy="14760"/>
+            <a:ext cx="2539800" cy="14400"/>
           </a:xfrm>
           <a:prstGeom prst="rect">
             <a:avLst/>
@@ -41390,7 +41417,7 @@
         <p:spPr>
           <a:xfrm>
             <a:off x="365760" y="3666960"/>
-            <a:ext cx="2540160" cy="1132200"/>
+            <a:ext cx="2539800" cy="1131840"/>
           </a:xfrm>
           <a:prstGeom prst="rect">
             <a:avLst/>
@@ -41533,7 +41560,7 @@
         <p:spPr>
           <a:xfrm>
             <a:off x="3218760" y="3054240"/>
-            <a:ext cx="2796120" cy="1790280"/>
+            <a:ext cx="2795760" cy="1789920"/>
           </a:xfrm>
           <a:prstGeom prst="roundRect">
             <a:avLst>
@@ -41588,7 +41615,7 @@
         <p:spPr>
           <a:xfrm>
             <a:off x="3346560" y="3173040"/>
-            <a:ext cx="309240" cy="309240"/>
+            <a:ext cx="308880" cy="308880"/>
           </a:xfrm>
           <a:prstGeom prst="roundRect">
             <a:avLst>
@@ -41636,7 +41663,7 @@
         <p:spPr>
           <a:xfrm>
             <a:off x="3346560" y="3173040"/>
-            <a:ext cx="309240" cy="309240"/>
+            <a:ext cx="308880" cy="308880"/>
           </a:xfrm>
           <a:prstGeom prst="rect">
             <a:avLst/>
@@ -41693,7 +41720,7 @@
         <p:spPr>
           <a:xfrm>
             <a:off x="3749040" y="3182040"/>
-            <a:ext cx="2138040" cy="272520"/>
+            <a:ext cx="2137680" cy="272160"/>
           </a:xfrm>
           <a:prstGeom prst="rect">
             <a:avLst/>
@@ -41750,7 +41777,7 @@
         <p:spPr>
           <a:xfrm>
             <a:off x="3346560" y="3529440"/>
-            <a:ext cx="2540160" cy="14760"/>
+            <a:ext cx="2539800" cy="14400"/>
           </a:xfrm>
           <a:prstGeom prst="rect">
             <a:avLst/>
@@ -41799,7 +41826,7 @@
         <p:spPr>
           <a:xfrm>
             <a:off x="3346560" y="3657600"/>
-            <a:ext cx="2540160" cy="1132200"/>
+            <a:ext cx="2539800" cy="1131840"/>
           </a:xfrm>
           <a:prstGeom prst="rect">
             <a:avLst/>
@@ -41942,7 +41969,7 @@
         <p:spPr>
           <a:xfrm>
             <a:off x="6199560" y="3054240"/>
-            <a:ext cx="2796120" cy="1790280"/>
+            <a:ext cx="2795760" cy="1789920"/>
           </a:xfrm>
           <a:prstGeom prst="roundRect">
             <a:avLst>
@@ -41997,7 +42024,7 @@
         <p:spPr>
           <a:xfrm>
             <a:off x="6327720" y="3173040"/>
-            <a:ext cx="309240" cy="309240"/>
+            <a:ext cx="308880" cy="308880"/>
           </a:xfrm>
           <a:prstGeom prst="roundRect">
             <a:avLst>
@@ -42045,7 +42072,7 @@
         <p:spPr>
           <a:xfrm>
             <a:off x="6327720" y="3173040"/>
-            <a:ext cx="309240" cy="309240"/>
+            <a:ext cx="308880" cy="308880"/>
           </a:xfrm>
           <a:prstGeom prst="rect">
             <a:avLst/>
@@ -42102,7 +42129,7 @@
         <p:spPr>
           <a:xfrm>
             <a:off x="6729840" y="3182040"/>
-            <a:ext cx="2138040" cy="272520"/>
+            <a:ext cx="2137680" cy="272160"/>
           </a:xfrm>
           <a:prstGeom prst="rect">
             <a:avLst/>
@@ -42159,7 +42186,7 @@
         <p:spPr>
           <a:xfrm>
             <a:off x="6327720" y="3529440"/>
-            <a:ext cx="2540160" cy="14760"/>
+            <a:ext cx="2539800" cy="14400"/>
           </a:xfrm>
           <a:prstGeom prst="rect">
             <a:avLst/>
@@ -42208,7 +42235,7 @@
         <p:spPr>
           <a:xfrm>
             <a:off x="6327720" y="3657600"/>
-            <a:ext cx="2540160" cy="1059120"/>
+            <a:ext cx="2539800" cy="1058760"/>
           </a:xfrm>
           <a:prstGeom prst="rect">
             <a:avLst/>
@@ -42388,7 +42415,7 @@
         <p:spPr>
           <a:xfrm>
             <a:off x="0" y="0"/>
-            <a:ext cx="52920" cy="5141880"/>
+            <a:ext cx="52560" cy="5141520"/>
           </a:xfrm>
           <a:prstGeom prst="rect">
             <a:avLst/>
@@ -42437,7 +42464,7 @@
         <p:spPr>
           <a:xfrm>
             <a:off x="274320" y="228600"/>
-            <a:ext cx="8593560" cy="217800"/>
+            <a:ext cx="8593200" cy="217440"/>
           </a:xfrm>
           <a:prstGeom prst="rect">
             <a:avLst/>
@@ -42467,7 +42494,7 @@
               </a:tabLst>
             </a:pPr>
             <a:r>
-              <a:rPr b="1" lang="en-US" sz="850" spc="335" strike="noStrike">
+              <a:rPr b="1" lang="en-US" sz="850" spc="333" strike="noStrike">
                 <a:solidFill>
                   <a:srgbClr val="f5a623"/>
                 </a:solidFill>
@@ -42494,7 +42521,7 @@
         <p:spPr>
           <a:xfrm>
             <a:off x="274320" y="457200"/>
-            <a:ext cx="6399000" cy="528480"/>
+            <a:ext cx="6398640" cy="528120"/>
           </a:xfrm>
           <a:prstGeom prst="rect">
             <a:avLst/>
@@ -42551,7 +42578,7 @@
         <p:spPr>
           <a:xfrm>
             <a:off x="237600" y="1078920"/>
-            <a:ext cx="4204440" cy="254160"/>
+            <a:ext cx="4204080" cy="253800"/>
           </a:xfrm>
           <a:prstGeom prst="rect">
             <a:avLst/>
@@ -43930,7 +43957,7 @@
         <p:spPr>
           <a:xfrm>
             <a:off x="4681800" y="1078920"/>
-            <a:ext cx="4222800" cy="1150200"/>
+            <a:ext cx="4222440" cy="1149840"/>
           </a:xfrm>
           <a:prstGeom prst="roundRect">
             <a:avLst>
@@ -43989,7 +44016,7 @@
         <p:spPr>
           <a:xfrm>
             <a:off x="4846320" y="1207080"/>
-            <a:ext cx="327240" cy="327240"/>
+            <a:ext cx="326880" cy="326880"/>
           </a:xfrm>
           <a:prstGeom prst="rect">
             <a:avLst/>
@@ -44008,7 +44035,7 @@
         <p:spPr>
           <a:xfrm>
             <a:off x="5266800" y="1188720"/>
-            <a:ext cx="3472920" cy="254160"/>
+            <a:ext cx="3472560" cy="253800"/>
           </a:xfrm>
           <a:prstGeom prst="rect">
             <a:avLst/>
@@ -44065,7 +44092,7 @@
         <p:spPr>
           <a:xfrm>
             <a:off x="5266800" y="1463040"/>
-            <a:ext cx="3472920" cy="656640"/>
+            <a:ext cx="3472560" cy="656280"/>
           </a:xfrm>
           <a:prstGeom prst="rect">
             <a:avLst/>
@@ -44122,7 +44149,7 @@
         <p:spPr>
           <a:xfrm>
             <a:off x="4681800" y="2340720"/>
-            <a:ext cx="4222800" cy="1150200"/>
+            <a:ext cx="4222440" cy="1149840"/>
           </a:xfrm>
           <a:prstGeom prst="roundRect">
             <a:avLst>
@@ -44181,7 +44208,7 @@
         <p:spPr>
           <a:xfrm>
             <a:off x="4846320" y="2468880"/>
-            <a:ext cx="327240" cy="327240"/>
+            <a:ext cx="326880" cy="326880"/>
           </a:xfrm>
           <a:prstGeom prst="rect">
             <a:avLst/>
@@ -44200,7 +44227,7 @@
         <p:spPr>
           <a:xfrm>
             <a:off x="5266800" y="2450520"/>
-            <a:ext cx="3472920" cy="254160"/>
+            <a:ext cx="3472560" cy="253800"/>
           </a:xfrm>
           <a:prstGeom prst="rect">
             <a:avLst/>
@@ -44257,7 +44284,7 @@
         <p:spPr>
           <a:xfrm>
             <a:off x="5266800" y="2724840"/>
-            <a:ext cx="3472920" cy="656640"/>
+            <a:ext cx="3472560" cy="656280"/>
           </a:xfrm>
           <a:prstGeom prst="rect">
             <a:avLst/>
@@ -44314,7 +44341,7 @@
         <p:spPr>
           <a:xfrm>
             <a:off x="4681800" y="3602880"/>
-            <a:ext cx="4222800" cy="1150200"/>
+            <a:ext cx="4222440" cy="1149840"/>
           </a:xfrm>
           <a:prstGeom prst="roundRect">
             <a:avLst>
@@ -44373,7 +44400,7 @@
         <p:spPr>
           <a:xfrm>
             <a:off x="4846320" y="3730680"/>
-            <a:ext cx="327240" cy="327240"/>
+            <a:ext cx="326880" cy="326880"/>
           </a:xfrm>
           <a:prstGeom prst="rect">
             <a:avLst/>
@@ -44392,7 +44419,7 @@
         <p:spPr>
           <a:xfrm>
             <a:off x="5266800" y="3712320"/>
-            <a:ext cx="3472920" cy="254160"/>
+            <a:ext cx="3472560" cy="253800"/>
           </a:xfrm>
           <a:prstGeom prst="rect">
             <a:avLst/>
@@ -44449,7 +44476,7 @@
         <p:spPr>
           <a:xfrm>
             <a:off x="5266800" y="3986640"/>
-            <a:ext cx="3472920" cy="656640"/>
+            <a:ext cx="3472560" cy="656280"/>
           </a:xfrm>
           <a:prstGeom prst="rect">
             <a:avLst/>
@@ -44506,7 +44533,7 @@
         <p:spPr>
           <a:xfrm>
             <a:off x="237600" y="3885840"/>
-            <a:ext cx="4570200" cy="199440"/>
+            <a:ext cx="4569840" cy="199080"/>
           </a:xfrm>
           <a:prstGeom prst="rect">
             <a:avLst/>
@@ -44563,7 +44590,7 @@
         <p:spPr>
           <a:xfrm>
             <a:off x="237600" y="4187880"/>
-            <a:ext cx="1242360" cy="309240"/>
+            <a:ext cx="1242000" cy="308880"/>
           </a:xfrm>
           <a:prstGeom prst="roundRect">
             <a:avLst>
@@ -44611,7 +44638,7 @@
         <p:spPr>
           <a:xfrm>
             <a:off x="237600" y="4187880"/>
-            <a:ext cx="1242360" cy="309240"/>
+            <a:ext cx="1242000" cy="308880"/>
           </a:xfrm>
           <a:prstGeom prst="rect">
             <a:avLst/>
@@ -44668,7 +44695,7 @@
         <p:spPr>
           <a:xfrm>
             <a:off x="1670400" y="4187880"/>
-            <a:ext cx="1141560" cy="309240"/>
+            <a:ext cx="1141200" cy="308880"/>
           </a:xfrm>
           <a:prstGeom prst="roundRect">
             <a:avLst>
@@ -44716,7 +44743,7 @@
         <p:spPr>
           <a:xfrm>
             <a:off x="1670400" y="4187880"/>
-            <a:ext cx="1141560" cy="309240"/>
+            <a:ext cx="1141200" cy="308880"/>
           </a:xfrm>
           <a:prstGeom prst="rect">
             <a:avLst/>
@@ -44773,7 +44800,7 @@
         <p:spPr>
           <a:xfrm>
             <a:off x="2971800" y="4187880"/>
-            <a:ext cx="1370160" cy="309240"/>
+            <a:ext cx="1369800" cy="308880"/>
           </a:xfrm>
           <a:prstGeom prst="roundRect">
             <a:avLst>
@@ -44821,7 +44848,7 @@
         <p:spPr>
           <a:xfrm>
             <a:off x="2971800" y="4187880"/>
-            <a:ext cx="1378800" cy="309240"/>
+            <a:ext cx="1378440" cy="308880"/>
           </a:xfrm>
           <a:prstGeom prst="rect">
             <a:avLst/>
@@ -44878,7 +44905,7 @@
         <p:spPr>
           <a:xfrm>
             <a:off x="228600" y="4572000"/>
-            <a:ext cx="1251360" cy="309240"/>
+            <a:ext cx="1251000" cy="308880"/>
           </a:xfrm>
           <a:prstGeom prst="roundRect">
             <a:avLst>
@@ -44926,7 +44953,7 @@
         <p:spPr>
           <a:xfrm>
             <a:off x="228600" y="4572000"/>
-            <a:ext cx="1251360" cy="309240"/>
+            <a:ext cx="1251000" cy="308880"/>
           </a:xfrm>
           <a:prstGeom prst="rect">
             <a:avLst/>
@@ -44983,7 +45010,7 @@
         <p:spPr>
           <a:xfrm>
             <a:off x="2971800" y="4572000"/>
-            <a:ext cx="1370160" cy="309240"/>
+            <a:ext cx="1369800" cy="308880"/>
           </a:xfrm>
           <a:prstGeom prst="roundRect">
             <a:avLst>
@@ -45031,7 +45058,7 @@
         <p:spPr>
           <a:xfrm>
             <a:off x="1481400" y="4572000"/>
-            <a:ext cx="1150200" cy="309240"/>
+            <a:ext cx="1149840" cy="308880"/>
           </a:xfrm>
           <a:prstGeom prst="rect">
             <a:avLst/>
@@ -45088,7 +45115,7 @@
         <p:spPr>
           <a:xfrm>
             <a:off x="1670400" y="4572000"/>
-            <a:ext cx="1141560" cy="309240"/>
+            <a:ext cx="1141200" cy="308880"/>
           </a:xfrm>
           <a:prstGeom prst="roundRect">
             <a:avLst>
@@ -45136,7 +45163,7 @@
         <p:spPr>
           <a:xfrm>
             <a:off x="2971800" y="4572000"/>
-            <a:ext cx="1370160" cy="309240"/>
+            <a:ext cx="1369800" cy="308880"/>
           </a:xfrm>
           <a:prstGeom prst="rect">
             <a:avLst/>
@@ -45193,7 +45220,7 @@
         <p:spPr>
           <a:xfrm>
             <a:off x="1670400" y="4572000"/>
-            <a:ext cx="1141560" cy="309240"/>
+            <a:ext cx="1141200" cy="308880"/>
           </a:xfrm>
           <a:prstGeom prst="rect">
             <a:avLst/>
@@ -45287,7 +45314,7 @@
         <p:spPr>
           <a:xfrm>
             <a:off x="0" y="0"/>
-            <a:ext cx="52920" cy="5141880"/>
+            <a:ext cx="52560" cy="5141520"/>
           </a:xfrm>
           <a:prstGeom prst="rect">
             <a:avLst/>
@@ -45336,7 +45363,7 @@
         <p:spPr>
           <a:xfrm>
             <a:off x="274320" y="228600"/>
-            <a:ext cx="8593560" cy="217800"/>
+            <a:ext cx="8593200" cy="217440"/>
           </a:xfrm>
           <a:prstGeom prst="rect">
             <a:avLst/>
@@ -45366,7 +45393,7 @@
               </a:tabLst>
             </a:pPr>
             <a:r>
-              <a:rPr b="1" lang="en-US" sz="850" spc="335" strike="noStrike">
+              <a:rPr b="1" lang="en-US" sz="850" spc="333" strike="noStrike">
                 <a:solidFill>
                   <a:srgbClr val="f5a623"/>
                 </a:solidFill>
@@ -45393,7 +45420,7 @@
         <p:spPr>
           <a:xfrm>
             <a:off x="274320" y="567000"/>
-            <a:ext cx="8410680" cy="693000"/>
+            <a:ext cx="8410320" cy="692640"/>
           </a:xfrm>
           <a:prstGeom prst="rect">
             <a:avLst/>
@@ -45450,7 +45477,7 @@
         <p:spPr>
           <a:xfrm>
             <a:off x="274320" y="1280160"/>
-            <a:ext cx="8410680" cy="528480"/>
+            <a:ext cx="8410320" cy="528120"/>
           </a:xfrm>
           <a:prstGeom prst="rect">
             <a:avLst/>
@@ -45533,7 +45560,7 @@
         <p:spPr>
           <a:xfrm>
             <a:off x="293040" y="1974960"/>
-            <a:ext cx="1534320" cy="1790280"/>
+            <a:ext cx="1533960" cy="1789920"/>
           </a:xfrm>
           <a:prstGeom prst="roundRect">
             <a:avLst>
@@ -45588,7 +45615,7 @@
         <p:spPr>
           <a:xfrm>
             <a:off x="293040" y="2066400"/>
-            <a:ext cx="1534320" cy="601560"/>
+            <a:ext cx="1533960" cy="601200"/>
           </a:xfrm>
           <a:prstGeom prst="rect">
             <a:avLst/>
@@ -45645,7 +45672,7 @@
         <p:spPr>
           <a:xfrm>
             <a:off x="293040" y="2716200"/>
-            <a:ext cx="1534320" cy="254160"/>
+            <a:ext cx="1533960" cy="253800"/>
           </a:xfrm>
           <a:prstGeom prst="rect">
             <a:avLst/>
@@ -45702,7 +45729,7 @@
         <p:spPr>
           <a:xfrm>
             <a:off x="503280" y="2999160"/>
-            <a:ext cx="1095480" cy="14760"/>
+            <a:ext cx="1095120" cy="14400"/>
           </a:xfrm>
           <a:prstGeom prst="rect">
             <a:avLst/>
@@ -45751,7 +45778,7 @@
         <p:spPr>
           <a:xfrm>
             <a:off x="293040" y="3026160"/>
-            <a:ext cx="1534320" cy="630000"/>
+            <a:ext cx="1533960" cy="629640"/>
           </a:xfrm>
           <a:prstGeom prst="rect">
             <a:avLst/>
@@ -45860,7 +45887,7 @@
         <p:spPr>
           <a:xfrm>
             <a:off x="2057400" y="1974960"/>
-            <a:ext cx="1534320" cy="1790280"/>
+            <a:ext cx="1533960" cy="1789920"/>
           </a:xfrm>
           <a:prstGeom prst="roundRect">
             <a:avLst>
@@ -45915,7 +45942,7 @@
         <p:spPr>
           <a:xfrm>
             <a:off x="2057400" y="2066400"/>
-            <a:ext cx="1534320" cy="601560"/>
+            <a:ext cx="1533960" cy="601200"/>
           </a:xfrm>
           <a:prstGeom prst="rect">
             <a:avLst/>
@@ -45972,7 +45999,7 @@
         <p:spPr>
           <a:xfrm>
             <a:off x="2057400" y="2724840"/>
-            <a:ext cx="1534320" cy="254160"/>
+            <a:ext cx="1533960" cy="253800"/>
           </a:xfrm>
           <a:prstGeom prst="rect">
             <a:avLst/>
@@ -46029,7 +46056,7 @@
         <p:spPr>
           <a:xfrm>
             <a:off x="2247840" y="2999160"/>
-            <a:ext cx="1095480" cy="14760"/>
+            <a:ext cx="1095120" cy="14400"/>
           </a:xfrm>
           <a:prstGeom prst="rect">
             <a:avLst/>
@@ -46078,7 +46105,7 @@
         <p:spPr>
           <a:xfrm>
             <a:off x="2057400" y="3035880"/>
-            <a:ext cx="1534320" cy="656640"/>
+            <a:ext cx="1533960" cy="656280"/>
           </a:xfrm>
           <a:prstGeom prst="rect">
             <a:avLst/>
@@ -46187,7 +46214,7 @@
         <p:spPr>
           <a:xfrm>
             <a:off x="3821760" y="1974960"/>
-            <a:ext cx="1534320" cy="1790280"/>
+            <a:ext cx="1533960" cy="1789920"/>
           </a:xfrm>
           <a:prstGeom prst="roundRect">
             <a:avLst>
@@ -46242,7 +46269,7 @@
         <p:spPr>
           <a:xfrm>
             <a:off x="3840480" y="2066400"/>
-            <a:ext cx="1515600" cy="601560"/>
+            <a:ext cx="1515240" cy="601200"/>
           </a:xfrm>
           <a:prstGeom prst="rect">
             <a:avLst/>
@@ -46299,7 +46326,7 @@
         <p:spPr>
           <a:xfrm>
             <a:off x="3840480" y="2724840"/>
-            <a:ext cx="1515600" cy="254160"/>
+            <a:ext cx="1515240" cy="253800"/>
           </a:xfrm>
           <a:prstGeom prst="rect">
             <a:avLst/>
@@ -46356,7 +46383,7 @@
         <p:spPr>
           <a:xfrm>
             <a:off x="4060080" y="2999160"/>
-            <a:ext cx="1095480" cy="14760"/>
+            <a:ext cx="1095120" cy="14400"/>
           </a:xfrm>
           <a:prstGeom prst="rect">
             <a:avLst/>
@@ -46405,7 +46432,7 @@
         <p:spPr>
           <a:xfrm>
             <a:off x="3821760" y="3035880"/>
-            <a:ext cx="1534320" cy="656640"/>
+            <a:ext cx="1533960" cy="656280"/>
           </a:xfrm>
           <a:prstGeom prst="rect">
             <a:avLst/>
@@ -46514,7 +46541,7 @@
         <p:spPr>
           <a:xfrm>
             <a:off x="5550840" y="1974960"/>
-            <a:ext cx="1534320" cy="1790280"/>
+            <a:ext cx="1533960" cy="1789920"/>
           </a:xfrm>
           <a:prstGeom prst="roundRect">
             <a:avLst>
@@ -46569,7 +46596,7 @@
         <p:spPr>
           <a:xfrm>
             <a:off x="5550840" y="2066400"/>
-            <a:ext cx="1534320" cy="601560"/>
+            <a:ext cx="1533960" cy="601200"/>
           </a:xfrm>
           <a:prstGeom prst="rect">
             <a:avLst/>
@@ -46626,7 +46653,7 @@
         <p:spPr>
           <a:xfrm>
             <a:off x="5550840" y="2724840"/>
-            <a:ext cx="1534320" cy="254160"/>
+            <a:ext cx="1533960" cy="253800"/>
           </a:xfrm>
           <a:prstGeom prst="rect">
             <a:avLst/>
@@ -46683,7 +46710,7 @@
         <p:spPr>
           <a:xfrm>
             <a:off x="5724000" y="2999160"/>
-            <a:ext cx="1095480" cy="14760"/>
+            <a:ext cx="1095120" cy="14400"/>
           </a:xfrm>
           <a:prstGeom prst="rect">
             <a:avLst/>
@@ -46732,7 +46759,7 @@
         <p:spPr>
           <a:xfrm>
             <a:off x="5577840" y="3035880"/>
-            <a:ext cx="1507320" cy="656640"/>
+            <a:ext cx="1506960" cy="656280"/>
           </a:xfrm>
           <a:prstGeom prst="rect">
             <a:avLst/>
@@ -46841,7 +46868,7 @@
         <p:spPr>
           <a:xfrm>
             <a:off x="7315200" y="1974960"/>
-            <a:ext cx="1534320" cy="1790280"/>
+            <a:ext cx="1533960" cy="1789920"/>
           </a:xfrm>
           <a:prstGeom prst="roundRect">
             <a:avLst>
@@ -46896,7 +46923,7 @@
         <p:spPr>
           <a:xfrm>
             <a:off x="7315200" y="2066400"/>
-            <a:ext cx="1534320" cy="601560"/>
+            <a:ext cx="1533960" cy="601200"/>
           </a:xfrm>
           <a:prstGeom prst="rect">
             <a:avLst/>
@@ -46953,7 +46980,7 @@
         <p:spPr>
           <a:xfrm>
             <a:off x="7315200" y="2724840"/>
-            <a:ext cx="1534320" cy="254160"/>
+            <a:ext cx="1533960" cy="253800"/>
           </a:xfrm>
           <a:prstGeom prst="rect">
             <a:avLst/>
@@ -47010,7 +47037,7 @@
         <p:spPr>
           <a:xfrm>
             <a:off x="7589880" y="2999160"/>
-            <a:ext cx="1095480" cy="14760"/>
+            <a:ext cx="1095120" cy="14400"/>
           </a:xfrm>
           <a:prstGeom prst="rect">
             <a:avLst/>
@@ -47059,7 +47086,7 @@
         <p:spPr>
           <a:xfrm>
             <a:off x="7315200" y="3035880"/>
-            <a:ext cx="1534320" cy="656640"/>
+            <a:ext cx="1533960" cy="656280"/>
           </a:xfrm>
           <a:prstGeom prst="rect">
             <a:avLst/>
@@ -47168,7 +47195,7 @@
         <p:spPr>
           <a:xfrm>
             <a:off x="237600" y="3968640"/>
-            <a:ext cx="8666640" cy="875880"/>
+            <a:ext cx="8666280" cy="875520"/>
           </a:xfrm>
           <a:prstGeom prst="roundRect">
             <a:avLst>
@@ -47216,7 +47243,7 @@
         <p:spPr>
           <a:xfrm>
             <a:off x="420480" y="4041720"/>
-            <a:ext cx="1186920" cy="199440"/>
+            <a:ext cx="1186560" cy="199080"/>
           </a:xfrm>
           <a:prstGeom prst="rect">
             <a:avLst/>
@@ -47246,7 +47273,7 @@
               </a:tabLst>
             </a:pPr>
             <a:r>
-              <a:rPr b="1" lang="en-US" sz="800" spc="188" strike="noStrike">
+              <a:rPr b="1" lang="en-US" sz="800" spc="185" strike="noStrike">
                 <a:solidFill>
                   <a:srgbClr val="f5a623"/>
                 </a:solidFill>
@@ -47273,7 +47300,7 @@
         <p:spPr>
           <a:xfrm>
             <a:off x="420480" y="4242960"/>
-            <a:ext cx="1186920" cy="199440"/>
+            <a:ext cx="1186560" cy="199080"/>
           </a:xfrm>
           <a:prstGeom prst="rect">
             <a:avLst/>
@@ -47330,7 +47357,7 @@
         <p:spPr>
           <a:xfrm>
             <a:off x="1719000" y="4078080"/>
-            <a:ext cx="18360" cy="656640"/>
+            <a:ext cx="18000" cy="656280"/>
           </a:xfrm>
           <a:prstGeom prst="rect">
             <a:avLst/>
@@ -47379,7 +47406,7 @@
         <p:spPr>
           <a:xfrm>
             <a:off x="1883520" y="4060080"/>
-            <a:ext cx="1296720" cy="675000"/>
+            <a:ext cx="1296360" cy="674640"/>
           </a:xfrm>
           <a:prstGeom prst="roundRect">
             <a:avLst>
@@ -47427,7 +47454,7 @@
         <p:spPr>
           <a:xfrm>
             <a:off x="1938600" y="4078080"/>
-            <a:ext cx="1186920" cy="638280"/>
+            <a:ext cx="1186560" cy="637920"/>
           </a:xfrm>
           <a:prstGeom prst="rect">
             <a:avLst/>
@@ -47484,7 +47511,7 @@
         <p:spPr>
           <a:xfrm>
             <a:off x="3273480" y="4060080"/>
-            <a:ext cx="1296720" cy="675000"/>
+            <a:ext cx="1296360" cy="674640"/>
           </a:xfrm>
           <a:prstGeom prst="roundRect">
             <a:avLst>
@@ -47532,7 +47559,7 @@
         <p:spPr>
           <a:xfrm>
             <a:off x="3328560" y="4078080"/>
-            <a:ext cx="1186920" cy="638280"/>
+            <a:ext cx="1186560" cy="637920"/>
           </a:xfrm>
           <a:prstGeom prst="rect">
             <a:avLst/>
@@ -47589,7 +47616,7 @@
         <p:spPr>
           <a:xfrm>
             <a:off x="4663440" y="4060080"/>
-            <a:ext cx="1296720" cy="675000"/>
+            <a:ext cx="1296360" cy="674640"/>
           </a:xfrm>
           <a:prstGeom prst="roundRect">
             <a:avLst>
@@ -47637,7 +47664,7 @@
         <p:spPr>
           <a:xfrm>
             <a:off x="4718160" y="4078080"/>
-            <a:ext cx="1186920" cy="638280"/>
+            <a:ext cx="1186560" cy="637920"/>
           </a:xfrm>
           <a:prstGeom prst="rect">
             <a:avLst/>
@@ -47694,7 +47721,7 @@
         <p:spPr>
           <a:xfrm>
             <a:off x="6053400" y="4060080"/>
-            <a:ext cx="1296720" cy="675000"/>
+            <a:ext cx="1296360" cy="674640"/>
           </a:xfrm>
           <a:prstGeom prst="roundRect">
             <a:avLst>
@@ -47742,7 +47769,7 @@
         <p:spPr>
           <a:xfrm>
             <a:off x="6108120" y="4078080"/>
-            <a:ext cx="1186920" cy="638280"/>
+            <a:ext cx="1186560" cy="637920"/>
           </a:xfrm>
           <a:prstGeom prst="rect">
             <a:avLst/>
@@ -47799,7 +47826,7 @@
         <p:spPr>
           <a:xfrm>
             <a:off x="7443360" y="4060080"/>
-            <a:ext cx="1296720" cy="675000"/>
+            <a:ext cx="1296360" cy="674640"/>
           </a:xfrm>
           <a:prstGeom prst="roundRect">
             <a:avLst>
@@ -47847,7 +47874,7 @@
         <p:spPr>
           <a:xfrm>
             <a:off x="7498080" y="4078080"/>
-            <a:ext cx="1186920" cy="638280"/>
+            <a:ext cx="1186560" cy="637920"/>
           </a:xfrm>
           <a:prstGeom prst="rect">
             <a:avLst/>
@@ -47904,7 +47931,7 @@
         <p:spPr>
           <a:xfrm>
             <a:off x="7022520" y="4352400"/>
-            <a:ext cx="1827000" cy="345600"/>
+            <a:ext cx="1826640" cy="345240"/>
           </a:xfrm>
           <a:prstGeom prst="rect">
             <a:avLst/>
@@ -47988,7 +48015,7 @@
         <p:spPr>
           <a:xfrm>
             <a:off x="0" y="0"/>
-            <a:ext cx="52920" cy="5142240"/>
+            <a:ext cx="52560" cy="5141880"/>
           </a:xfrm>
           <a:prstGeom prst="rect">
             <a:avLst/>
@@ -48040,7 +48067,7 @@
         <p:spPr>
           <a:xfrm>
             <a:off x="274320" y="228600"/>
-            <a:ext cx="8593560" cy="217800"/>
+            <a:ext cx="8593200" cy="217440"/>
           </a:xfrm>
           <a:prstGeom prst="rect">
             <a:avLst/>
@@ -48067,7 +48094,7 @@
               </a:lnSpc>
             </a:pPr>
             <a:r>
-              <a:rPr b="1" lang="en-US" sz="850" spc="335" strike="noStrike">
+              <a:rPr b="1" lang="en-US" sz="850" spc="333" strike="noStrike">
                 <a:solidFill>
                   <a:srgbClr val="f5a623"/>
                 </a:solidFill>
@@ -48093,7 +48120,7 @@
         <p:spPr>
           <a:xfrm>
             <a:off x="274320" y="457200"/>
-            <a:ext cx="6399000" cy="546840"/>
+            <a:ext cx="6398640" cy="546480"/>
           </a:xfrm>
           <a:prstGeom prst="rect">
             <a:avLst/>
@@ -48146,7 +48173,7 @@
         <p:spPr>
           <a:xfrm>
             <a:off x="237600" y="1115640"/>
-            <a:ext cx="2759760" cy="1698840"/>
+            <a:ext cx="2759400" cy="1698480"/>
           </a:xfrm>
           <a:prstGeom prst="roundRect">
             <a:avLst>
@@ -48207,7 +48234,7 @@
         <p:spPr>
           <a:xfrm>
             <a:off x="365760" y="1234800"/>
-            <a:ext cx="309240" cy="309240"/>
+            <a:ext cx="308880" cy="308880"/>
           </a:xfrm>
           <a:prstGeom prst="roundRect">
             <a:avLst>
@@ -48265,7 +48292,7 @@
         <p:spPr>
           <a:xfrm>
             <a:off x="424800" y="1293840"/>
-            <a:ext cx="191160" cy="191160"/>
+            <a:ext cx="190800" cy="190800"/>
           </a:xfrm>
           <a:prstGeom prst="rect">
             <a:avLst/>
@@ -48284,7 +48311,7 @@
         <p:spPr>
           <a:xfrm>
             <a:off x="2590560" y="1234800"/>
-            <a:ext cx="278640" cy="278640"/>
+            <a:ext cx="278280" cy="278280"/>
           </a:xfrm>
           <a:prstGeom prst="roundRect">
             <a:avLst>
@@ -48347,7 +48374,7 @@
         <p:spPr>
           <a:xfrm>
             <a:off x="365760" y="1591200"/>
-            <a:ext cx="2503440" cy="254160"/>
+            <a:ext cx="2503080" cy="253800"/>
           </a:xfrm>
           <a:prstGeom prst="rect">
             <a:avLst/>
@@ -48400,7 +48427,7 @@
         <p:spPr>
           <a:xfrm>
             <a:off x="365760" y="1883520"/>
-            <a:ext cx="2503440" cy="898920"/>
+            <a:ext cx="2503080" cy="898560"/>
           </a:xfrm>
           <a:prstGeom prst="rect">
             <a:avLst/>
@@ -48539,7 +48566,7 @@
         <p:spPr>
           <a:xfrm>
             <a:off x="3098520" y="1115640"/>
-            <a:ext cx="2759760" cy="1698840"/>
+            <a:ext cx="2759400" cy="1698480"/>
           </a:xfrm>
           <a:prstGeom prst="roundRect">
             <a:avLst>
@@ -48600,7 +48627,7 @@
         <p:spPr>
           <a:xfrm>
             <a:off x="3226680" y="1234800"/>
-            <a:ext cx="309240" cy="309240"/>
+            <a:ext cx="308880" cy="308880"/>
           </a:xfrm>
           <a:prstGeom prst="roundRect">
             <a:avLst>
@@ -48658,7 +48685,7 @@
         <p:spPr>
           <a:xfrm>
             <a:off x="3285720" y="1293840"/>
-            <a:ext cx="191160" cy="191160"/>
+            <a:ext cx="190800" cy="190800"/>
           </a:xfrm>
           <a:prstGeom prst="rect">
             <a:avLst/>
@@ -48677,7 +48704,7 @@
         <p:spPr>
           <a:xfrm>
             <a:off x="5451480" y="1234800"/>
-            <a:ext cx="278640" cy="278640"/>
+            <a:ext cx="278280" cy="278280"/>
           </a:xfrm>
           <a:prstGeom prst="roundRect">
             <a:avLst>
@@ -48740,7 +48767,7 @@
         <p:spPr>
           <a:xfrm>
             <a:off x="3226680" y="1591200"/>
-            <a:ext cx="2503440" cy="254160"/>
+            <a:ext cx="2503080" cy="253800"/>
           </a:xfrm>
           <a:prstGeom prst="rect">
             <a:avLst/>
@@ -48793,7 +48820,7 @@
         <p:spPr>
           <a:xfrm>
             <a:off x="3226680" y="1883520"/>
-            <a:ext cx="2503440" cy="898920"/>
+            <a:ext cx="2503080" cy="898560"/>
           </a:xfrm>
           <a:prstGeom prst="rect">
             <a:avLst/>
@@ -48932,7 +48959,7 @@
         <p:spPr>
           <a:xfrm>
             <a:off x="5959440" y="1115640"/>
-            <a:ext cx="2759760" cy="1698840"/>
+            <a:ext cx="2759400" cy="1698480"/>
           </a:xfrm>
           <a:prstGeom prst="roundRect">
             <a:avLst>
@@ -48993,7 +49020,7 @@
         <p:spPr>
           <a:xfrm>
             <a:off x="6087600" y="1234800"/>
-            <a:ext cx="309240" cy="309240"/>
+            <a:ext cx="308880" cy="308880"/>
           </a:xfrm>
           <a:prstGeom prst="roundRect">
             <a:avLst>
@@ -49051,7 +49078,7 @@
         <p:spPr>
           <a:xfrm>
             <a:off x="6146640" y="1293840"/>
-            <a:ext cx="191160" cy="191160"/>
+            <a:ext cx="190800" cy="190800"/>
           </a:xfrm>
           <a:prstGeom prst="rect">
             <a:avLst/>
@@ -49070,7 +49097,7 @@
         <p:spPr>
           <a:xfrm>
             <a:off x="8312400" y="1234800"/>
-            <a:ext cx="278640" cy="278640"/>
+            <a:ext cx="278280" cy="278280"/>
           </a:xfrm>
           <a:prstGeom prst="roundRect">
             <a:avLst>
@@ -49133,7 +49160,7 @@
         <p:spPr>
           <a:xfrm>
             <a:off x="6087600" y="1591200"/>
-            <a:ext cx="2503440" cy="254160"/>
+            <a:ext cx="2503080" cy="253800"/>
           </a:xfrm>
           <a:prstGeom prst="rect">
             <a:avLst/>
@@ -49186,7 +49213,7 @@
         <p:spPr>
           <a:xfrm>
             <a:off x="6087600" y="1883520"/>
-            <a:ext cx="2503440" cy="898920"/>
+            <a:ext cx="2503080" cy="898560"/>
           </a:xfrm>
           <a:prstGeom prst="rect">
             <a:avLst/>
@@ -49325,7 +49352,7 @@
         <p:spPr>
           <a:xfrm>
             <a:off x="237600" y="2945880"/>
-            <a:ext cx="2759760" cy="1698840"/>
+            <a:ext cx="2759400" cy="1698480"/>
           </a:xfrm>
           <a:prstGeom prst="roundRect">
             <a:avLst>
@@ -49386,7 +49413,7 @@
         <p:spPr>
           <a:xfrm>
             <a:off x="365760" y="3065040"/>
-            <a:ext cx="309240" cy="309240"/>
+            <a:ext cx="308880" cy="308880"/>
           </a:xfrm>
           <a:prstGeom prst="roundRect">
             <a:avLst>
@@ -49444,7 +49471,7 @@
         <p:spPr>
           <a:xfrm>
             <a:off x="424800" y="3124080"/>
-            <a:ext cx="191160" cy="191160"/>
+            <a:ext cx="190800" cy="190800"/>
           </a:xfrm>
           <a:prstGeom prst="rect">
             <a:avLst/>
@@ -49463,7 +49490,7 @@
         <p:spPr>
           <a:xfrm>
             <a:off x="2590560" y="3065040"/>
-            <a:ext cx="278640" cy="278640"/>
+            <a:ext cx="278280" cy="278280"/>
           </a:xfrm>
           <a:prstGeom prst="roundRect">
             <a:avLst>
@@ -49526,7 +49553,7 @@
         <p:spPr>
           <a:xfrm>
             <a:off x="365760" y="3421440"/>
-            <a:ext cx="2503440" cy="254160"/>
+            <a:ext cx="2503080" cy="253800"/>
           </a:xfrm>
           <a:prstGeom prst="rect">
             <a:avLst/>
@@ -49579,7 +49606,7 @@
         <p:spPr>
           <a:xfrm>
             <a:off x="365760" y="3713760"/>
-            <a:ext cx="2503440" cy="898920"/>
+            <a:ext cx="2503080" cy="898560"/>
           </a:xfrm>
           <a:prstGeom prst="rect">
             <a:avLst/>
@@ -49718,7 +49745,7 @@
         <p:spPr>
           <a:xfrm>
             <a:off x="3098520" y="2945880"/>
-            <a:ext cx="2759760" cy="1698840"/>
+            <a:ext cx="2759400" cy="1698480"/>
           </a:xfrm>
           <a:prstGeom prst="roundRect">
             <a:avLst>
@@ -49779,7 +49806,7 @@
         <p:spPr>
           <a:xfrm>
             <a:off x="3226680" y="3065040"/>
-            <a:ext cx="309240" cy="309240"/>
+            <a:ext cx="308880" cy="308880"/>
           </a:xfrm>
           <a:prstGeom prst="roundRect">
             <a:avLst>
@@ -49837,7 +49864,7 @@
         <p:spPr>
           <a:xfrm>
             <a:off x="3285720" y="3124080"/>
-            <a:ext cx="191160" cy="191160"/>
+            <a:ext cx="190800" cy="190800"/>
           </a:xfrm>
           <a:prstGeom prst="rect">
             <a:avLst/>
@@ -49856,7 +49883,7 @@
         <p:spPr>
           <a:xfrm>
             <a:off x="5451480" y="3065040"/>
-            <a:ext cx="278640" cy="278640"/>
+            <a:ext cx="278280" cy="278280"/>
           </a:xfrm>
           <a:prstGeom prst="roundRect">
             <a:avLst>
@@ -49919,7 +49946,7 @@
         <p:spPr>
           <a:xfrm>
             <a:off x="3226680" y="3421440"/>
-            <a:ext cx="2503440" cy="254160"/>
+            <a:ext cx="2503080" cy="253800"/>
           </a:xfrm>
           <a:prstGeom prst="rect">
             <a:avLst/>
@@ -49972,7 +49999,7 @@
         <p:spPr>
           <a:xfrm>
             <a:off x="3226680" y="3713760"/>
-            <a:ext cx="2503440" cy="898920"/>
+            <a:ext cx="2503080" cy="898560"/>
           </a:xfrm>
           <a:prstGeom prst="rect">
             <a:avLst/>
@@ -50111,7 +50138,7 @@
         <p:spPr>
           <a:xfrm>
             <a:off x="5959440" y="2945880"/>
-            <a:ext cx="2759760" cy="1698840"/>
+            <a:ext cx="2759400" cy="1698480"/>
           </a:xfrm>
           <a:prstGeom prst="roundRect">
             <a:avLst>
@@ -50172,7 +50199,7 @@
         <p:spPr>
           <a:xfrm>
             <a:off x="6087600" y="3065040"/>
-            <a:ext cx="309240" cy="309240"/>
+            <a:ext cx="308880" cy="308880"/>
           </a:xfrm>
           <a:prstGeom prst="roundRect">
             <a:avLst>
@@ -50230,7 +50257,7 @@
         <p:spPr>
           <a:xfrm>
             <a:off x="6146640" y="3124080"/>
-            <a:ext cx="191160" cy="191160"/>
+            <a:ext cx="190800" cy="190800"/>
           </a:xfrm>
           <a:prstGeom prst="rect">
             <a:avLst/>
@@ -50249,7 +50276,7 @@
         <p:spPr>
           <a:xfrm>
             <a:off x="8312400" y="3065040"/>
-            <a:ext cx="278640" cy="278640"/>
+            <a:ext cx="278280" cy="278280"/>
           </a:xfrm>
           <a:prstGeom prst="roundRect">
             <a:avLst>
@@ -50312,7 +50339,7 @@
         <p:spPr>
           <a:xfrm>
             <a:off x="6087600" y="3421440"/>
-            <a:ext cx="2503440" cy="254160"/>
+            <a:ext cx="2503080" cy="253800"/>
           </a:xfrm>
           <a:prstGeom prst="rect">
             <a:avLst/>
@@ -50365,7 +50392,7 @@
         <p:spPr>
           <a:xfrm>
             <a:off x="6087600" y="3713760"/>
-            <a:ext cx="2503440" cy="898920"/>
+            <a:ext cx="2503080" cy="898560"/>
           </a:xfrm>
           <a:prstGeom prst="rect">
             <a:avLst/>
@@ -50541,7 +50568,7 @@
         <p:spPr>
           <a:xfrm>
             <a:off x="0" y="0"/>
-            <a:ext cx="52920" cy="5142240"/>
+            <a:ext cx="52560" cy="5141880"/>
           </a:xfrm>
           <a:prstGeom prst="rect">
             <a:avLst/>
@@ -50593,7 +50620,7 @@
         <p:spPr>
           <a:xfrm>
             <a:off x="274320" y="228600"/>
-            <a:ext cx="8593560" cy="217800"/>
+            <a:ext cx="8593200" cy="217440"/>
           </a:xfrm>
           <a:prstGeom prst="rect">
             <a:avLst/>
@@ -50620,7 +50647,7 @@
               </a:lnSpc>
             </a:pPr>
             <a:r>
-              <a:rPr b="1" lang="en-US" sz="850" spc="335" strike="noStrike">
+              <a:rPr b="1" lang="en-US" sz="850" spc="333" strike="noStrike">
                 <a:solidFill>
                   <a:srgbClr val="f5a623"/>
                 </a:solidFill>
@@ -50646,7 +50673,7 @@
         <p:spPr>
           <a:xfrm>
             <a:off x="274320" y="457200"/>
-            <a:ext cx="6399000" cy="546840"/>
+            <a:ext cx="6398640" cy="546480"/>
           </a:xfrm>
           <a:prstGeom prst="rect">
             <a:avLst/>
@@ -50699,7 +50726,7 @@
         <p:spPr>
           <a:xfrm>
             <a:off x="4928760" y="4001400"/>
-            <a:ext cx="3931200" cy="798480"/>
+            <a:ext cx="3930840" cy="798120"/>
           </a:xfrm>
           <a:prstGeom prst="roundRect">
             <a:avLst>
@@ -50753,7 +50780,7 @@
         <p:spPr>
           <a:xfrm>
             <a:off x="5120640" y="3982680"/>
-            <a:ext cx="3656880" cy="798480"/>
+            <a:ext cx="3656520" cy="798120"/>
           </a:xfrm>
           <a:prstGeom prst="rect">
             <a:avLst/>
@@ -50828,7 +50855,7 @@
         <p:spPr>
           <a:xfrm>
             <a:off x="237600" y="1180080"/>
-            <a:ext cx="4478400" cy="3698640"/>
+            <a:ext cx="4478040" cy="3698280"/>
           </a:xfrm>
           <a:prstGeom prst="roundRect">
             <a:avLst>
@@ -50886,7 +50913,7 @@
         <p:spPr>
           <a:xfrm>
             <a:off x="367560" y="1310040"/>
-            <a:ext cx="338400" cy="338400"/>
+            <a:ext cx="338040" cy="338040"/>
           </a:xfrm>
           <a:prstGeom prst="rect">
             <a:avLst/>
@@ -50905,7 +50932,7 @@
         <p:spPr>
           <a:xfrm>
             <a:off x="797760" y="1310040"/>
-            <a:ext cx="3788640" cy="338400"/>
+            <a:ext cx="3788280" cy="338040"/>
           </a:xfrm>
           <a:prstGeom prst="rect">
             <a:avLst/>
@@ -50958,7 +50985,7 @@
         <p:spPr>
           <a:xfrm>
             <a:off x="367560" y="1720080"/>
-            <a:ext cx="4218480" cy="258480"/>
+            <a:ext cx="4218120" cy="258120"/>
           </a:xfrm>
           <a:prstGeom prst="rect">
             <a:avLst/>
@@ -51020,7 +51047,7 @@
         <p:spPr>
           <a:xfrm>
             <a:off x="367560" y="2049840"/>
-            <a:ext cx="4218480" cy="400680"/>
+            <a:ext cx="4218120" cy="400320"/>
           </a:xfrm>
           <a:prstGeom prst="roundRect">
             <a:avLst>
@@ -51074,7 +51101,7 @@
         <p:spPr>
           <a:xfrm>
             <a:off x="367560" y="2049840"/>
-            <a:ext cx="52920" cy="400680"/>
+            <a:ext cx="52560" cy="400320"/>
           </a:xfrm>
           <a:prstGeom prst="roundRect">
             <a:avLst>
@@ -51128,7 +51155,7 @@
         <p:spPr>
           <a:xfrm>
             <a:off x="495720" y="2068200"/>
-            <a:ext cx="3962160" cy="162720"/>
+            <a:ext cx="3961800" cy="162360"/>
           </a:xfrm>
           <a:prstGeom prst="rect">
             <a:avLst/>
@@ -51181,7 +51208,7 @@
         <p:spPr>
           <a:xfrm>
             <a:off x="495720" y="2251080"/>
-            <a:ext cx="3962160" cy="162720"/>
+            <a:ext cx="3961800" cy="162360"/>
           </a:xfrm>
           <a:prstGeom prst="rect">
             <a:avLst/>
@@ -51234,7 +51261,7 @@
         <p:spPr>
           <a:xfrm>
             <a:off x="367560" y="2560320"/>
-            <a:ext cx="4218480" cy="400680"/>
+            <a:ext cx="4218120" cy="400320"/>
           </a:xfrm>
           <a:prstGeom prst="roundRect">
             <a:avLst>
@@ -51288,7 +51315,7 @@
         <p:spPr>
           <a:xfrm>
             <a:off x="367560" y="2560320"/>
-            <a:ext cx="52920" cy="400680"/>
+            <a:ext cx="52560" cy="400320"/>
           </a:xfrm>
           <a:prstGeom prst="roundRect">
             <a:avLst>
@@ -51342,7 +51369,7 @@
         <p:spPr>
           <a:xfrm>
             <a:off x="495720" y="2579400"/>
-            <a:ext cx="3962160" cy="162720"/>
+            <a:ext cx="3961800" cy="162360"/>
           </a:xfrm>
           <a:prstGeom prst="rect">
             <a:avLst/>
@@ -51395,7 +51422,7 @@
         <p:spPr>
           <a:xfrm>
             <a:off x="495720" y="2779920"/>
-            <a:ext cx="3962160" cy="162720"/>
+            <a:ext cx="3961800" cy="162360"/>
           </a:xfrm>
           <a:prstGeom prst="rect">
             <a:avLst/>
@@ -51448,7 +51475,7 @@
         <p:spPr>
           <a:xfrm>
             <a:off x="367560" y="3072240"/>
-            <a:ext cx="4218480" cy="400680"/>
+            <a:ext cx="4218120" cy="400320"/>
           </a:xfrm>
           <a:prstGeom prst="roundRect">
             <a:avLst>
@@ -51502,7 +51529,7 @@
         <p:spPr>
           <a:xfrm>
             <a:off x="367560" y="3072240"/>
-            <a:ext cx="52920" cy="400680"/>
+            <a:ext cx="52560" cy="400320"/>
           </a:xfrm>
           <a:prstGeom prst="roundRect">
             <a:avLst>
@@ -51556,7 +51583,7 @@
         <p:spPr>
           <a:xfrm>
             <a:off x="495720" y="3090600"/>
-            <a:ext cx="3962160" cy="162720"/>
+            <a:ext cx="3961800" cy="162360"/>
           </a:xfrm>
           <a:prstGeom prst="rect">
             <a:avLst/>
@@ -51609,7 +51636,7 @@
         <p:spPr>
           <a:xfrm>
             <a:off x="495720" y="3291840"/>
-            <a:ext cx="3962160" cy="162720"/>
+            <a:ext cx="3961800" cy="162360"/>
           </a:xfrm>
           <a:prstGeom prst="rect">
             <a:avLst/>
@@ -51662,7 +51689,7 @@
         <p:spPr>
           <a:xfrm>
             <a:off x="352440" y="3584520"/>
-            <a:ext cx="4218480" cy="400680"/>
+            <a:ext cx="4218120" cy="400320"/>
           </a:xfrm>
           <a:prstGeom prst="roundRect">
             <a:avLst>
@@ -51716,7 +51743,7 @@
         <p:spPr>
           <a:xfrm>
             <a:off x="367560" y="3584520"/>
-            <a:ext cx="52920" cy="400680"/>
+            <a:ext cx="52560" cy="400320"/>
           </a:xfrm>
           <a:prstGeom prst="roundRect">
             <a:avLst>
@@ -51770,7 +51797,7 @@
         <p:spPr>
           <a:xfrm>
             <a:off x="495720" y="3602880"/>
-            <a:ext cx="3962160" cy="162720"/>
+            <a:ext cx="3961800" cy="162360"/>
           </a:xfrm>
           <a:prstGeom prst="rect">
             <a:avLst/>
@@ -51823,7 +51850,7 @@
         <p:spPr>
           <a:xfrm>
             <a:off x="495720" y="3803760"/>
-            <a:ext cx="3962160" cy="162720"/>
+            <a:ext cx="3961800" cy="162360"/>
           </a:xfrm>
           <a:prstGeom prst="rect">
             <a:avLst/>
@@ -51876,7 +51903,7 @@
         <p:spPr>
           <a:xfrm>
             <a:off x="367560" y="4096440"/>
-            <a:ext cx="4218480" cy="400680"/>
+            <a:ext cx="4218120" cy="400320"/>
           </a:xfrm>
           <a:prstGeom prst="roundRect">
             <a:avLst>
@@ -51930,7 +51957,7 @@
         <p:spPr>
           <a:xfrm>
             <a:off x="367560" y="4096440"/>
-            <a:ext cx="52920" cy="400680"/>
+            <a:ext cx="52560" cy="400320"/>
           </a:xfrm>
           <a:prstGeom prst="roundRect">
             <a:avLst>
@@ -51984,7 +52011,7 @@
         <p:spPr>
           <a:xfrm>
             <a:off x="495720" y="4114800"/>
-            <a:ext cx="3962160" cy="162720"/>
+            <a:ext cx="3961800" cy="162360"/>
           </a:xfrm>
           <a:prstGeom prst="rect">
             <a:avLst/>
@@ -52037,7 +52064,7 @@
         <p:spPr>
           <a:xfrm>
             <a:off x="495720" y="4316040"/>
-            <a:ext cx="3962160" cy="162720"/>
+            <a:ext cx="3961800" cy="162360"/>
           </a:xfrm>
           <a:prstGeom prst="rect">
             <a:avLst/>
@@ -52090,7 +52117,7 @@
         <p:spPr>
           <a:xfrm>
             <a:off x="4896000" y="1180080"/>
-            <a:ext cx="3970440" cy="2705400"/>
+            <a:ext cx="3970080" cy="2705040"/>
           </a:xfrm>
           <a:prstGeom prst="roundRect">
             <a:avLst>
@@ -52144,7 +52171,7 @@
         <p:spPr>
           <a:xfrm>
             <a:off x="5029200" y="1289880"/>
-            <a:ext cx="3710520" cy="238680"/>
+            <a:ext cx="3710160" cy="238320"/>
           </a:xfrm>
           <a:prstGeom prst="rect">
             <a:avLst/>
@@ -52197,7 +52224,7 @@
         <p:spPr>
           <a:xfrm>
             <a:off x="4989960" y="1599840"/>
-            <a:ext cx="3710520" cy="308520"/>
+            <a:ext cx="3710160" cy="308160"/>
           </a:xfrm>
           <a:prstGeom prst="roundRect">
             <a:avLst>
@@ -52251,7 +52278,7 @@
         <p:spPr>
           <a:xfrm>
             <a:off x="5040000" y="1599840"/>
-            <a:ext cx="1448640" cy="308520"/>
+            <a:ext cx="1448280" cy="308160"/>
           </a:xfrm>
           <a:prstGeom prst="rect">
             <a:avLst/>
@@ -52304,7 +52331,7 @@
         <p:spPr>
           <a:xfrm>
             <a:off x="6509880" y="1599840"/>
-            <a:ext cx="2000520" cy="308520"/>
+            <a:ext cx="2000160" cy="308160"/>
           </a:xfrm>
           <a:prstGeom prst="rect">
             <a:avLst/>
@@ -52357,7 +52384,7 @@
         <p:spPr>
           <a:xfrm>
             <a:off x="4989960" y="1959840"/>
-            <a:ext cx="3710520" cy="308520"/>
+            <a:ext cx="3710160" cy="308160"/>
           </a:xfrm>
           <a:prstGeom prst="roundRect">
             <a:avLst>
@@ -52411,7 +52438,7 @@
         <p:spPr>
           <a:xfrm>
             <a:off x="5040000" y="1959840"/>
-            <a:ext cx="1448640" cy="308520"/>
+            <a:ext cx="1448280" cy="308160"/>
           </a:xfrm>
           <a:prstGeom prst="rect">
             <a:avLst/>
@@ -52464,7 +52491,7 @@
         <p:spPr>
           <a:xfrm>
             <a:off x="6509880" y="1959840"/>
-            <a:ext cx="2000520" cy="308520"/>
+            <a:ext cx="2000160" cy="308160"/>
           </a:xfrm>
           <a:prstGeom prst="rect">
             <a:avLst/>
@@ -52517,7 +52544,7 @@
         <p:spPr>
           <a:xfrm>
             <a:off x="4989960" y="2319840"/>
-            <a:ext cx="3710520" cy="308520"/>
+            <a:ext cx="3710160" cy="308160"/>
           </a:xfrm>
           <a:prstGeom prst="roundRect">
             <a:avLst>
@@ -52571,7 +52598,7 @@
         <p:spPr>
           <a:xfrm>
             <a:off x="5040000" y="2319840"/>
-            <a:ext cx="1448640" cy="308520"/>
+            <a:ext cx="1448280" cy="308160"/>
           </a:xfrm>
           <a:prstGeom prst="rect">
             <a:avLst/>
@@ -52624,7 +52651,7 @@
         <p:spPr>
           <a:xfrm>
             <a:off x="6509880" y="2319840"/>
-            <a:ext cx="2000520" cy="308520"/>
+            <a:ext cx="2000160" cy="308160"/>
           </a:xfrm>
           <a:prstGeom prst="rect">
             <a:avLst/>
@@ -52677,7 +52704,7 @@
         <p:spPr>
           <a:xfrm>
             <a:off x="4989960" y="2679840"/>
-            <a:ext cx="3710520" cy="308520"/>
+            <a:ext cx="3710160" cy="308160"/>
           </a:xfrm>
           <a:prstGeom prst="roundRect">
             <a:avLst>
@@ -52731,7 +52758,7 @@
         <p:spPr>
           <a:xfrm>
             <a:off x="5040000" y="2679840"/>
-            <a:ext cx="1448640" cy="308520"/>
+            <a:ext cx="1448280" cy="308160"/>
           </a:xfrm>
           <a:prstGeom prst="rect">
             <a:avLst/>
@@ -52784,7 +52811,7 @@
         <p:spPr>
           <a:xfrm>
             <a:off x="6509880" y="2679840"/>
-            <a:ext cx="2000520" cy="308520"/>
+            <a:ext cx="2000160" cy="308160"/>
           </a:xfrm>
           <a:prstGeom prst="rect">
             <a:avLst/>
@@ -52837,7 +52864,7 @@
         <p:spPr>
           <a:xfrm>
             <a:off x="4989960" y="3039840"/>
-            <a:ext cx="3710520" cy="308520"/>
+            <a:ext cx="3710160" cy="308160"/>
           </a:xfrm>
           <a:prstGeom prst="roundRect">
             <a:avLst>
@@ -52891,7 +52918,7 @@
         <p:spPr>
           <a:xfrm>
             <a:off x="5040000" y="3039840"/>
-            <a:ext cx="1448640" cy="308520"/>
+            <a:ext cx="1448280" cy="308160"/>
           </a:xfrm>
           <a:prstGeom prst="rect">
             <a:avLst/>
@@ -52944,7 +52971,7 @@
         <p:spPr>
           <a:xfrm>
             <a:off x="6509880" y="3039840"/>
-            <a:ext cx="2000520" cy="308520"/>
+            <a:ext cx="2000160" cy="308160"/>
           </a:xfrm>
           <a:prstGeom prst="rect">
             <a:avLst/>
@@ -52997,7 +53024,7 @@
         <p:spPr>
           <a:xfrm>
             <a:off x="4989960" y="3439800"/>
-            <a:ext cx="3713400" cy="1440"/>
+            <a:ext cx="3713760" cy="1800"/>
           </a:xfrm>
           <a:prstGeom prst="straightConnector1">
             <a:avLst/>
@@ -53019,7 +53046,7 @@
         <p:spPr>
           <a:xfrm>
             <a:off x="5025960" y="3489840"/>
-            <a:ext cx="3710520" cy="238680"/>
+            <a:ext cx="3710160" cy="238320"/>
           </a:xfrm>
           <a:prstGeom prst="rect">
             <a:avLst/>
